--- a/SignQuest.pptx
+++ b/SignQuest.pptx
@@ -14,7 +14,6 @@
     <p:sldId id="262" r:id="rId13"/>
     <p:sldId id="263" r:id="rId14"/>
     <p:sldId id="264" r:id="rId15"/>
-    <p:sldId id="265" r:id="rId16"/>
   </p:sldIdLst>
   <p:sldSz cx="12188952" cy="6858000" type="screen4x3"/>
   <p:notesSz cx="6858000" cy="9144000"/>
@@ -3093,7 +3092,7 @@
     <p:bg>
       <p:bgPr>
         <a:solidFill>
-          <a:srgbClr val="1A1A08"/>
+          <a:srgbClr val="0D1B2A"/>
         </a:solidFill>
         <a:effectLst/>
       </p:bgPr>
@@ -3113,19 +3112,17 @@
         </p:nvSpPr>
         <p:spPr>
           <a:xfrm>
-            <a:off x="2286000" y="1371600"/>
-            <a:ext cx="7589520" cy="4114800"/>
+            <a:off x="0" y="0"/>
+            <a:ext cx="12188952" cy="73152"/>
           </a:xfrm>
           <a:prstGeom prst="rect">
             <a:avLst/>
           </a:prstGeom>
           <a:solidFill>
-            <a:srgbClr val="2A2A14"/>
+            <a:srgbClr val="00D4FF"/>
           </a:solidFill>
-          <a:ln w="38100">
-            <a:solidFill>
-              <a:srgbClr val="A0D040"/>
-            </a:solidFill>
+          <a:ln>
+            <a:noFill/>
           </a:ln>
         </p:spPr>
         <p:style>
@@ -3152,187 +3149,23 @@
       </p:sp>
       <p:sp>
         <p:nvSpPr>
-          <p:cNvPr id="3" name="TextBox 2"/>
-          <p:cNvSpPr txBox="1"/>
-          <p:nvPr/>
-        </p:nvSpPr>
-        <p:spPr>
-          <a:xfrm>
-            <a:off x="2286000" y="1645920"/>
-            <a:ext cx="7589520" cy="1097280"/>
-          </a:xfrm>
-          <a:prstGeom prst="rect">
-            <a:avLst/>
-          </a:prstGeom>
-          <a:noFill/>
-        </p:spPr>
-        <p:txBody>
-          <a:bodyPr wrap="square">
-            <a:spAutoFit/>
-          </a:bodyPr>
-          <a:lstStyle/>
-          <a:p>
-            <a:pPr algn="ctr"/>
-            <a:r>
-              <a:rPr sz="4400" b="1">
-                <a:solidFill>
-                  <a:srgbClr val="A0D040"/>
-                </a:solidFill>
-              </a:rPr>
-              <a:t>🤟  SignQuest</a:t>
-            </a:r>
-          </a:p>
-        </p:txBody>
-      </p:sp>
-      <p:sp>
-        <p:nvSpPr>
-          <p:cNvPr id="4" name="TextBox 3"/>
-          <p:cNvSpPr txBox="1"/>
-          <p:nvPr/>
-        </p:nvSpPr>
-        <p:spPr>
-          <a:xfrm>
-            <a:off x="2286000" y="2834640"/>
-            <a:ext cx="7589520" cy="640080"/>
-          </a:xfrm>
-          <a:prstGeom prst="rect">
-            <a:avLst/>
-          </a:prstGeom>
-          <a:noFill/>
-        </p:spPr>
-        <p:txBody>
-          <a:bodyPr wrap="square">
-            <a:spAutoFit/>
-          </a:bodyPr>
-          <a:lstStyle/>
-          <a:p>
-            <a:pPr algn="ctr"/>
-            <a:r>
-              <a:rPr sz="1800" b="0">
-                <a:solidFill>
-                  <a:srgbClr val="F0F0E0"/>
-                </a:solidFill>
-              </a:rPr>
-              <a:t>Learn American Sign Language</a:t>
-            </a:r>
-          </a:p>
-        </p:txBody>
-      </p:sp>
-      <p:sp>
-        <p:nvSpPr>
-          <p:cNvPr id="5" name="TextBox 4"/>
-          <p:cNvSpPr txBox="1"/>
-          <p:nvPr/>
-        </p:nvSpPr>
-        <p:spPr>
-          <a:xfrm>
-            <a:off x="2286000" y="3566160"/>
-            <a:ext cx="7589520" cy="548640"/>
-          </a:xfrm>
-          <a:prstGeom prst="rect">
-            <a:avLst/>
-          </a:prstGeom>
-          <a:noFill/>
-        </p:spPr>
-        <p:txBody>
-          <a:bodyPr wrap="square">
-            <a:spAutoFit/>
-          </a:bodyPr>
-          <a:lstStyle/>
-          <a:p>
-            <a:pPr algn="ctr"/>
-            <a:r>
-              <a:rPr sz="1300" b="0">
-                <a:solidFill>
-                  <a:srgbClr val="808060"/>
-                </a:solidFill>
-              </a:rPr>
-              <a:t>AI-Powered  ·  Gamified  ·  Real-Time Camera</a:t>
-            </a:r>
-          </a:p>
-        </p:txBody>
-      </p:sp>
-      <p:sp>
-        <p:nvSpPr>
-          <p:cNvPr id="6" name="TextBox 5"/>
-          <p:cNvSpPr txBox="1"/>
-          <p:nvPr/>
-        </p:nvSpPr>
-        <p:spPr>
-          <a:xfrm>
-            <a:off x="2286000" y="5029200"/>
-            <a:ext cx="7589520" cy="457200"/>
-          </a:xfrm>
-          <a:prstGeom prst="rect">
-            <a:avLst/>
-          </a:prstGeom>
-          <a:noFill/>
-        </p:spPr>
-        <p:txBody>
-          <a:bodyPr wrap="square">
-            <a:spAutoFit/>
-          </a:bodyPr>
-          <a:lstStyle/>
-          <a:p>
-            <a:pPr algn="ctr"/>
-            <a:r>
-              <a:rPr sz="1100" b="0">
-                <a:solidFill>
-                  <a:srgbClr val="808060"/>
-                </a:solidFill>
-              </a:rPr>
-              <a:t>github.com/Esomkg/aslTranslator</a:t>
-            </a:r>
-          </a:p>
-        </p:txBody>
-      </p:sp>
-    </p:spTree>
-  </p:cSld>
-  <p:clrMapOvr>
-    <a:masterClrMapping/>
-  </p:clrMapOvr>
-</p:sld>
-</file>
-
-<file path=ppt/slides/slide10.xml><?xml version="1.0" encoding="utf-8"?>
-<p:sld xmlns:a="http://schemas.openxmlformats.org/drawingml/2006/main" xmlns:p="http://schemas.openxmlformats.org/presentationml/2006/main" xmlns:r="http://schemas.openxmlformats.org/officeDocument/2006/relationships">
-  <p:cSld>
-    <p:bg>
-      <p:bgPr>
-        <a:solidFill>
-          <a:srgbClr val="1A1A08"/>
-        </a:solidFill>
-        <a:effectLst/>
-      </p:bgPr>
-    </p:bg>
-    <p:spTree>
-      <p:nvGrpSpPr>
-        <p:cNvPr id="1" name=""/>
-        <p:cNvGrpSpPr/>
-        <p:nvPr/>
-      </p:nvGrpSpPr>
-      <p:grpSpPr/>
-      <p:sp>
-        <p:nvSpPr>
-          <p:cNvPr id="2" name="Rectangle 1"/>
+          <p:cNvPr id="3" name="Rectangle 2"/>
           <p:cNvSpPr/>
           <p:nvPr/>
         </p:nvSpPr>
         <p:spPr>
           <a:xfrm>
-            <a:off x="1828800" y="1097280"/>
-            <a:ext cx="8503920" cy="4663440"/>
+            <a:off x="0" y="6784848"/>
+            <a:ext cx="12188952" cy="73152"/>
           </a:xfrm>
           <a:prstGeom prst="rect">
             <a:avLst/>
           </a:prstGeom>
           <a:solidFill>
-            <a:srgbClr val="2A2A14"/>
+            <a:srgbClr val="7C3AFF"/>
           </a:solidFill>
-          <a:ln w="38100">
-            <a:solidFill>
-              <a:srgbClr val="A0D040"/>
-            </a:solidFill>
+          <a:ln>
+            <a:noFill/>
           </a:ln>
         </p:spPr>
         <p:style>
@@ -3359,69 +3192,34 @@
       </p:sp>
       <p:sp>
         <p:nvSpPr>
-          <p:cNvPr id="3" name="TextBox 2"/>
-          <p:cNvSpPr txBox="1"/>
-          <p:nvPr/>
-        </p:nvSpPr>
-        <p:spPr>
-          <a:xfrm>
-            <a:off x="1828800" y="1371600"/>
-            <a:ext cx="8503920" cy="1097280"/>
-          </a:xfrm>
-          <a:prstGeom prst="rect">
-            <a:avLst/>
-          </a:prstGeom>
-          <a:noFill/>
-        </p:spPr>
-        <p:txBody>
-          <a:bodyPr wrap="square">
-            <a:spAutoFit/>
-          </a:bodyPr>
-          <a:lstStyle/>
-          <a:p>
-            <a:pPr algn="ctr"/>
-            <a:r>
-              <a:rPr sz="4000" b="1">
-                <a:solidFill>
-                  <a:srgbClr val="A0D040"/>
-                </a:solidFill>
-              </a:rPr>
-              <a:t>🤟  SignQuest</a:t>
-            </a:r>
-          </a:p>
-        </p:txBody>
-      </p:sp>
-      <p:sp>
-        <p:nvSpPr>
           <p:cNvPr id="4" name="TextBox 3"/>
           <p:cNvSpPr txBox="1"/>
           <p:nvPr/>
         </p:nvSpPr>
         <p:spPr>
           <a:xfrm>
-            <a:off x="1828800" y="2651760"/>
-            <a:ext cx="8503920" cy="1371600"/>
-          </a:xfrm>
-          <a:prstGeom prst="rect">
-            <a:avLst/>
-          </a:prstGeom>
-          <a:noFill/>
-        </p:spPr>
-        <p:txBody>
-          <a:bodyPr wrap="square">
-            <a:spAutoFit/>
-          </a:bodyPr>
-          <a:lstStyle/>
-          <a:p>
-            <a:pPr algn="ctr"/>
-            <a:r>
-              <a:rPr sz="1600" b="0">
-                <a:solidFill>
-                  <a:srgbClr val="F0F0E0"/>
-                </a:solidFill>
-              </a:rPr>
-              <a:t>Making ASL accessible, engaging,
-and genuinely educational for everyone.</a:t>
+            <a:off x="457200" y="1097280"/>
+            <a:ext cx="2286000" cy="2286000"/>
+          </a:xfrm>
+          <a:prstGeom prst="rect">
+            <a:avLst/>
+          </a:prstGeom>
+          <a:noFill/>
+        </p:spPr>
+        <p:txBody>
+          <a:bodyPr wrap="square">
+            <a:spAutoFit/>
+          </a:bodyPr>
+          <a:lstStyle/>
+          <a:p>
+            <a:pPr algn="ctr"/>
+            <a:r>
+              <a:rPr sz="9000" b="0" i="0">
+                <a:solidFill>
+                  <a:srgbClr val="FFFFFF"/>
+                </a:solidFill>
+              </a:rPr>
+              <a:t>🤟</a:t>
             </a:r>
           </a:p>
         </p:txBody>
@@ -3434,28 +3232,173 @@
         </p:nvSpPr>
         <p:spPr>
           <a:xfrm>
-            <a:off x="1828800" y="4297680"/>
-            <a:ext cx="8503920" cy="457200"/>
-          </a:xfrm>
-          <a:prstGeom prst="rect">
-            <a:avLst/>
-          </a:prstGeom>
-          <a:noFill/>
-        </p:spPr>
-        <p:txBody>
-          <a:bodyPr wrap="square">
-            <a:spAutoFit/>
-          </a:bodyPr>
-          <a:lstStyle/>
-          <a:p>
-            <a:pPr algn="ctr"/>
-            <a:r>
-              <a:rPr sz="1200" b="0">
-                <a:solidFill>
-                  <a:srgbClr val="808060"/>
-                </a:solidFill>
-              </a:rPr>
-              <a:t>github.com/Esomkg/aslTranslator</a:t>
+            <a:off x="2743200" y="1371600"/>
+            <a:ext cx="8686800" cy="1645920"/>
+          </a:xfrm>
+          <a:prstGeom prst="rect">
+            <a:avLst/>
+          </a:prstGeom>
+          <a:noFill/>
+        </p:spPr>
+        <p:txBody>
+          <a:bodyPr wrap="square">
+            <a:spAutoFit/>
+          </a:bodyPr>
+          <a:lstStyle/>
+          <a:p>
+            <a:pPr algn="l"/>
+            <a:r>
+              <a:rPr sz="7200" b="1" i="0">
+                <a:solidFill>
+                  <a:srgbClr val="00D4FF"/>
+                </a:solidFill>
+              </a:rPr>
+              <a:t>SignQuest</a:t>
+            </a:r>
+          </a:p>
+        </p:txBody>
+      </p:sp>
+      <p:sp>
+        <p:nvSpPr>
+          <p:cNvPr id="6" name="TextBox 5"/>
+          <p:cNvSpPr txBox="1"/>
+          <p:nvPr/>
+        </p:nvSpPr>
+        <p:spPr>
+          <a:xfrm>
+            <a:off x="2743200" y="2834640"/>
+            <a:ext cx="8686800" cy="731520"/>
+          </a:xfrm>
+          <a:prstGeom prst="rect">
+            <a:avLst/>
+          </a:prstGeom>
+          <a:noFill/>
+        </p:spPr>
+        <p:txBody>
+          <a:bodyPr wrap="square">
+            <a:spAutoFit/>
+          </a:bodyPr>
+          <a:lstStyle/>
+          <a:p>
+            <a:pPr algn="l"/>
+            <a:r>
+              <a:rPr sz="2800" b="0" i="1">
+                <a:solidFill>
+                  <a:srgbClr val="CCCCCC"/>
+                </a:solidFill>
+              </a:rPr>
+              <a:t>Learn ASL. Play. Grow.</a:t>
+            </a:r>
+          </a:p>
+        </p:txBody>
+      </p:sp>
+      <p:sp>
+        <p:nvSpPr>
+          <p:cNvPr id="7" name="Rectangle 6"/>
+          <p:cNvSpPr/>
+          <p:nvPr/>
+        </p:nvSpPr>
+        <p:spPr>
+          <a:xfrm>
+            <a:off x="2743200" y="3611880"/>
+            <a:ext cx="6400800" cy="45720"/>
+          </a:xfrm>
+          <a:prstGeom prst="rect">
+            <a:avLst/>
+          </a:prstGeom>
+          <a:solidFill>
+            <a:srgbClr val="7C3AFF"/>
+          </a:solidFill>
+          <a:ln>
+            <a:noFill/>
+          </a:ln>
+        </p:spPr>
+        <p:style>
+          <a:lnRef idx="1">
+            <a:schemeClr val="accent1"/>
+          </a:lnRef>
+          <a:fillRef idx="3">
+            <a:schemeClr val="accent1"/>
+          </a:fillRef>
+          <a:effectRef idx="2">
+            <a:schemeClr val="accent1"/>
+          </a:effectRef>
+          <a:fontRef idx="minor">
+            <a:schemeClr val="lt1"/>
+          </a:fontRef>
+        </p:style>
+        <p:txBody>
+          <a:bodyPr rtlCol="0" anchor="ctr"/>
+          <a:lstStyle/>
+          <a:p>
+            <a:pPr algn="ctr"/>
+          </a:p>
+        </p:txBody>
+      </p:sp>
+      <p:sp>
+        <p:nvSpPr>
+          <p:cNvPr id="8" name="TextBox 7"/>
+          <p:cNvSpPr txBox="1"/>
+          <p:nvPr/>
+        </p:nvSpPr>
+        <p:spPr>
+          <a:xfrm>
+            <a:off x="2743200" y="3749039"/>
+            <a:ext cx="8686800" cy="640080"/>
+          </a:xfrm>
+          <a:prstGeom prst="rect">
+            <a:avLst/>
+          </a:prstGeom>
+          <a:noFill/>
+        </p:spPr>
+        <p:txBody>
+          <a:bodyPr wrap="square">
+            <a:spAutoFit/>
+          </a:bodyPr>
+          <a:lstStyle/>
+          <a:p>
+            <a:pPr algn="l"/>
+            <a:r>
+              <a:rPr sz="1800" b="0" i="0">
+                <a:solidFill>
+                  <a:srgbClr val="CCCCCC"/>
+                </a:solidFill>
+              </a:rPr>
+              <a:t>A gamified web app for learning American Sign Language</a:t>
+            </a:r>
+          </a:p>
+        </p:txBody>
+      </p:sp>
+      <p:sp>
+        <p:nvSpPr>
+          <p:cNvPr id="9" name="TextBox 8"/>
+          <p:cNvSpPr txBox="1"/>
+          <p:nvPr/>
+        </p:nvSpPr>
+        <p:spPr>
+          <a:xfrm>
+            <a:off x="2743200" y="4434840"/>
+            <a:ext cx="8686800" cy="457200"/>
+          </a:xfrm>
+          <a:prstGeom prst="rect">
+            <a:avLst/>
+          </a:prstGeom>
+          <a:noFill/>
+        </p:spPr>
+        <p:txBody>
+          <a:bodyPr wrap="square">
+            <a:spAutoFit/>
+          </a:bodyPr>
+          <a:lstStyle/>
+          <a:p>
+            <a:pPr algn="l"/>
+            <a:r>
+              <a:rPr sz="1400" b="0" i="1">
+                <a:solidFill>
+                  <a:srgbClr val="888888"/>
+                </a:solidFill>
+              </a:rPr>
+              <a:t>Hackathon 2026  •  Solo Project</a:t>
             </a:r>
           </a:p>
         </p:txBody>
@@ -3474,7 +3417,7 @@
     <p:bg>
       <p:bgPr>
         <a:solidFill>
-          <a:srgbClr val="1A1A08"/>
+          <a:srgbClr val="0D1B2A"/>
         </a:solidFill>
         <a:effectLst/>
       </p:bgPr>
@@ -3495,18 +3438,16 @@
         <p:spPr>
           <a:xfrm>
             <a:off x="0" y="0"/>
-            <a:ext cx="12188952" cy="1005840"/>
+            <a:ext cx="12188952" cy="73152"/>
           </a:xfrm>
           <a:prstGeom prst="rect">
             <a:avLst/>
           </a:prstGeom>
           <a:solidFill>
-            <a:srgbClr val="2A2A14"/>
+            <a:srgbClr val="FF4C4C"/>
           </a:solidFill>
-          <a:ln w="25400">
-            <a:solidFill>
-              <a:srgbClr val="A0D040"/>
-            </a:solidFill>
+          <a:ln>
+            <a:noFill/>
           </a:ln>
         </p:spPr>
         <p:style>
@@ -3539,28 +3480,28 @@
         </p:nvSpPr>
         <p:spPr>
           <a:xfrm>
-            <a:off x="365760" y="182880"/>
-            <a:ext cx="11457432" cy="731520"/>
-          </a:xfrm>
-          <a:prstGeom prst="rect">
-            <a:avLst/>
-          </a:prstGeom>
-          <a:noFill/>
-        </p:spPr>
-        <p:txBody>
-          <a:bodyPr wrap="square">
-            <a:spAutoFit/>
-          </a:bodyPr>
-          <a:lstStyle/>
-          <a:p>
-            <a:pPr algn="ctr"/>
-            <a:r>
-              <a:rPr sz="2800" b="1">
-                <a:solidFill>
-                  <a:srgbClr val="A0D040"/>
-                </a:solidFill>
-              </a:rPr>
-              <a:t>The Problem</a:t>
+            <a:off x="457200" y="182880"/>
+            <a:ext cx="10972800" cy="822960"/>
+          </a:xfrm>
+          <a:prstGeom prst="rect">
+            <a:avLst/>
+          </a:prstGeom>
+          <a:noFill/>
+        </p:spPr>
+        <p:txBody>
+          <a:bodyPr wrap="square">
+            <a:spAutoFit/>
+          </a:bodyPr>
+          <a:lstStyle/>
+          <a:p>
+            <a:pPr algn="l"/>
+            <a:r>
+              <a:rPr sz="3600" b="1" i="0">
+                <a:solidFill>
+                  <a:srgbClr val="FF4C4C"/>
+                </a:solidFill>
+              </a:rPr>
+              <a:t>😔  The Problem</a:t>
             </a:r>
           </a:p>
         </p:txBody>
@@ -3573,19 +3514,17 @@
         </p:nvSpPr>
         <p:spPr>
           <a:xfrm>
-            <a:off x="274320" y="1188720"/>
-            <a:ext cx="5669280" cy="2377440"/>
+            <a:off x="457200" y="1005840"/>
+            <a:ext cx="7772400" cy="45720"/>
           </a:xfrm>
           <a:prstGeom prst="rect">
             <a:avLst/>
           </a:prstGeom>
           <a:solidFill>
-            <a:srgbClr val="2A2A14"/>
+            <a:srgbClr val="FF4C4C"/>
           </a:solidFill>
-          <a:ln w="19050">
-            <a:solidFill>
-              <a:srgbClr val="4A4A20"/>
-            </a:solidFill>
+          <a:ln>
+            <a:noFill/>
           </a:ln>
         </p:spPr>
         <p:style>
@@ -3612,89 +3551,23 @@
       </p:sp>
       <p:sp>
         <p:nvSpPr>
-          <p:cNvPr id="5" name="TextBox 4"/>
-          <p:cNvSpPr txBox="1"/>
-          <p:nvPr/>
-        </p:nvSpPr>
-        <p:spPr>
-          <a:xfrm>
-            <a:off x="411480" y="1280160"/>
-            <a:ext cx="5394960" cy="2194560"/>
-          </a:xfrm>
-          <a:prstGeom prst="rect">
-            <a:avLst/>
-          </a:prstGeom>
-          <a:noFill/>
-        </p:spPr>
-        <p:txBody>
-          <a:bodyPr wrap="square">
-            <a:spAutoFit/>
-          </a:bodyPr>
-          <a:lstStyle/>
-          <a:p>
-            <a:pPr algn="l"/>
-            <a:r>
-              <a:rPr sz="1400" b="1">
-                <a:solidFill>
-                  <a:srgbClr val="A0D040"/>
-                </a:solidFill>
-              </a:rPr>
-              <a:t>😔  Hard to learn alone</a:t>
-            </a:r>
-          </a:p>
-          <a:p>
-            <a:pPr algn="l">
-              <a:spcBef>
-                <a:spcPts val="400"/>
-              </a:spcBef>
-            </a:pPr>
-            <a:r>
-              <a:rPr sz="1100">
-                <a:solidFill>
-                  <a:srgbClr val="F0F0E0"/>
-                </a:solidFill>
-              </a:rPr>
-              <a:t>▸ Most resources are passive videos</a:t>
-            </a:r>
-          </a:p>
-          <a:p>
-            <a:pPr algn="l">
-              <a:spcBef>
-                <a:spcPts val="400"/>
-              </a:spcBef>
-            </a:pPr>
-            <a:r>
-              <a:rPr sz="1100">
-                <a:solidFill>
-                  <a:srgbClr val="F0F0E0"/>
-                </a:solidFill>
-              </a:rPr>
-              <a:t>▸ No feedback on whether you're signing correctly</a:t>
-            </a:r>
-          </a:p>
-        </p:txBody>
-      </p:sp>
-      <p:sp>
-        <p:nvSpPr>
-          <p:cNvPr id="6" name="Rectangle 5"/>
+          <p:cNvPr id="5" name="Rectangle 4"/>
           <p:cNvSpPr/>
           <p:nvPr/>
         </p:nvSpPr>
         <p:spPr>
           <a:xfrm>
-            <a:off x="6217920" y="1188720"/>
-            <a:ext cx="5669280" cy="2377440"/>
+            <a:off x="457200" y="1280160"/>
+            <a:ext cx="5029200" cy="1463040"/>
           </a:xfrm>
           <a:prstGeom prst="rect">
             <a:avLst/>
           </a:prstGeom>
           <a:solidFill>
-            <a:srgbClr val="2A2A14"/>
+            <a:srgbClr val="1A0A0A"/>
           </a:solidFill>
-          <a:ln w="19050">
-            <a:solidFill>
-              <a:srgbClr val="4A4A20"/>
-            </a:solidFill>
+          <a:ln>
+            <a:noFill/>
           </a:ln>
         </p:spPr>
         <p:style>
@@ -3721,14 +3594,48 @@
       </p:sp>
       <p:sp>
         <p:nvSpPr>
+          <p:cNvPr id="6" name="TextBox 5"/>
+          <p:cNvSpPr txBox="1"/>
+          <p:nvPr/>
+        </p:nvSpPr>
+        <p:spPr>
+          <a:xfrm>
+            <a:off x="640080" y="1325880"/>
+            <a:ext cx="2286000" cy="914400"/>
+          </a:xfrm>
+          <a:prstGeom prst="rect">
+            <a:avLst/>
+          </a:prstGeom>
+          <a:noFill/>
+        </p:spPr>
+        <p:txBody>
+          <a:bodyPr wrap="square">
+            <a:spAutoFit/>
+          </a:bodyPr>
+          <a:lstStyle/>
+          <a:p>
+            <a:pPr algn="l"/>
+            <a:r>
+              <a:rPr sz="5400" b="1" i="0">
+                <a:solidFill>
+                  <a:srgbClr val="FF4C4C"/>
+                </a:solidFill>
+              </a:rPr>
+              <a:t>70%</a:t>
+            </a:r>
+          </a:p>
+        </p:txBody>
+      </p:sp>
+      <p:sp>
+        <p:nvSpPr>
           <p:cNvPr id="7" name="TextBox 6"/>
           <p:cNvSpPr txBox="1"/>
           <p:nvPr/>
         </p:nvSpPr>
         <p:spPr>
           <a:xfrm>
-            <a:off x="6355080" y="1280160"/>
-            <a:ext cx="5394960" cy="2194560"/>
+            <a:off x="2743200" y="1463040"/>
+            <a:ext cx="2926080" cy="1097280"/>
           </a:xfrm>
           <a:prstGeom prst="rect">
             <a:avLst/>
@@ -3743,67 +3650,140 @@
           <a:p>
             <a:pPr algn="l"/>
             <a:r>
-              <a:rPr sz="1400" b="1">
-                <a:solidFill>
-                  <a:srgbClr val="A0D040"/>
-                </a:solidFill>
-              </a:rPr>
-              <a:t>📚  No interactive practice</a:t>
-            </a:r>
-          </a:p>
-          <a:p>
-            <a:pPr algn="l">
-              <a:spcBef>
-                <a:spcPts val="400"/>
-              </a:spcBef>
-            </a:pPr>
-            <a:r>
-              <a:rPr sz="1100">
-                <a:solidFill>
-                  <a:srgbClr val="F0F0E0"/>
-                </a:solidFill>
-              </a:rPr>
-              <a:t>▸ Existing apps focus on vocabulary lists</a:t>
-            </a:r>
-          </a:p>
-          <a:p>
-            <a:pPr algn="l">
-              <a:spcBef>
-                <a:spcPts val="400"/>
-              </a:spcBef>
-            </a:pPr>
-            <a:r>
-              <a:rPr sz="1100">
-                <a:solidFill>
-                  <a:srgbClr val="F0F0E0"/>
-                </a:solidFill>
-              </a:rPr>
-              <a:t>▸ No real-time hand recognition or coaching</a:t>
-            </a:r>
-          </a:p>
-        </p:txBody>
-      </p:sp>
-      <p:sp>
-        <p:nvSpPr>
-          <p:cNvPr id="8" name="Rectangle 7"/>
+              <a:rPr sz="1600" b="0" i="0">
+                <a:solidFill>
+                  <a:srgbClr val="CCCCCC"/>
+                </a:solidFill>
+              </a:rPr>
+              <a:t>of deaf children in Nigeria
+are out of school</a:t>
+            </a:r>
+          </a:p>
+        </p:txBody>
+      </p:sp>
+      <p:sp>
+        <p:nvSpPr>
+          <p:cNvPr id="8" name="TextBox 7"/>
+          <p:cNvSpPr txBox="1"/>
+          <p:nvPr/>
+        </p:nvSpPr>
+        <p:spPr>
+          <a:xfrm>
+            <a:off x="457200" y="2926080"/>
+            <a:ext cx="7772400" cy="914400"/>
+          </a:xfrm>
+          <a:prstGeom prst="rect">
+            <a:avLst/>
+          </a:prstGeom>
+          <a:noFill/>
+        </p:spPr>
+        <p:txBody>
+          <a:bodyPr wrap="square">
+            <a:spAutoFit/>
+          </a:bodyPr>
+          <a:lstStyle/>
+          <a:p>
+            <a:pPr algn="l"/>
+            <a:r>
+              <a:rPr sz="1700" b="0" i="0">
+                <a:solidFill>
+                  <a:srgbClr val="CCCCCC"/>
+                </a:solidFill>
+              </a:rPr>
+              <a:t>Sign language is marginalized and underutilized worldwide,
+creating severe communication barriers for the deaf community.</a:t>
+            </a:r>
+          </a:p>
+        </p:txBody>
+      </p:sp>
+      <p:sp>
+        <p:nvSpPr>
+          <p:cNvPr id="9" name="TextBox 8"/>
+          <p:cNvSpPr txBox="1"/>
+          <p:nvPr/>
+        </p:nvSpPr>
+        <p:spPr>
+          <a:xfrm>
+            <a:off x="457200" y="3931920"/>
+            <a:ext cx="7772400" cy="457200"/>
+          </a:xfrm>
+          <a:prstGeom prst="rect">
+            <a:avLst/>
+          </a:prstGeom>
+          <a:noFill/>
+        </p:spPr>
+        <p:txBody>
+          <a:bodyPr wrap="square">
+            <a:spAutoFit/>
+          </a:bodyPr>
+          <a:lstStyle/>
+          <a:p>
+            <a:pPr algn="l"/>
+            <a:r>
+              <a:rPr sz="1500" b="1" i="1">
+                <a:solidFill>
+                  <a:srgbClr val="00D4FF"/>
+                </a:solidFill>
+              </a:rPr>
+              <a:t>A personal story...</a:t>
+            </a:r>
+          </a:p>
+        </p:txBody>
+      </p:sp>
+      <p:sp>
+        <p:nvSpPr>
+          <p:cNvPr id="10" name="TextBox 9"/>
+          <p:cNvSpPr txBox="1"/>
+          <p:nvPr/>
+        </p:nvSpPr>
+        <p:spPr>
+          <a:xfrm>
+            <a:off x="457200" y="4389120"/>
+            <a:ext cx="7772400" cy="1097280"/>
+          </a:xfrm>
+          <a:prstGeom prst="rect">
+            <a:avLst/>
+          </a:prstGeom>
+          <a:noFill/>
+        </p:spPr>
+        <p:txBody>
+          <a:bodyPr wrap="square">
+            <a:spAutoFit/>
+          </a:bodyPr>
+          <a:lstStyle/>
+          <a:p>
+            <a:pPr algn="l"/>
+            <a:r>
+              <a:rPr sz="1500" b="0" i="0">
+                <a:solidFill>
+                  <a:srgbClr val="CCCCCC"/>
+                </a:solidFill>
+              </a:rPr>
+              <a:t>My cousin, who has hearing difficulties, was never taught sign language early on.
+This led to social isolation and a language barrier that could have been prevented.</a:t>
+            </a:r>
+          </a:p>
+        </p:txBody>
+      </p:sp>
+      <p:sp>
+        <p:nvSpPr>
+          <p:cNvPr id="11" name="Rectangle 10"/>
           <p:cNvSpPr/>
           <p:nvPr/>
         </p:nvSpPr>
         <p:spPr>
           <a:xfrm>
-            <a:off x="274320" y="3749039"/>
-            <a:ext cx="5669280" cy="2377440"/>
+            <a:off x="8686800" y="1280160"/>
+            <a:ext cx="3017520" cy="5029200"/>
           </a:xfrm>
           <a:prstGeom prst="rect">
             <a:avLst/>
           </a:prstGeom>
           <a:solidFill>
-            <a:srgbClr val="2A2A14"/>
+            <a:srgbClr val="1A0A0A"/>
           </a:solidFill>
-          <a:ln w="19050">
-            <a:solidFill>
-              <a:srgbClr val="4A4A20"/>
-            </a:solidFill>
+          <a:ln>
+            <a:noFill/>
           </a:ln>
         </p:spPr>
         <p:style>
@@ -3830,173 +3810,71 @@
       </p:sp>
       <p:sp>
         <p:nvSpPr>
-          <p:cNvPr id="9" name="TextBox 8"/>
-          <p:cNvSpPr txBox="1"/>
-          <p:nvPr/>
-        </p:nvSpPr>
-        <p:spPr>
-          <a:xfrm>
-            <a:off x="411480" y="3840479"/>
-            <a:ext cx="5394960" cy="2194560"/>
-          </a:xfrm>
-          <a:prstGeom prst="rect">
-            <a:avLst/>
-          </a:prstGeom>
-          <a:noFill/>
-        </p:spPr>
-        <p:txBody>
-          <a:bodyPr wrap="square">
-            <a:spAutoFit/>
-          </a:bodyPr>
-          <a:lstStyle/>
-          <a:p>
-            <a:pPr algn="l"/>
-            <a:r>
-              <a:rPr sz="1400" b="1">
-                <a:solidFill>
-                  <a:srgbClr val="A0D040"/>
-                </a:solidFill>
-              </a:rPr>
-              <a:t>🌍  Accessibility gap</a:t>
-            </a:r>
-          </a:p>
-          <a:p>
-            <a:pPr algn="l">
-              <a:spcBef>
-                <a:spcPts val="400"/>
-              </a:spcBef>
-            </a:pPr>
-            <a:r>
-              <a:rPr sz="1100">
-                <a:solidFill>
-                  <a:srgbClr val="F0F0E0"/>
-                </a:solidFill>
-              </a:rPr>
-              <a:t>▸ 70 million Deaf people use sign language</a:t>
-            </a:r>
-          </a:p>
-          <a:p>
-            <a:pPr algn="l">
-              <a:spcBef>
-                <a:spcPts val="400"/>
-              </a:spcBef>
-            </a:pPr>
-            <a:r>
-              <a:rPr sz="1100">
-                <a:solidFill>
-                  <a:srgbClr val="F0F0E0"/>
-                </a:solidFill>
-              </a:rPr>
-              <a:t>▸ Hearing people rarely learn it</a:t>
-            </a:r>
-          </a:p>
-        </p:txBody>
-      </p:sp>
-      <p:sp>
-        <p:nvSpPr>
-          <p:cNvPr id="10" name="Rectangle 9"/>
-          <p:cNvSpPr/>
-          <p:nvPr/>
-        </p:nvSpPr>
-        <p:spPr>
-          <a:xfrm>
-            <a:off x="6217920" y="3749039"/>
-            <a:ext cx="5669280" cy="2377440"/>
-          </a:xfrm>
-          <a:prstGeom prst="rect">
-            <a:avLst/>
-          </a:prstGeom>
-          <a:solidFill>
-            <a:srgbClr val="2A2A14"/>
-          </a:solidFill>
-          <a:ln w="19050">
-            <a:solidFill>
-              <a:srgbClr val="4A4A20"/>
-            </a:solidFill>
-          </a:ln>
-        </p:spPr>
-        <p:style>
-          <a:lnRef idx="1">
-            <a:schemeClr val="accent1"/>
-          </a:lnRef>
-          <a:fillRef idx="3">
-            <a:schemeClr val="accent1"/>
-          </a:fillRef>
-          <a:effectRef idx="2">
-            <a:schemeClr val="accent1"/>
-          </a:effectRef>
-          <a:fontRef idx="minor">
-            <a:schemeClr val="lt1"/>
-          </a:fontRef>
-        </p:style>
-        <p:txBody>
-          <a:bodyPr rtlCol="0" anchor="ctr"/>
-          <a:lstStyle/>
-          <a:p>
-            <a:pPr algn="ctr"/>
-          </a:p>
-        </p:txBody>
-      </p:sp>
-      <p:sp>
-        <p:nvSpPr>
-          <p:cNvPr id="11" name="TextBox 10"/>
-          <p:cNvSpPr txBox="1"/>
-          <p:nvPr/>
-        </p:nvSpPr>
-        <p:spPr>
-          <a:xfrm>
-            <a:off x="6355080" y="3840479"/>
-            <a:ext cx="5394960" cy="2194560"/>
-          </a:xfrm>
-          <a:prstGeom prst="rect">
-            <a:avLst/>
-          </a:prstGeom>
-          <a:noFill/>
-        </p:spPr>
-        <p:txBody>
-          <a:bodyPr wrap="square">
-            <a:spAutoFit/>
-          </a:bodyPr>
-          <a:lstStyle/>
-          <a:p>
-            <a:pPr algn="l"/>
-            <a:r>
-              <a:rPr sz="1400" b="1">
-                <a:solidFill>
-                  <a:srgbClr val="A0D040"/>
-                </a:solidFill>
-              </a:rPr>
-              <a:t>🎮  Low engagement</a:t>
-            </a:r>
-          </a:p>
-          <a:p>
-            <a:pPr algn="l">
-              <a:spcBef>
-                <a:spcPts val="400"/>
-              </a:spcBef>
-            </a:pPr>
-            <a:r>
-              <a:rPr sz="1100">
-                <a:solidFill>
-                  <a:srgbClr val="F0F0E0"/>
-                </a:solidFill>
-              </a:rPr>
-              <a:t>▸ Traditional learning is boring</a:t>
-            </a:r>
-          </a:p>
-          <a:p>
-            <a:pPr algn="l">
-              <a:spcBef>
-                <a:spcPts val="400"/>
-              </a:spcBef>
-            </a:pPr>
-            <a:r>
-              <a:rPr sz="1100">
-                <a:solidFill>
-                  <a:srgbClr val="F0F0E0"/>
-                </a:solidFill>
-              </a:rPr>
-              <a:t>▸ Learners drop off without motivation systems</a:t>
+          <p:cNvPr id="12" name="TextBox 11"/>
+          <p:cNvSpPr txBox="1"/>
+          <p:nvPr/>
+        </p:nvSpPr>
+        <p:spPr>
+          <a:xfrm>
+            <a:off x="9326880" y="1645920"/>
+            <a:ext cx="1828800" cy="1371600"/>
+          </a:xfrm>
+          <a:prstGeom prst="rect">
+            <a:avLst/>
+          </a:prstGeom>
+          <a:noFill/>
+        </p:spPr>
+        <p:txBody>
+          <a:bodyPr wrap="square">
+            <a:spAutoFit/>
+          </a:bodyPr>
+          <a:lstStyle/>
+          <a:p>
+            <a:pPr algn="ctr"/>
+            <a:r>
+              <a:rPr sz="6000" b="0" i="0">
+                <a:solidFill>
+                  <a:srgbClr val="FFFFFF"/>
+                </a:solidFill>
+              </a:rPr>
+              <a:t>🌍</a:t>
+            </a:r>
+          </a:p>
+        </p:txBody>
+      </p:sp>
+      <p:sp>
+        <p:nvSpPr>
+          <p:cNvPr id="13" name="TextBox 12"/>
+          <p:cNvSpPr txBox="1"/>
+          <p:nvPr/>
+        </p:nvSpPr>
+        <p:spPr>
+          <a:xfrm>
+            <a:off x="8869680" y="3108960"/>
+            <a:ext cx="2651760" cy="2286000"/>
+          </a:xfrm>
+          <a:prstGeom prst="rect">
+            <a:avLst/>
+          </a:prstGeom>
+          <a:noFill/>
+        </p:spPr>
+        <p:txBody>
+          <a:bodyPr wrap="square">
+            <a:spAutoFit/>
+          </a:bodyPr>
+          <a:lstStyle/>
+          <a:p>
+            <a:pPr algn="ctr"/>
+            <a:r>
+              <a:rPr sz="1500" b="0" i="0">
+                <a:solidFill>
+                  <a:srgbClr val="CCCCCC"/>
+                </a:solidFill>
+              </a:rPr>
+              <a:t>Communication
+should be
+accessible
+to everyone.</a:t>
             </a:r>
           </a:p>
         </p:txBody>
@@ -4015,7 +3893,7 @@
     <p:bg>
       <p:bgPr>
         <a:solidFill>
-          <a:srgbClr val="1A1A08"/>
+          <a:srgbClr val="0D1B2A"/>
         </a:solidFill>
         <a:effectLst/>
       </p:bgPr>
@@ -4036,18 +3914,16 @@
         <p:spPr>
           <a:xfrm>
             <a:off x="0" y="0"/>
-            <a:ext cx="12188952" cy="1005840"/>
+            <a:ext cx="12188952" cy="73152"/>
           </a:xfrm>
           <a:prstGeom prst="rect">
             <a:avLst/>
           </a:prstGeom>
           <a:solidFill>
-            <a:srgbClr val="2A2A14"/>
+            <a:srgbClr val="00D4FF"/>
           </a:solidFill>
-          <a:ln w="25400">
-            <a:solidFill>
-              <a:srgbClr val="A0D040"/>
-            </a:solidFill>
+          <a:ln>
+            <a:noFill/>
           </a:ln>
         </p:spPr>
         <p:style>
@@ -4080,28 +3956,28 @@
         </p:nvSpPr>
         <p:spPr>
           <a:xfrm>
-            <a:off x="365760" y="182880"/>
-            <a:ext cx="11457432" cy="731520"/>
-          </a:xfrm>
-          <a:prstGeom prst="rect">
-            <a:avLst/>
-          </a:prstGeom>
-          <a:noFill/>
-        </p:spPr>
-        <p:txBody>
-          <a:bodyPr wrap="square">
-            <a:spAutoFit/>
-          </a:bodyPr>
-          <a:lstStyle/>
-          <a:p>
-            <a:pPr algn="ctr"/>
-            <a:r>
-              <a:rPr sz="2800" b="1">
-                <a:solidFill>
-                  <a:srgbClr val="A0D040"/>
-                </a:solidFill>
-              </a:rPr>
-              <a:t>Our Solution</a:t>
+            <a:off x="457200" y="182880"/>
+            <a:ext cx="10972800" cy="822960"/>
+          </a:xfrm>
+          <a:prstGeom prst="rect">
+            <a:avLst/>
+          </a:prstGeom>
+          <a:noFill/>
+        </p:spPr>
+        <p:txBody>
+          <a:bodyPr wrap="square">
+            <a:spAutoFit/>
+          </a:bodyPr>
+          <a:lstStyle/>
+          <a:p>
+            <a:pPr algn="l"/>
+            <a:r>
+              <a:rPr sz="3600" b="1" i="0">
+                <a:solidFill>
+                  <a:srgbClr val="00D4FF"/>
+                </a:solidFill>
+              </a:rPr>
+              <a:t>💡  The Solution</a:t>
             </a:r>
           </a:p>
         </p:txBody>
@@ -4114,19 +3990,17 @@
         </p:nvSpPr>
         <p:spPr>
           <a:xfrm>
-            <a:off x="914400" y="1280160"/>
-            <a:ext cx="10332720" cy="1828800"/>
+            <a:off x="457200" y="1005840"/>
+            <a:ext cx="11247120" cy="45720"/>
           </a:xfrm>
           <a:prstGeom prst="rect">
             <a:avLst/>
           </a:prstGeom>
           <a:solidFill>
-            <a:srgbClr val="2A2A14"/>
+            <a:srgbClr val="00D4FF"/>
           </a:solidFill>
-          <a:ln w="25400">
-            <a:solidFill>
-              <a:srgbClr val="A0D040"/>
-            </a:solidFill>
+          <a:ln>
+            <a:noFill/>
           </a:ln>
         </p:spPr>
         <p:style>
@@ -4159,28 +4033,29 @@
         </p:nvSpPr>
         <p:spPr>
           <a:xfrm>
-            <a:off x="1097280" y="1371600"/>
-            <a:ext cx="9966960" cy="1645920"/>
-          </a:xfrm>
-          <a:prstGeom prst="rect">
-            <a:avLst/>
-          </a:prstGeom>
-          <a:noFill/>
-        </p:spPr>
-        <p:txBody>
-          <a:bodyPr wrap="square">
-            <a:spAutoFit/>
-          </a:bodyPr>
-          <a:lstStyle/>
-          <a:p>
-            <a:pPr algn="ctr"/>
-            <a:r>
-              <a:rPr sz="1400" b="0">
-                <a:solidFill>
-                  <a:srgbClr val="F0F0E0"/>
-                </a:solidFill>
-              </a:rPr>
-              <a:t>SignQuest is a gamified ASL learning platform with real-time webcam hand recognition, an AI tutor powered by Groq, and a Minecraft-inspired interface that makes learning feel like play.</a:t>
+            <a:off x="457200" y="1188720"/>
+            <a:ext cx="11247120" cy="914400"/>
+          </a:xfrm>
+          <a:prstGeom prst="rect">
+            <a:avLst/>
+          </a:prstGeom>
+          <a:noFill/>
+        </p:spPr>
+        <p:txBody>
+          <a:bodyPr wrap="square">
+            <a:spAutoFit/>
+          </a:bodyPr>
+          <a:lstStyle/>
+          <a:p>
+            <a:pPr algn="l"/>
+            <a:r>
+              <a:rPr sz="1800" b="0" i="0">
+                <a:solidFill>
+                  <a:srgbClr val="CCCCCC"/>
+                </a:solidFill>
+              </a:rPr>
+              <a:t>SignQuest is a gamified web app that teaches ASL letters &amp; numbers
+through real-time ML-powered feedback — built for children.</a:t>
             </a:r>
           </a:p>
         </p:txBody>
@@ -4193,19 +4068,17 @@
         </p:nvSpPr>
         <p:spPr>
           <a:xfrm>
-            <a:off x="914400" y="3474720"/>
-            <a:ext cx="2286000" cy="1371600"/>
+            <a:off x="457200" y="2286000"/>
+            <a:ext cx="2743200" cy="3200400"/>
           </a:xfrm>
           <a:prstGeom prst="rect">
             <a:avLst/>
           </a:prstGeom>
           <a:solidFill>
-            <a:srgbClr val="2A2A14"/>
+            <a:srgbClr val="0A2A3A"/>
           </a:solidFill>
-          <a:ln w="19050">
-            <a:solidFill>
-              <a:srgbClr val="4A4A20"/>
-            </a:solidFill>
+          <a:ln>
+            <a:noFill/>
           </a:ln>
         </p:spPr>
         <p:style>
@@ -4238,28 +4111,28 @@
         </p:nvSpPr>
         <p:spPr>
           <a:xfrm>
-            <a:off x="914400" y="3566160"/>
-            <a:ext cx="2286000" cy="731520"/>
-          </a:xfrm>
-          <a:prstGeom prst="rect">
-            <a:avLst/>
-          </a:prstGeom>
-          <a:noFill/>
-        </p:spPr>
-        <p:txBody>
-          <a:bodyPr wrap="square">
-            <a:spAutoFit/>
-          </a:bodyPr>
-          <a:lstStyle/>
-          <a:p>
-            <a:pPr algn="ctr"/>
-            <a:r>
-              <a:rPr sz="2800" b="1">
-                <a:solidFill>
-                  <a:srgbClr val="A0D040"/>
-                </a:solidFill>
-              </a:rPr>
-              <a:t>24</a:t>
+            <a:off x="1280160" y="2423160"/>
+            <a:ext cx="1097280" cy="914400"/>
+          </a:xfrm>
+          <a:prstGeom prst="rect">
+            <a:avLst/>
+          </a:prstGeom>
+          <a:noFill/>
+        </p:spPr>
+        <p:txBody>
+          <a:bodyPr wrap="square">
+            <a:spAutoFit/>
+          </a:bodyPr>
+          <a:lstStyle/>
+          <a:p>
+            <a:pPr algn="ctr"/>
+            <a:r>
+              <a:rPr sz="3200" b="0" i="0">
+                <a:solidFill>
+                  <a:srgbClr val="FFFFFF"/>
+                </a:solidFill>
+              </a:rPr>
+              <a:t>🎮</a:t>
             </a:r>
           </a:p>
         </p:txBody>
@@ -4272,53 +4145,87 @@
         </p:nvSpPr>
         <p:spPr>
           <a:xfrm>
-            <a:off x="914400" y="4297680"/>
-            <a:ext cx="2286000" cy="457200"/>
-          </a:xfrm>
-          <a:prstGeom prst="rect">
-            <a:avLst/>
-          </a:prstGeom>
-          <a:noFill/>
-        </p:spPr>
-        <p:txBody>
-          <a:bodyPr wrap="square">
-            <a:spAutoFit/>
-          </a:bodyPr>
-          <a:lstStyle/>
-          <a:p>
-            <a:pPr algn="ctr"/>
-            <a:r>
-              <a:rPr sz="1100" b="0">
-                <a:solidFill>
-                  <a:srgbClr val="808060"/>
-                </a:solidFill>
-              </a:rPr>
-              <a:t>ASL Letters</a:t>
-            </a:r>
-          </a:p>
-        </p:txBody>
-      </p:sp>
-      <p:sp>
-        <p:nvSpPr>
-          <p:cNvPr id="9" name="Rectangle 8"/>
+            <a:off x="548640" y="3246120"/>
+            <a:ext cx="2560320" cy="640080"/>
+          </a:xfrm>
+          <a:prstGeom prst="rect">
+            <a:avLst/>
+          </a:prstGeom>
+          <a:noFill/>
+        </p:spPr>
+        <p:txBody>
+          <a:bodyPr wrap="square">
+            <a:spAutoFit/>
+          </a:bodyPr>
+          <a:lstStyle/>
+          <a:p>
+            <a:pPr algn="ctr"/>
+            <a:r>
+              <a:rPr sz="1600" b="1" i="0">
+                <a:solidFill>
+                  <a:srgbClr val="00D4FF"/>
+                </a:solidFill>
+              </a:rPr>
+              <a:t>Gamified
+Learning</a:t>
+            </a:r>
+          </a:p>
+        </p:txBody>
+      </p:sp>
+      <p:sp>
+        <p:nvSpPr>
+          <p:cNvPr id="9" name="TextBox 8"/>
+          <p:cNvSpPr txBox="1"/>
+          <p:nvPr/>
+        </p:nvSpPr>
+        <p:spPr>
+          <a:xfrm>
+            <a:off x="548640" y="3886200"/>
+            <a:ext cx="2560320" cy="1371600"/>
+          </a:xfrm>
+          <a:prstGeom prst="rect">
+            <a:avLst/>
+          </a:prstGeom>
+          <a:noFill/>
+        </p:spPr>
+        <p:txBody>
+          <a:bodyPr wrap="square">
+            <a:spAutoFit/>
+          </a:bodyPr>
+          <a:lstStyle/>
+          <a:p>
+            <a:pPr algn="ctr"/>
+            <a:r>
+              <a:rPr sz="1300" b="0" i="0">
+                <a:solidFill>
+                  <a:srgbClr val="CCCCCC"/>
+                </a:solidFill>
+              </a:rPr>
+              <a:t>Earn points, unlock
+levels, stay motivated</a:t>
+            </a:r>
+          </a:p>
+        </p:txBody>
+      </p:sp>
+      <p:sp>
+        <p:nvSpPr>
+          <p:cNvPr id="10" name="Rectangle 9"/>
           <p:cNvSpPr/>
           <p:nvPr/>
         </p:nvSpPr>
         <p:spPr>
           <a:xfrm>
-            <a:off x="3566160" y="3474720"/>
-            <a:ext cx="2286000" cy="1371600"/>
+            <a:off x="3383280" y="2286000"/>
+            <a:ext cx="2743200" cy="3200400"/>
           </a:xfrm>
           <a:prstGeom prst="rect">
             <a:avLst/>
           </a:prstGeom>
           <a:solidFill>
-            <a:srgbClr val="2A2A14"/>
+            <a:srgbClr val="0A2A3A"/>
           </a:solidFill>
-          <a:ln w="19050">
-            <a:solidFill>
-              <a:srgbClr val="4A4A20"/>
-            </a:solidFill>
+          <a:ln>
+            <a:noFill/>
           </a:ln>
         </p:spPr>
         <p:style>
@@ -4345,93 +4252,127 @@
       </p:sp>
       <p:sp>
         <p:nvSpPr>
-          <p:cNvPr id="10" name="TextBox 9"/>
-          <p:cNvSpPr txBox="1"/>
-          <p:nvPr/>
-        </p:nvSpPr>
-        <p:spPr>
-          <a:xfrm>
-            <a:off x="3566160" y="3566160"/>
-            <a:ext cx="2286000" cy="731520"/>
-          </a:xfrm>
-          <a:prstGeom prst="rect">
-            <a:avLst/>
-          </a:prstGeom>
-          <a:noFill/>
-        </p:spPr>
-        <p:txBody>
-          <a:bodyPr wrap="square">
-            <a:spAutoFit/>
-          </a:bodyPr>
-          <a:lstStyle/>
-          <a:p>
-            <a:pPr algn="ctr"/>
-            <a:r>
-              <a:rPr sz="2800" b="1">
-                <a:solidFill>
-                  <a:srgbClr val="A0D040"/>
-                </a:solidFill>
-              </a:rPr>
-              <a:t>AI</a:t>
-            </a:r>
-          </a:p>
-        </p:txBody>
-      </p:sp>
-      <p:sp>
-        <p:nvSpPr>
           <p:cNvPr id="11" name="TextBox 10"/>
           <p:cNvSpPr txBox="1"/>
           <p:nvPr/>
         </p:nvSpPr>
         <p:spPr>
           <a:xfrm>
-            <a:off x="3566160" y="4297680"/>
-            <a:ext cx="2286000" cy="457200"/>
-          </a:xfrm>
-          <a:prstGeom prst="rect">
-            <a:avLst/>
-          </a:prstGeom>
-          <a:noFill/>
-        </p:spPr>
-        <p:txBody>
-          <a:bodyPr wrap="square">
-            <a:spAutoFit/>
-          </a:bodyPr>
-          <a:lstStyle/>
-          <a:p>
-            <a:pPr algn="ctr"/>
-            <a:r>
-              <a:rPr sz="1100" b="0">
-                <a:solidFill>
-                  <a:srgbClr val="808060"/>
-                </a:solidFill>
-              </a:rPr>
-              <a:t>Groq Tutor</a:t>
-            </a:r>
-          </a:p>
-        </p:txBody>
-      </p:sp>
-      <p:sp>
-        <p:nvSpPr>
-          <p:cNvPr id="12" name="Rectangle 11"/>
+            <a:off x="4206240" y="2423160"/>
+            <a:ext cx="1097280" cy="914400"/>
+          </a:xfrm>
+          <a:prstGeom prst="rect">
+            <a:avLst/>
+          </a:prstGeom>
+          <a:noFill/>
+        </p:spPr>
+        <p:txBody>
+          <a:bodyPr wrap="square">
+            <a:spAutoFit/>
+          </a:bodyPr>
+          <a:lstStyle/>
+          <a:p>
+            <a:pPr algn="ctr"/>
+            <a:r>
+              <a:rPr sz="3200" b="0" i="0">
+                <a:solidFill>
+                  <a:srgbClr val="FFFFFF"/>
+                </a:solidFill>
+              </a:rPr>
+              <a:t>📷</a:t>
+            </a:r>
+          </a:p>
+        </p:txBody>
+      </p:sp>
+      <p:sp>
+        <p:nvSpPr>
+          <p:cNvPr id="12" name="TextBox 11"/>
+          <p:cNvSpPr txBox="1"/>
+          <p:nvPr/>
+        </p:nvSpPr>
+        <p:spPr>
+          <a:xfrm>
+            <a:off x="3474720" y="3246120"/>
+            <a:ext cx="2560320" cy="640080"/>
+          </a:xfrm>
+          <a:prstGeom prst="rect">
+            <a:avLst/>
+          </a:prstGeom>
+          <a:noFill/>
+        </p:spPr>
+        <p:txBody>
+          <a:bodyPr wrap="square">
+            <a:spAutoFit/>
+          </a:bodyPr>
+          <a:lstStyle/>
+          <a:p>
+            <a:pPr algn="ctr"/>
+            <a:r>
+              <a:rPr sz="1600" b="1" i="0">
+                <a:solidFill>
+                  <a:srgbClr val="00D4FF"/>
+                </a:solidFill>
+              </a:rPr>
+              <a:t>Real-Time
+ML Feedback</a:t>
+            </a:r>
+          </a:p>
+        </p:txBody>
+      </p:sp>
+      <p:sp>
+        <p:nvSpPr>
+          <p:cNvPr id="13" name="TextBox 12"/>
+          <p:cNvSpPr txBox="1"/>
+          <p:nvPr/>
+        </p:nvSpPr>
+        <p:spPr>
+          <a:xfrm>
+            <a:off x="3474720" y="3886200"/>
+            <a:ext cx="2560320" cy="1371600"/>
+          </a:xfrm>
+          <a:prstGeom prst="rect">
+            <a:avLst/>
+          </a:prstGeom>
+          <a:noFill/>
+        </p:spPr>
+        <p:txBody>
+          <a:bodyPr wrap="square">
+            <a:spAutoFit/>
+          </a:bodyPr>
+          <a:lstStyle/>
+          <a:p>
+            <a:pPr algn="ctr"/>
+            <a:r>
+              <a:rPr sz="1300" b="0" i="0">
+                <a:solidFill>
+                  <a:srgbClr val="CCCCCC"/>
+                </a:solidFill>
+              </a:rPr>
+              <a:t>Webcam-based model
+corrects your signing</a:t>
+            </a:r>
+          </a:p>
+        </p:txBody>
+      </p:sp>
+      <p:sp>
+        <p:nvSpPr>
+          <p:cNvPr id="14" name="Rectangle 13"/>
           <p:cNvSpPr/>
           <p:nvPr/>
         </p:nvSpPr>
         <p:spPr>
           <a:xfrm>
-            <a:off x="6217920" y="3474720"/>
-            <a:ext cx="2286000" cy="1371600"/>
+            <a:off x="6309360" y="2286000"/>
+            <a:ext cx="2743200" cy="3200400"/>
           </a:xfrm>
           <a:prstGeom prst="rect">
             <a:avLst/>
           </a:prstGeom>
           <a:solidFill>
-            <a:srgbClr val="2A2A14"/>
+            <a:srgbClr val="0A2A3A"/>
           </a:solidFill>
-          <a:ln w="19050">
-            <a:solidFill>
-              <a:srgbClr val="4A4A20"/>
-            </a:solidFill>
+          <a:ln>
+            <a:noFill/>
           </a:ln>
         </p:spPr>
         <p:style>
@@ -4458,93 +4399,126 @@
       </p:sp>
       <p:sp>
         <p:nvSpPr>
-          <p:cNvPr id="13" name="TextBox 12"/>
-          <p:cNvSpPr txBox="1"/>
-          <p:nvPr/>
-        </p:nvSpPr>
-        <p:spPr>
-          <a:xfrm>
-            <a:off x="6217920" y="3566160"/>
-            <a:ext cx="2286000" cy="731520"/>
-          </a:xfrm>
-          <a:prstGeom prst="rect">
-            <a:avLst/>
-          </a:prstGeom>
-          <a:noFill/>
-        </p:spPr>
-        <p:txBody>
-          <a:bodyPr wrap="square">
-            <a:spAutoFit/>
-          </a:bodyPr>
-          <a:lstStyle/>
-          <a:p>
-            <a:pPr algn="ctr"/>
-            <a:r>
-              <a:rPr sz="2800" b="1">
-                <a:solidFill>
-                  <a:srgbClr val="A0D040"/>
-                </a:solidFill>
-              </a:rPr>
-              <a:t>📷</a:t>
-            </a:r>
-          </a:p>
-        </p:txBody>
-      </p:sp>
-      <p:sp>
-        <p:nvSpPr>
-          <p:cNvPr id="14" name="TextBox 13"/>
-          <p:cNvSpPr txBox="1"/>
-          <p:nvPr/>
-        </p:nvSpPr>
-        <p:spPr>
-          <a:xfrm>
-            <a:off x="6217920" y="4297680"/>
-            <a:ext cx="2286000" cy="457200"/>
-          </a:xfrm>
-          <a:prstGeom prst="rect">
-            <a:avLst/>
-          </a:prstGeom>
-          <a:noFill/>
-        </p:spPr>
-        <p:txBody>
-          <a:bodyPr wrap="square">
-            <a:spAutoFit/>
-          </a:bodyPr>
-          <a:lstStyle/>
-          <a:p>
-            <a:pPr algn="ctr"/>
-            <a:r>
-              <a:rPr sz="1100" b="0">
-                <a:solidFill>
-                  <a:srgbClr val="808060"/>
-                </a:solidFill>
-              </a:rPr>
-              <a:t>Live Camera</a:t>
-            </a:r>
-          </a:p>
-        </p:txBody>
-      </p:sp>
-      <p:sp>
-        <p:nvSpPr>
-          <p:cNvPr id="15" name="Rectangle 14"/>
+          <p:cNvPr id="15" name="TextBox 14"/>
+          <p:cNvSpPr txBox="1"/>
+          <p:nvPr/>
+        </p:nvSpPr>
+        <p:spPr>
+          <a:xfrm>
+            <a:off x="7132320" y="2423160"/>
+            <a:ext cx="1097280" cy="914400"/>
+          </a:xfrm>
+          <a:prstGeom prst="rect">
+            <a:avLst/>
+          </a:prstGeom>
+          <a:noFill/>
+        </p:spPr>
+        <p:txBody>
+          <a:bodyPr wrap="square">
+            <a:spAutoFit/>
+          </a:bodyPr>
+          <a:lstStyle/>
+          <a:p>
+            <a:pPr algn="ctr"/>
+            <a:r>
+              <a:rPr sz="3200" b="0" i="0">
+                <a:solidFill>
+                  <a:srgbClr val="FFFFFF"/>
+                </a:solidFill>
+              </a:rPr>
+              <a:t>🤖</a:t>
+            </a:r>
+          </a:p>
+        </p:txBody>
+      </p:sp>
+      <p:sp>
+        <p:nvSpPr>
+          <p:cNvPr id="16" name="TextBox 15"/>
+          <p:cNvSpPr txBox="1"/>
+          <p:nvPr/>
+        </p:nvSpPr>
+        <p:spPr>
+          <a:xfrm>
+            <a:off x="6400800" y="3246120"/>
+            <a:ext cx="2560320" cy="640080"/>
+          </a:xfrm>
+          <a:prstGeom prst="rect">
+            <a:avLst/>
+          </a:prstGeom>
+          <a:noFill/>
+        </p:spPr>
+        <p:txBody>
+          <a:bodyPr wrap="square">
+            <a:spAutoFit/>
+          </a:bodyPr>
+          <a:lstStyle/>
+          <a:p>
+            <a:pPr algn="ctr"/>
+            <a:r>
+              <a:rPr sz="1600" b="1" i="0">
+                <a:solidFill>
+                  <a:srgbClr val="00D4FF"/>
+                </a:solidFill>
+              </a:rPr>
+              <a:t>AI Tutor</a:t>
+            </a:r>
+          </a:p>
+        </p:txBody>
+      </p:sp>
+      <p:sp>
+        <p:nvSpPr>
+          <p:cNvPr id="17" name="TextBox 16"/>
+          <p:cNvSpPr txBox="1"/>
+          <p:nvPr/>
+        </p:nvSpPr>
+        <p:spPr>
+          <a:xfrm>
+            <a:off x="6400800" y="3886200"/>
+            <a:ext cx="2560320" cy="1371600"/>
+          </a:xfrm>
+          <a:prstGeom prst="rect">
+            <a:avLst/>
+          </a:prstGeom>
+          <a:noFill/>
+        </p:spPr>
+        <p:txBody>
+          <a:bodyPr wrap="square">
+            <a:spAutoFit/>
+          </a:bodyPr>
+          <a:lstStyle/>
+          <a:p>
+            <a:pPr algn="ctr"/>
+            <a:r>
+              <a:rPr sz="1300" b="0" i="0">
+                <a:solidFill>
+                  <a:srgbClr val="CCCCCC"/>
+                </a:solidFill>
+              </a:rPr>
+              <a:t>Recommends videos,
+classes &amp; schools</a:t>
+            </a:r>
+          </a:p>
+        </p:txBody>
+      </p:sp>
+      <p:sp>
+        <p:nvSpPr>
+          <p:cNvPr id="18" name="Rectangle 17"/>
           <p:cNvSpPr/>
           <p:nvPr/>
         </p:nvSpPr>
         <p:spPr>
           <a:xfrm>
-            <a:off x="8869680" y="3474720"/>
-            <a:ext cx="2286000" cy="1371600"/>
+            <a:off x="9235440" y="2286000"/>
+            <a:ext cx="2743200" cy="3200400"/>
           </a:xfrm>
           <a:prstGeom prst="rect">
             <a:avLst/>
           </a:prstGeom>
           <a:solidFill>
-            <a:srgbClr val="2A2A14"/>
+            <a:srgbClr val="0A2A3A"/>
           </a:solidFill>
-          <a:ln w="19050">
-            <a:solidFill>
-              <a:srgbClr val="4A4A20"/>
-            </a:solidFill>
+          <a:ln>
+            <a:noFill/>
           </a:ln>
         </p:spPr>
         <p:style>
@@ -4571,68 +4545,104 @@
       </p:sp>
       <p:sp>
         <p:nvSpPr>
-          <p:cNvPr id="16" name="TextBox 15"/>
-          <p:cNvSpPr txBox="1"/>
-          <p:nvPr/>
-        </p:nvSpPr>
-        <p:spPr>
-          <a:xfrm>
-            <a:off x="8869680" y="3566160"/>
-            <a:ext cx="2286000" cy="731520"/>
-          </a:xfrm>
-          <a:prstGeom prst="rect">
-            <a:avLst/>
-          </a:prstGeom>
-          <a:noFill/>
-        </p:spPr>
-        <p:txBody>
-          <a:bodyPr wrap="square">
-            <a:spAutoFit/>
-          </a:bodyPr>
-          <a:lstStyle/>
-          <a:p>
-            <a:pPr algn="ctr"/>
-            <a:r>
-              <a:rPr sz="2800" b="1">
-                <a:solidFill>
-                  <a:srgbClr val="A0D040"/>
-                </a:solidFill>
-              </a:rPr>
-              <a:t>🎮</a:t>
-            </a:r>
-          </a:p>
-        </p:txBody>
-      </p:sp>
-      <p:sp>
-        <p:nvSpPr>
-          <p:cNvPr id="17" name="TextBox 16"/>
-          <p:cNvSpPr txBox="1"/>
-          <p:nvPr/>
-        </p:nvSpPr>
-        <p:spPr>
-          <a:xfrm>
-            <a:off x="8869680" y="4297680"/>
-            <a:ext cx="2286000" cy="457200"/>
-          </a:xfrm>
-          <a:prstGeom prst="rect">
-            <a:avLst/>
-          </a:prstGeom>
-          <a:noFill/>
-        </p:spPr>
-        <p:txBody>
-          <a:bodyPr wrap="square">
-            <a:spAutoFit/>
-          </a:bodyPr>
-          <a:lstStyle/>
-          <a:p>
-            <a:pPr algn="ctr"/>
-            <a:r>
-              <a:rPr sz="1100" b="0">
-                <a:solidFill>
-                  <a:srgbClr val="808060"/>
-                </a:solidFill>
-              </a:rPr>
-              <a:t>Game Mode</a:t>
+          <p:cNvPr id="19" name="TextBox 18"/>
+          <p:cNvSpPr txBox="1"/>
+          <p:nvPr/>
+        </p:nvSpPr>
+        <p:spPr>
+          <a:xfrm>
+            <a:off x="10058400" y="2423160"/>
+            <a:ext cx="1097280" cy="914400"/>
+          </a:xfrm>
+          <a:prstGeom prst="rect">
+            <a:avLst/>
+          </a:prstGeom>
+          <a:noFill/>
+        </p:spPr>
+        <p:txBody>
+          <a:bodyPr wrap="square">
+            <a:spAutoFit/>
+          </a:bodyPr>
+          <a:lstStyle/>
+          <a:p>
+            <a:pPr algn="ctr"/>
+            <a:r>
+              <a:rPr sz="3200" b="0" i="0">
+                <a:solidFill>
+                  <a:srgbClr val="FFFFFF"/>
+                </a:solidFill>
+              </a:rPr>
+              <a:t>🔁</a:t>
+            </a:r>
+          </a:p>
+        </p:txBody>
+      </p:sp>
+      <p:sp>
+        <p:nvSpPr>
+          <p:cNvPr id="20" name="TextBox 19"/>
+          <p:cNvSpPr txBox="1"/>
+          <p:nvPr/>
+        </p:nvSpPr>
+        <p:spPr>
+          <a:xfrm>
+            <a:off x="9326880" y="3246120"/>
+            <a:ext cx="2560320" cy="640080"/>
+          </a:xfrm>
+          <a:prstGeom prst="rect">
+            <a:avLst/>
+          </a:prstGeom>
+          <a:noFill/>
+        </p:spPr>
+        <p:txBody>
+          <a:bodyPr wrap="square">
+            <a:spAutoFit/>
+          </a:bodyPr>
+          <a:lstStyle/>
+          <a:p>
+            <a:pPr algn="ctr"/>
+            <a:r>
+              <a:rPr sz="1600" b="1" i="0">
+                <a:solidFill>
+                  <a:srgbClr val="00D4FF"/>
+                </a:solidFill>
+              </a:rPr>
+              <a:t>Spaced
+Repetition</a:t>
+            </a:r>
+          </a:p>
+        </p:txBody>
+      </p:sp>
+      <p:sp>
+        <p:nvSpPr>
+          <p:cNvPr id="21" name="TextBox 20"/>
+          <p:cNvSpPr txBox="1"/>
+          <p:nvPr/>
+        </p:nvSpPr>
+        <p:spPr>
+          <a:xfrm>
+            <a:off x="9326880" y="3886200"/>
+            <a:ext cx="2560320" cy="1371600"/>
+          </a:xfrm>
+          <a:prstGeom prst="rect">
+            <a:avLst/>
+          </a:prstGeom>
+          <a:noFill/>
+        </p:spPr>
+        <p:txBody>
+          <a:bodyPr wrap="square">
+            <a:spAutoFit/>
+          </a:bodyPr>
+          <a:lstStyle/>
+          <a:p>
+            <a:pPr algn="ctr"/>
+            <a:r>
+              <a:rPr sz="1300" b="0" i="0">
+                <a:solidFill>
+                  <a:srgbClr val="CCCCCC"/>
+                </a:solidFill>
+              </a:rPr>
+              <a:t>Signs stick through
+smart review cycles</a:t>
             </a:r>
           </a:p>
         </p:txBody>
@@ -4651,7 +4661,7 @@
     <p:bg>
       <p:bgPr>
         <a:solidFill>
-          <a:srgbClr val="1A1A08"/>
+          <a:srgbClr val="0D1B2A"/>
         </a:solidFill>
         <a:effectLst/>
       </p:bgPr>
@@ -4672,18 +4682,16 @@
         <p:spPr>
           <a:xfrm>
             <a:off x="0" y="0"/>
-            <a:ext cx="12188952" cy="1005840"/>
+            <a:ext cx="12188952" cy="73152"/>
           </a:xfrm>
           <a:prstGeom prst="rect">
             <a:avLst/>
           </a:prstGeom>
           <a:solidFill>
-            <a:srgbClr val="2A2A14"/>
+            <a:srgbClr val="FFD700"/>
           </a:solidFill>
-          <a:ln w="25400">
-            <a:solidFill>
-              <a:srgbClr val="A0D040"/>
-            </a:solidFill>
+          <a:ln>
+            <a:noFill/>
           </a:ln>
         </p:spPr>
         <p:style>
@@ -4716,28 +4724,28 @@
         </p:nvSpPr>
         <p:spPr>
           <a:xfrm>
-            <a:off x="365760" y="182880"/>
-            <a:ext cx="11457432" cy="731520"/>
-          </a:xfrm>
-          <a:prstGeom prst="rect">
-            <a:avLst/>
-          </a:prstGeom>
-          <a:noFill/>
-        </p:spPr>
-        <p:txBody>
-          <a:bodyPr wrap="square">
-            <a:spAutoFit/>
-          </a:bodyPr>
-          <a:lstStyle/>
-          <a:p>
-            <a:pPr algn="ctr"/>
-            <a:r>
-              <a:rPr sz="2800" b="1">
-                <a:solidFill>
-                  <a:srgbClr val="A0D040"/>
-                </a:solidFill>
-              </a:rPr>
-              <a:t>Key Features</a:t>
+            <a:off x="457200" y="182880"/>
+            <a:ext cx="10972800" cy="822960"/>
+          </a:xfrm>
+          <a:prstGeom prst="rect">
+            <a:avLst/>
+          </a:prstGeom>
+          <a:noFill/>
+        </p:spPr>
+        <p:txBody>
+          <a:bodyPr wrap="square">
+            <a:spAutoFit/>
+          </a:bodyPr>
+          <a:lstStyle/>
+          <a:p>
+            <a:pPr algn="l"/>
+            <a:r>
+              <a:rPr sz="3600" b="1" i="0">
+                <a:solidFill>
+                  <a:srgbClr val="FFD700"/>
+                </a:solidFill>
+              </a:rPr>
+              <a:t>🎯  Who Is This For?</a:t>
             </a:r>
           </a:p>
         </p:txBody>
@@ -4750,19 +4758,17 @@
         </p:nvSpPr>
         <p:spPr>
           <a:xfrm>
-            <a:off x="457200" y="1188720"/>
-            <a:ext cx="11247120" cy="5303520"/>
+            <a:off x="457200" y="1005840"/>
+            <a:ext cx="11247120" cy="45720"/>
           </a:xfrm>
           <a:prstGeom prst="rect">
             <a:avLst/>
           </a:prstGeom>
           <a:solidFill>
-            <a:srgbClr val="2A2A14"/>
+            <a:srgbClr val="FFD700"/>
           </a:solidFill>
-          <a:ln w="19050">
-            <a:solidFill>
-              <a:srgbClr val="4A4A20"/>
-            </a:solidFill>
+          <a:ln>
+            <a:noFill/>
           </a:ln>
         </p:spPr>
         <p:style>
@@ -4789,143 +4795,361 @@
       </p:sp>
       <p:sp>
         <p:nvSpPr>
-          <p:cNvPr id="5" name="TextBox 4"/>
-          <p:cNvSpPr txBox="1"/>
-          <p:nvPr/>
-        </p:nvSpPr>
-        <p:spPr>
-          <a:xfrm>
-            <a:off x="594360" y="1280160"/>
-            <a:ext cx="10972800" cy="5120640"/>
-          </a:xfrm>
-          <a:prstGeom prst="rect">
-            <a:avLst/>
-          </a:prstGeom>
-          <a:noFill/>
-        </p:spPr>
-        <p:txBody>
-          <a:bodyPr wrap="square">
-            <a:spAutoFit/>
-          </a:bodyPr>
-          <a:lstStyle/>
-          <a:p>
-            <a:pPr algn="l">
-              <a:spcBef>
-                <a:spcPts val="400"/>
-              </a:spcBef>
-            </a:pPr>
-            <a:r>
-              <a:rPr sz="1100">
-                <a:solidFill>
-                  <a:srgbClr val="F0F0E0"/>
-                </a:solidFill>
-              </a:rPr>
-              <a:t>• Real-time ASL letter recognition via webcam (MediaPipe + custom ML model)</a:t>
-            </a:r>
-          </a:p>
-          <a:p>
-            <a:pPr algn="l">
-              <a:spcBef>
-                <a:spcPts val="400"/>
-              </a:spcBef>
-            </a:pPr>
-            <a:r>
-              <a:rPr sz="1100">
-                <a:solidFill>
-                  <a:srgbClr val="F0F0E0"/>
-                </a:solidFill>
-              </a:rPr>
-              <a:t>• Sign Sprint game — sign letters before the timer, earn points &amp; achievements</a:t>
-            </a:r>
-          </a:p>
-          <a:p>
-            <a:pPr algn="l">
-              <a:spcBef>
-                <a:spcPts val="400"/>
-              </a:spcBef>
-            </a:pPr>
-            <a:r>
-              <a:rPr sz="1100">
-                <a:solidFill>
-                  <a:srgbClr val="F0F0E0"/>
-                </a:solidFill>
-              </a:rPr>
-              <a:t>• Learn mode — interactive alphabet with animated SVG handshapes</a:t>
-            </a:r>
-          </a:p>
-          <a:p>
-            <a:pPr algn="l">
-              <a:spcBef>
-                <a:spcPts val="400"/>
-              </a:spcBef>
-            </a:pPr>
-            <a:r>
-              <a:rPr sz="1100">
-                <a:solidFill>
-                  <a:srgbClr val="F0F0E0"/>
-                </a:solidFill>
-              </a:rPr>
-              <a:t>• AI Tutor — streaming chat with Groq llama-3.3-70b, tool calling, web search</a:t>
-            </a:r>
-          </a:p>
-          <a:p>
-            <a:pPr algn="l">
-              <a:spcBef>
-                <a:spcPts val="400"/>
-              </a:spcBef>
-            </a:pPr>
-            <a:r>
-              <a:rPr sz="1100">
-                <a:solidFill>
-                  <a:srgbClr val="F0F0E0"/>
-                </a:solidFill>
-              </a:rPr>
-              <a:t>• Spell Your Name — sign each letter of your name with live camera feedback</a:t>
-            </a:r>
-          </a:p>
-          <a:p>
-            <a:pPr algn="l">
-              <a:spcBef>
-                <a:spcPts val="400"/>
-              </a:spcBef>
-            </a:pPr>
-            <a:r>
-              <a:rPr sz="1100">
-                <a:solidFill>
-                  <a:srgbClr val="F0F0E0"/>
-                </a:solidFill>
-              </a:rPr>
-              <a:t>• Progress tracking — practiced letters, streaks, achievements, high scores</a:t>
-            </a:r>
-          </a:p>
-          <a:p>
-            <a:pPr algn="l">
-              <a:spcBef>
-                <a:spcPts val="400"/>
-              </a:spcBef>
-            </a:pPr>
-            <a:r>
-              <a:rPr sz="1100">
-                <a:solidFill>
-                  <a:srgbClr val="F0F0E0"/>
-                </a:solidFill>
-              </a:rPr>
-              <a:t>• Supabase auth — login / guest mode, cloud sync across devices</a:t>
-            </a:r>
-          </a:p>
-          <a:p>
-            <a:pPr algn="l">
-              <a:spcBef>
-                <a:spcPts val="400"/>
-              </a:spcBef>
-            </a:pPr>
-            <a:r>
-              <a:rPr sz="1100">
-                <a:solidFill>
-                  <a:srgbClr val="F0F0E0"/>
-                </a:solidFill>
-              </a:rPr>
-              <a:t>• Daily challenges, quiz mode, difficulty levels (Easy / Normal / Hard)</a:t>
+          <p:cNvPr id="5" name="Rectangle 4"/>
+          <p:cNvSpPr/>
+          <p:nvPr/>
+        </p:nvSpPr>
+        <p:spPr>
+          <a:xfrm>
+            <a:off x="457200" y="1280160"/>
+            <a:ext cx="5303520" cy="5029200"/>
+          </a:xfrm>
+          <a:prstGeom prst="rect">
+            <a:avLst/>
+          </a:prstGeom>
+          <a:solidFill>
+            <a:srgbClr val="121200"/>
+          </a:solidFill>
+          <a:ln>
+            <a:noFill/>
+          </a:ln>
+        </p:spPr>
+        <p:style>
+          <a:lnRef idx="1">
+            <a:schemeClr val="accent1"/>
+          </a:lnRef>
+          <a:fillRef idx="3">
+            <a:schemeClr val="accent1"/>
+          </a:fillRef>
+          <a:effectRef idx="2">
+            <a:schemeClr val="accent1"/>
+          </a:effectRef>
+          <a:fontRef idx="minor">
+            <a:schemeClr val="lt1"/>
+          </a:fontRef>
+        </p:style>
+        <p:txBody>
+          <a:bodyPr rtlCol="0" anchor="ctr"/>
+          <a:lstStyle/>
+          <a:p>
+            <a:pPr algn="ctr"/>
+          </a:p>
+        </p:txBody>
+      </p:sp>
+      <p:sp>
+        <p:nvSpPr>
+          <p:cNvPr id="6" name="TextBox 5"/>
+          <p:cNvSpPr txBox="1"/>
+          <p:nvPr/>
+        </p:nvSpPr>
+        <p:spPr>
+          <a:xfrm>
+            <a:off x="1371600" y="1554480"/>
+            <a:ext cx="3474720" cy="1371600"/>
+          </a:xfrm>
+          <a:prstGeom prst="rect">
+            <a:avLst/>
+          </a:prstGeom>
+          <a:noFill/>
+        </p:spPr>
+        <p:txBody>
+          <a:bodyPr wrap="square">
+            <a:spAutoFit/>
+          </a:bodyPr>
+          <a:lstStyle/>
+          <a:p>
+            <a:pPr algn="ctr"/>
+            <a:r>
+              <a:rPr sz="6000" b="0" i="0">
+                <a:solidFill>
+                  <a:srgbClr val="FFFFFF"/>
+                </a:solidFill>
+              </a:rPr>
+              <a:t>👧🧒</a:t>
+            </a:r>
+          </a:p>
+        </p:txBody>
+      </p:sp>
+      <p:sp>
+        <p:nvSpPr>
+          <p:cNvPr id="7" name="TextBox 6"/>
+          <p:cNvSpPr txBox="1"/>
+          <p:nvPr/>
+        </p:nvSpPr>
+        <p:spPr>
+          <a:xfrm>
+            <a:off x="640080" y="2926080"/>
+            <a:ext cx="4937760" cy="914400"/>
+          </a:xfrm>
+          <a:prstGeom prst="rect">
+            <a:avLst/>
+          </a:prstGeom>
+          <a:noFill/>
+        </p:spPr>
+        <p:txBody>
+          <a:bodyPr wrap="square">
+            <a:spAutoFit/>
+          </a:bodyPr>
+          <a:lstStyle/>
+          <a:p>
+            <a:pPr algn="ctr"/>
+            <a:r>
+              <a:rPr sz="2000" b="1" i="0">
+                <a:solidFill>
+                  <a:srgbClr val="FFD700"/>
+                </a:solidFill>
+              </a:rPr>
+              <a:t>Children with
+hearing disabilities</a:t>
+            </a:r>
+          </a:p>
+        </p:txBody>
+      </p:sp>
+      <p:sp>
+        <p:nvSpPr>
+          <p:cNvPr id="8" name="TextBox 7"/>
+          <p:cNvSpPr txBox="1"/>
+          <p:nvPr/>
+        </p:nvSpPr>
+        <p:spPr>
+          <a:xfrm>
+            <a:off x="640080" y="3840480"/>
+            <a:ext cx="4937760" cy="1371600"/>
+          </a:xfrm>
+          <a:prstGeom prst="rect">
+            <a:avLst/>
+          </a:prstGeom>
+          <a:noFill/>
+        </p:spPr>
+        <p:txBody>
+          <a:bodyPr wrap="square">
+            <a:spAutoFit/>
+          </a:bodyPr>
+          <a:lstStyle/>
+          <a:p>
+            <a:pPr algn="ctr"/>
+            <a:r>
+              <a:rPr sz="1500" b="0" i="0">
+                <a:solidFill>
+                  <a:srgbClr val="CCCCCC"/>
+                </a:solidFill>
+              </a:rPr>
+              <a:t>Early development is the
+critical window for language
+acquisition — we meet them there.</a:t>
+            </a:r>
+          </a:p>
+        </p:txBody>
+      </p:sp>
+      <p:sp>
+        <p:nvSpPr>
+          <p:cNvPr id="9" name="Rectangle 8"/>
+          <p:cNvSpPr/>
+          <p:nvPr/>
+        </p:nvSpPr>
+        <p:spPr>
+          <a:xfrm>
+            <a:off x="6400800" y="1280160"/>
+            <a:ext cx="5303520" cy="5029200"/>
+          </a:xfrm>
+          <a:prstGeom prst="rect">
+            <a:avLst/>
+          </a:prstGeom>
+          <a:solidFill>
+            <a:srgbClr val="121200"/>
+          </a:solidFill>
+          <a:ln>
+            <a:noFill/>
+          </a:ln>
+        </p:spPr>
+        <p:style>
+          <a:lnRef idx="1">
+            <a:schemeClr val="accent1"/>
+          </a:lnRef>
+          <a:fillRef idx="3">
+            <a:schemeClr val="accent1"/>
+          </a:fillRef>
+          <a:effectRef idx="2">
+            <a:schemeClr val="accent1"/>
+          </a:effectRef>
+          <a:fontRef idx="minor">
+            <a:schemeClr val="lt1"/>
+          </a:fontRef>
+        </p:style>
+        <p:txBody>
+          <a:bodyPr rtlCol="0" anchor="ctr"/>
+          <a:lstStyle/>
+          <a:p>
+            <a:pPr algn="ctr"/>
+          </a:p>
+        </p:txBody>
+      </p:sp>
+      <p:sp>
+        <p:nvSpPr>
+          <p:cNvPr id="10" name="TextBox 9"/>
+          <p:cNvSpPr txBox="1"/>
+          <p:nvPr/>
+        </p:nvSpPr>
+        <p:spPr>
+          <a:xfrm>
+            <a:off x="6675120" y="1554480"/>
+            <a:ext cx="4754880" cy="548640"/>
+          </a:xfrm>
+          <a:prstGeom prst="rect">
+            <a:avLst/>
+          </a:prstGeom>
+          <a:noFill/>
+        </p:spPr>
+        <p:txBody>
+          <a:bodyPr wrap="square">
+            <a:spAutoFit/>
+          </a:bodyPr>
+          <a:lstStyle/>
+          <a:p>
+            <a:pPr algn="l"/>
+            <a:r>
+              <a:rPr sz="1800" b="1" i="0">
+                <a:solidFill>
+                  <a:srgbClr val="FFD700"/>
+                </a:solidFill>
+              </a:rPr>
+              <a:t>Why Early?</a:t>
+            </a:r>
+          </a:p>
+        </p:txBody>
+      </p:sp>
+      <p:sp>
+        <p:nvSpPr>
+          <p:cNvPr id="11" name="TextBox 10"/>
+          <p:cNvSpPr txBox="1"/>
+          <p:nvPr/>
+        </p:nvSpPr>
+        <p:spPr>
+          <a:xfrm>
+            <a:off x="6675120" y="2194560"/>
+            <a:ext cx="4754880" cy="731520"/>
+          </a:xfrm>
+          <a:prstGeom prst="rect">
+            <a:avLst/>
+          </a:prstGeom>
+          <a:noFill/>
+        </p:spPr>
+        <p:txBody>
+          <a:bodyPr wrap="square">
+            <a:spAutoFit/>
+          </a:bodyPr>
+          <a:lstStyle/>
+          <a:p>
+            <a:pPr algn="l"/>
+            <a:r>
+              <a:rPr sz="1400" b="0" i="0">
+                <a:solidFill>
+                  <a:srgbClr val="CCCCCC"/>
+                </a:solidFill>
+              </a:rPr>
+              <a:t>✓  Language skills form in early childhood</a:t>
+            </a:r>
+          </a:p>
+        </p:txBody>
+      </p:sp>
+      <p:sp>
+        <p:nvSpPr>
+          <p:cNvPr id="12" name="TextBox 11"/>
+          <p:cNvSpPr txBox="1"/>
+          <p:nvPr/>
+        </p:nvSpPr>
+        <p:spPr>
+          <a:xfrm>
+            <a:off x="6675120" y="3017520"/>
+            <a:ext cx="4754880" cy="731520"/>
+          </a:xfrm>
+          <a:prstGeom prst="rect">
+            <a:avLst/>
+          </a:prstGeom>
+          <a:noFill/>
+        </p:spPr>
+        <p:txBody>
+          <a:bodyPr wrap="square">
+            <a:spAutoFit/>
+          </a:bodyPr>
+          <a:lstStyle/>
+          <a:p>
+            <a:pPr algn="l"/>
+            <a:r>
+              <a:rPr sz="1400" b="0" i="0">
+                <a:solidFill>
+                  <a:srgbClr val="CCCCCC"/>
+                </a:solidFill>
+              </a:rPr>
+              <a:t>✓  Early ASL exposure improves literacy</a:t>
+            </a:r>
+          </a:p>
+        </p:txBody>
+      </p:sp>
+      <p:sp>
+        <p:nvSpPr>
+          <p:cNvPr id="13" name="TextBox 12"/>
+          <p:cNvSpPr txBox="1"/>
+          <p:nvPr/>
+        </p:nvSpPr>
+        <p:spPr>
+          <a:xfrm>
+            <a:off x="6675120" y="3840480"/>
+            <a:ext cx="4754880" cy="731520"/>
+          </a:xfrm>
+          <a:prstGeom prst="rect">
+            <a:avLst/>
+          </a:prstGeom>
+          <a:noFill/>
+        </p:spPr>
+        <p:txBody>
+          <a:bodyPr wrap="square">
+            <a:spAutoFit/>
+          </a:bodyPr>
+          <a:lstStyle/>
+          <a:p>
+            <a:pPr algn="l"/>
+            <a:r>
+              <a:rPr sz="1400" b="0" i="0">
+                <a:solidFill>
+                  <a:srgbClr val="CCCCCC"/>
+                </a:solidFill>
+              </a:rPr>
+              <a:t>✓  Prevents social isolation before it starts</a:t>
+            </a:r>
+          </a:p>
+        </p:txBody>
+      </p:sp>
+      <p:sp>
+        <p:nvSpPr>
+          <p:cNvPr id="14" name="TextBox 13"/>
+          <p:cNvSpPr txBox="1"/>
+          <p:nvPr/>
+        </p:nvSpPr>
+        <p:spPr>
+          <a:xfrm>
+            <a:off x="6675120" y="4663440"/>
+            <a:ext cx="4754880" cy="731520"/>
+          </a:xfrm>
+          <a:prstGeom prst="rect">
+            <a:avLst/>
+          </a:prstGeom>
+          <a:noFill/>
+        </p:spPr>
+        <p:txBody>
+          <a:bodyPr wrap="square">
+            <a:spAutoFit/>
+          </a:bodyPr>
+          <a:lstStyle/>
+          <a:p>
+            <a:pPr algn="l"/>
+            <a:r>
+              <a:rPr sz="1400" b="0" i="0">
+                <a:solidFill>
+                  <a:srgbClr val="CCCCCC"/>
+                </a:solidFill>
+              </a:rPr>
+              <a:t>✓  Fun &amp; games = higher engagement for kids</a:t>
             </a:r>
           </a:p>
         </p:txBody>
@@ -4944,7 +5168,7 @@
     <p:bg>
       <p:bgPr>
         <a:solidFill>
-          <a:srgbClr val="1A1A08"/>
+          <a:srgbClr val="0D1B2A"/>
         </a:solidFill>
         <a:effectLst/>
       </p:bgPr>
@@ -4965,18 +5189,16 @@
         <p:spPr>
           <a:xfrm>
             <a:off x="0" y="0"/>
-            <a:ext cx="12188952" cy="1005840"/>
+            <a:ext cx="12188952" cy="73152"/>
           </a:xfrm>
           <a:prstGeom prst="rect">
             <a:avLst/>
           </a:prstGeom>
           <a:solidFill>
-            <a:srgbClr val="2A2A14"/>
+            <a:srgbClr val="7C3AFF"/>
           </a:solidFill>
-          <a:ln w="25400">
-            <a:solidFill>
-              <a:srgbClr val="A0D040"/>
-            </a:solidFill>
+          <a:ln>
+            <a:noFill/>
           </a:ln>
         </p:spPr>
         <p:style>
@@ -5009,28 +5231,28 @@
         </p:nvSpPr>
         <p:spPr>
           <a:xfrm>
-            <a:off x="365760" y="182880"/>
-            <a:ext cx="11457432" cy="731520"/>
-          </a:xfrm>
-          <a:prstGeom prst="rect">
-            <a:avLst/>
-          </a:prstGeom>
-          <a:noFill/>
-        </p:spPr>
-        <p:txBody>
-          <a:bodyPr wrap="square">
-            <a:spAutoFit/>
-          </a:bodyPr>
-          <a:lstStyle/>
-          <a:p>
-            <a:pPr algn="ctr"/>
-            <a:r>
-              <a:rPr sz="2800" b="1">
-                <a:solidFill>
-                  <a:srgbClr val="A0D040"/>
-                </a:solidFill>
-              </a:rPr>
-              <a:t>AI Tutor — Powered by Groq</a:t>
+            <a:off x="457200" y="182880"/>
+            <a:ext cx="10972800" cy="822960"/>
+          </a:xfrm>
+          <a:prstGeom prst="rect">
+            <a:avLst/>
+          </a:prstGeom>
+          <a:noFill/>
+        </p:spPr>
+        <p:txBody>
+          <a:bodyPr wrap="square">
+            <a:spAutoFit/>
+          </a:bodyPr>
+          <a:lstStyle/>
+          <a:p>
+            <a:pPr algn="l"/>
+            <a:r>
+              <a:rPr sz="3600" b="1" i="0">
+                <a:solidFill>
+                  <a:srgbClr val="7C3AFF"/>
+                </a:solidFill>
+              </a:rPr>
+              <a:t>⚔️  vs. The Competition</a:t>
             </a:r>
           </a:p>
         </p:txBody>
@@ -5043,19 +5265,17 @@
         </p:nvSpPr>
         <p:spPr>
           <a:xfrm>
-            <a:off x="182880" y="1188720"/>
-            <a:ext cx="3749039" cy="2377440"/>
+            <a:off x="457200" y="1005840"/>
+            <a:ext cx="11247120" cy="45720"/>
           </a:xfrm>
           <a:prstGeom prst="rect">
             <a:avLst/>
           </a:prstGeom>
           <a:solidFill>
-            <a:srgbClr val="2A2A14"/>
+            <a:srgbClr val="7C3AFF"/>
           </a:solidFill>
-          <a:ln w="19050">
-            <a:solidFill>
-              <a:srgbClr val="4A4A20"/>
-            </a:solidFill>
+          <a:ln>
+            <a:noFill/>
           </a:ln>
         </p:spPr>
         <p:style>
@@ -5082,89 +5302,23 @@
       </p:sp>
       <p:sp>
         <p:nvSpPr>
-          <p:cNvPr id="5" name="TextBox 4"/>
-          <p:cNvSpPr txBox="1"/>
-          <p:nvPr/>
-        </p:nvSpPr>
-        <p:spPr>
-          <a:xfrm>
-            <a:off x="320040" y="1280160"/>
-            <a:ext cx="3474719" cy="2194560"/>
-          </a:xfrm>
-          <a:prstGeom prst="rect">
-            <a:avLst/>
-          </a:prstGeom>
-          <a:noFill/>
-        </p:spPr>
-        <p:txBody>
-          <a:bodyPr wrap="square">
-            <a:spAutoFit/>
-          </a:bodyPr>
-          <a:lstStyle/>
-          <a:p>
-            <a:pPr algn="l"/>
-            <a:r>
-              <a:rPr sz="1400" b="1">
-                <a:solidFill>
-                  <a:srgbClr val="A0D040"/>
-                </a:solidFill>
-              </a:rPr>
-              <a:t>🧠  Personalized</a:t>
-            </a:r>
-          </a:p>
-          <a:p>
-            <a:pPr algn="l">
-              <a:spcBef>
-                <a:spcPts val="400"/>
-              </a:spcBef>
-            </a:pPr>
-            <a:r>
-              <a:rPr sz="1100">
-                <a:solidFill>
-                  <a:srgbClr val="F0F0E0"/>
-                </a:solidFill>
-              </a:rPr>
-              <a:t>▸ Knows your practiced letters &amp; weak spots</a:t>
-            </a:r>
-          </a:p>
-          <a:p>
-            <a:pPr algn="l">
-              <a:spcBef>
-                <a:spcPts val="400"/>
-              </a:spcBef>
-            </a:pPr>
-            <a:r>
-              <a:rPr sz="1100">
-                <a:solidFill>
-                  <a:srgbClr val="F0F0E0"/>
-                </a:solidFill>
-              </a:rPr>
-              <a:t>▸ Every response tailored to your progress</a:t>
-            </a:r>
-          </a:p>
-        </p:txBody>
-      </p:sp>
-      <p:sp>
-        <p:nvSpPr>
-          <p:cNvPr id="6" name="Rectangle 5"/>
+          <p:cNvPr id="5" name="Rectangle 4"/>
           <p:cNvSpPr/>
           <p:nvPr/>
         </p:nvSpPr>
         <p:spPr>
           <a:xfrm>
-            <a:off x="4160520" y="1188720"/>
-            <a:ext cx="3749039" cy="2377440"/>
+            <a:off x="457200" y="1188720"/>
+            <a:ext cx="5029200" cy="502920"/>
           </a:xfrm>
           <a:prstGeom prst="rect">
             <a:avLst/>
           </a:prstGeom>
           <a:solidFill>
-            <a:srgbClr val="2A2A14"/>
+            <a:srgbClr val="3A1A6A"/>
           </a:solidFill>
-          <a:ln w="19050">
-            <a:solidFill>
-              <a:srgbClr val="4A4A20"/>
-            </a:solidFill>
+          <a:ln>
+            <a:noFill/>
           </a:ln>
         </p:spPr>
         <p:style>
@@ -5191,89 +5345,23 @@
       </p:sp>
       <p:sp>
         <p:nvSpPr>
-          <p:cNvPr id="7" name="TextBox 6"/>
-          <p:cNvSpPr txBox="1"/>
-          <p:nvPr/>
-        </p:nvSpPr>
-        <p:spPr>
-          <a:xfrm>
-            <a:off x="4297680" y="1280160"/>
-            <a:ext cx="3474719" cy="2194560"/>
-          </a:xfrm>
-          <a:prstGeom prst="rect">
-            <a:avLst/>
-          </a:prstGeom>
-          <a:noFill/>
-        </p:spPr>
-        <p:txBody>
-          <a:bodyPr wrap="square">
-            <a:spAutoFit/>
-          </a:bodyPr>
-          <a:lstStyle/>
-          <a:p>
-            <a:pPr algn="l"/>
-            <a:r>
-              <a:rPr sz="1400" b="1">
-                <a:solidFill>
-                  <a:srgbClr val="A0D040"/>
-                </a:solidFill>
-              </a:rPr>
-              <a:t>🔧  8 Tool Calls</a:t>
-            </a:r>
-          </a:p>
-          <a:p>
-            <a:pPr algn="l">
-              <a:spcBef>
-                <a:spcPts val="400"/>
-              </a:spcBef>
-            </a:pPr>
-            <a:r>
-              <a:rPr sz="1100">
-                <a:solidFill>
-                  <a:srgbClr val="F0F0E0"/>
-                </a:solidFill>
-              </a:rPr>
-              <a:t>▸ Stats, lesson plans, web search</a:t>
-            </a:r>
-          </a:p>
-          <a:p>
-            <a:pPr algn="l">
-              <a:spcBef>
-                <a:spcPts val="400"/>
-              </a:spcBef>
-            </a:pPr>
-            <a:r>
-              <a:rPr sz="1100">
-                <a:solidFill>
-                  <a:srgbClr val="F0F0E0"/>
-                </a:solidFill>
-              </a:rPr>
-              <a:t>▸ Sign lookup, Deaf culture, common errors</a:t>
-            </a:r>
-          </a:p>
-        </p:txBody>
-      </p:sp>
-      <p:sp>
-        <p:nvSpPr>
-          <p:cNvPr id="8" name="Rectangle 7"/>
+          <p:cNvPr id="6" name="Rectangle 5"/>
           <p:cNvSpPr/>
           <p:nvPr/>
         </p:nvSpPr>
         <p:spPr>
           <a:xfrm>
-            <a:off x="8138160" y="1188720"/>
-            <a:ext cx="3749039" cy="2377440"/>
+            <a:off x="5669280" y="1188720"/>
+            <a:ext cx="6035040" cy="502920"/>
           </a:xfrm>
           <a:prstGeom prst="rect">
             <a:avLst/>
           </a:prstGeom>
           <a:solidFill>
-            <a:srgbClr val="2A2A14"/>
+            <a:srgbClr val="003A4A"/>
           </a:solidFill>
-          <a:ln w="19050">
-            <a:solidFill>
-              <a:srgbClr val="4A4A20"/>
-            </a:solidFill>
+          <a:ln>
+            <a:noFill/>
           </a:ln>
         </p:spPr>
         <p:style>
@@ -5300,89 +5388,91 @@
       </p:sp>
       <p:sp>
         <p:nvSpPr>
-          <p:cNvPr id="9" name="TextBox 8"/>
-          <p:cNvSpPr txBox="1"/>
-          <p:nvPr/>
-        </p:nvSpPr>
-        <p:spPr>
-          <a:xfrm>
-            <a:off x="8275320" y="1280160"/>
-            <a:ext cx="3474719" cy="2194560"/>
-          </a:xfrm>
-          <a:prstGeom prst="rect">
-            <a:avLst/>
-          </a:prstGeom>
-          <a:noFill/>
-        </p:spPr>
-        <p:txBody>
-          <a:bodyPr wrap="square">
-            <a:spAutoFit/>
-          </a:bodyPr>
-          <a:lstStyle/>
-          <a:p>
-            <a:pPr algn="l"/>
-            <a:r>
-              <a:rPr sz="1400" b="1">
-                <a:solidFill>
-                  <a:srgbClr val="A0D040"/>
-                </a:solidFill>
-              </a:rPr>
-              <a:t>🌐  Web Search</a:t>
-            </a:r>
-          </a:p>
-          <a:p>
-            <a:pPr algn="l">
-              <a:spcBef>
-                <a:spcPts val="400"/>
-              </a:spcBef>
-            </a:pPr>
-            <a:r>
-              <a:rPr sz="1100">
-                <a:solidFill>
-                  <a:srgbClr val="F0F0E0"/>
-                </a:solidFill>
-              </a:rPr>
-              <a:t>▸ Tavily-powered real-time search</a:t>
-            </a:r>
-          </a:p>
-          <a:p>
-            <a:pPr algn="l">
-              <a:spcBef>
-                <a:spcPts val="400"/>
-              </a:spcBef>
-            </a:pPr>
-            <a:r>
-              <a:rPr sz="1100">
-                <a:solidFill>
-                  <a:srgbClr val="F0F0E0"/>
-                </a:solidFill>
-              </a:rPr>
-              <a:t>▸ Finds YouTube tutorials &amp; ASL resources</a:t>
-            </a:r>
-          </a:p>
-        </p:txBody>
-      </p:sp>
-      <p:sp>
-        <p:nvSpPr>
-          <p:cNvPr id="10" name="Rectangle 9"/>
+          <p:cNvPr id="7" name="TextBox 6"/>
+          <p:cNvSpPr txBox="1"/>
+          <p:nvPr/>
+        </p:nvSpPr>
+        <p:spPr>
+          <a:xfrm>
+            <a:off x="640080" y="1234440"/>
+            <a:ext cx="4572000" cy="411480"/>
+          </a:xfrm>
+          <a:prstGeom prst="rect">
+            <a:avLst/>
+          </a:prstGeom>
+          <a:noFill/>
+        </p:spPr>
+        <p:txBody>
+          <a:bodyPr wrap="square">
+            <a:spAutoFit/>
+          </a:bodyPr>
+          <a:lstStyle/>
+          <a:p>
+            <a:pPr algn="ctr"/>
+            <a:r>
+              <a:rPr sz="1800" b="1" i="0">
+                <a:solidFill>
+                  <a:srgbClr val="CCCCCC"/>
+                </a:solidFill>
+              </a:rPr>
+              <a:t>Others</a:t>
+            </a:r>
+          </a:p>
+        </p:txBody>
+      </p:sp>
+      <p:sp>
+        <p:nvSpPr>
+          <p:cNvPr id="8" name="TextBox 7"/>
+          <p:cNvSpPr txBox="1"/>
+          <p:nvPr/>
+        </p:nvSpPr>
+        <p:spPr>
+          <a:xfrm>
+            <a:off x="5852160" y="1234440"/>
+            <a:ext cx="5486400" cy="411480"/>
+          </a:xfrm>
+          <a:prstGeom prst="rect">
+            <a:avLst/>
+          </a:prstGeom>
+          <a:noFill/>
+        </p:spPr>
+        <p:txBody>
+          <a:bodyPr wrap="square">
+            <a:spAutoFit/>
+          </a:bodyPr>
+          <a:lstStyle/>
+          <a:p>
+            <a:pPr algn="ctr"/>
+            <a:r>
+              <a:rPr sz="1800" b="1" i="0">
+                <a:solidFill>
+                  <a:srgbClr val="00D4FF"/>
+                </a:solidFill>
+              </a:rPr>
+              <a:t>SignQuest  🤟</a:t>
+            </a:r>
+          </a:p>
+        </p:txBody>
+      </p:sp>
+      <p:sp>
+        <p:nvSpPr>
+          <p:cNvPr id="9" name="Rectangle 8"/>
           <p:cNvSpPr/>
           <p:nvPr/>
         </p:nvSpPr>
         <p:spPr>
           <a:xfrm>
-            <a:off x="182880" y="3749039"/>
-            <a:ext cx="3749039" cy="2377440"/>
+            <a:off x="457200" y="1828800"/>
+            <a:ext cx="5029200" cy="731520"/>
           </a:xfrm>
           <a:prstGeom prst="rect">
             <a:avLst/>
           </a:prstGeom>
           <a:solidFill>
-            <a:srgbClr val="2A2A14"/>
+            <a:srgbClr val="151025"/>
           </a:solidFill>
-          <a:ln w="19050">
-            <a:solidFill>
-              <a:srgbClr val="4A4A20"/>
-            </a:solidFill>
+          <a:ln>
+            <a:noFill/>
           </a:ln>
         </p:spPr>
         <p:style>
@@ -5409,89 +5499,23 @@
       </p:sp>
       <p:sp>
         <p:nvSpPr>
-          <p:cNvPr id="11" name="TextBox 10"/>
-          <p:cNvSpPr txBox="1"/>
-          <p:nvPr/>
-        </p:nvSpPr>
-        <p:spPr>
-          <a:xfrm>
-            <a:off x="320040" y="3840479"/>
-            <a:ext cx="3474719" cy="2194560"/>
-          </a:xfrm>
-          <a:prstGeom prst="rect">
-            <a:avLst/>
-          </a:prstGeom>
-          <a:noFill/>
-        </p:spPr>
-        <p:txBody>
-          <a:bodyPr wrap="square">
-            <a:spAutoFit/>
-          </a:bodyPr>
-          <a:lstStyle/>
-          <a:p>
-            <a:pPr algn="l"/>
-            <a:r>
-              <a:rPr sz="1400" b="1">
-                <a:solidFill>
-                  <a:srgbClr val="A0D040"/>
-                </a:solidFill>
-              </a:rPr>
-              <a:t>📋  Lesson Plans</a:t>
-            </a:r>
-          </a:p>
-          <a:p>
-            <a:pPr algn="l">
-              <a:spcBef>
-                <a:spcPts val="400"/>
-              </a:spcBef>
-            </a:pPr>
-            <a:r>
-              <a:rPr sz="1100">
-                <a:solidFill>
-                  <a:srgbClr val="F0F0E0"/>
-                </a:solidFill>
-              </a:rPr>
-              <a:t>▸ Structured exercises &amp; weak spot analysis</a:t>
-            </a:r>
-          </a:p>
-          <a:p>
-            <a:pPr algn="l">
-              <a:spcBef>
-                <a:spcPts val="400"/>
-              </a:spcBef>
-            </a:pPr>
-            <a:r>
-              <a:rPr sz="1100">
-                <a:solidFill>
-                  <a:srgbClr val="F0F0E0"/>
-                </a:solidFill>
-              </a:rPr>
-              <a:t>▸ Next letters to learn, drill suggestions</a:t>
-            </a:r>
-          </a:p>
-        </p:txBody>
-      </p:sp>
-      <p:sp>
-        <p:nvSpPr>
-          <p:cNvPr id="12" name="Rectangle 11"/>
+          <p:cNvPr id="10" name="Rectangle 9"/>
           <p:cNvSpPr/>
           <p:nvPr/>
         </p:nvSpPr>
         <p:spPr>
           <a:xfrm>
-            <a:off x="4160520" y="3749039"/>
-            <a:ext cx="3749039" cy="2377440"/>
+            <a:off x="5669280" y="1828800"/>
+            <a:ext cx="6035040" cy="731520"/>
           </a:xfrm>
           <a:prstGeom prst="rect">
             <a:avLst/>
           </a:prstGeom>
           <a:solidFill>
-            <a:srgbClr val="2A2A14"/>
+            <a:srgbClr val="051A25"/>
           </a:solidFill>
-          <a:ln w="19050">
-            <a:solidFill>
-              <a:srgbClr val="4A4A20"/>
-            </a:solidFill>
+          <a:ln>
+            <a:noFill/>
           </a:ln>
         </p:spPr>
         <p:style>
@@ -5518,14 +5542,14 @@
       </p:sp>
       <p:sp>
         <p:nvSpPr>
-          <p:cNvPr id="13" name="TextBox 12"/>
-          <p:cNvSpPr txBox="1"/>
-          <p:nvPr/>
-        </p:nvSpPr>
-        <p:spPr>
-          <a:xfrm>
-            <a:off x="4297680" y="3840479"/>
-            <a:ext cx="3474719" cy="2194560"/>
+          <p:cNvPr id="11" name="TextBox 10"/>
+          <p:cNvSpPr txBox="1"/>
+          <p:nvPr/>
+        </p:nvSpPr>
+        <p:spPr>
+          <a:xfrm>
+            <a:off x="640080" y="1920240"/>
+            <a:ext cx="4663440" cy="548640"/>
           </a:xfrm>
           <a:prstGeom prst="rect">
             <a:avLst/>
@@ -5540,67 +5564,69 @@
           <a:p>
             <a:pPr algn="l"/>
             <a:r>
-              <a:rPr sz="1400" b="1">
-                <a:solidFill>
-                  <a:srgbClr val="A0D040"/>
-                </a:solidFill>
-              </a:rPr>
-              <a:t>🏛️  Deaf Culture</a:t>
-            </a:r>
-          </a:p>
-          <a:p>
-            <a:pPr algn="l">
-              <a:spcBef>
-                <a:spcPts val="400"/>
-              </a:spcBef>
-            </a:pPr>
-            <a:r>
-              <a:rPr sz="1100">
-                <a:solidFill>
-                  <a:srgbClr val="F0F0E0"/>
-                </a:solidFill>
-              </a:rPr>
-              <a:t>▸ ASL grammar (not English word order)</a:t>
-            </a:r>
-          </a:p>
-          <a:p>
-            <a:pPr algn="l">
-              <a:spcBef>
-                <a:spcPts val="400"/>
-              </a:spcBef>
-            </a:pPr>
-            <a:r>
-              <a:rPr sz="1100">
-                <a:solidFill>
-                  <a:srgbClr val="F0F0E0"/>
-                </a:solidFill>
-              </a:rPr>
-              <a:t>▸ History, culture, facial expressions</a:t>
-            </a:r>
-          </a:p>
-        </p:txBody>
-      </p:sp>
-      <p:sp>
-        <p:nvSpPr>
-          <p:cNvPr id="14" name="Rectangle 13"/>
+              <a:rPr sz="1300" b="0" i="0">
+                <a:solidFill>
+                  <a:srgbClr val="FF6666"/>
+                </a:solidFill>
+              </a:rPr>
+              <a:t>✗  Static flashcards only</a:t>
+            </a:r>
+          </a:p>
+        </p:txBody>
+      </p:sp>
+      <p:sp>
+        <p:nvSpPr>
+          <p:cNvPr id="12" name="TextBox 11"/>
+          <p:cNvSpPr txBox="1"/>
+          <p:nvPr/>
+        </p:nvSpPr>
+        <p:spPr>
+          <a:xfrm>
+            <a:off x="5852160" y="1920240"/>
+            <a:ext cx="5669280" cy="548640"/>
+          </a:xfrm>
+          <a:prstGeom prst="rect">
+            <a:avLst/>
+          </a:prstGeom>
+          <a:noFill/>
+        </p:spPr>
+        <p:txBody>
+          <a:bodyPr wrap="square">
+            <a:spAutoFit/>
+          </a:bodyPr>
+          <a:lstStyle/>
+          <a:p>
+            <a:pPr algn="l"/>
+            <a:r>
+              <a:rPr sz="1300" b="0" i="0">
+                <a:solidFill>
+                  <a:srgbClr val="66FFAA"/>
+                </a:solidFill>
+              </a:rPr>
+              <a:t>✓  Real-time webcam signing practice</a:t>
+            </a:r>
+          </a:p>
+        </p:txBody>
+      </p:sp>
+      <p:sp>
+        <p:nvSpPr>
+          <p:cNvPr id="13" name="Rectangle 12"/>
           <p:cNvSpPr/>
           <p:nvPr/>
         </p:nvSpPr>
         <p:spPr>
           <a:xfrm>
-            <a:off x="8138160" y="3749039"/>
-            <a:ext cx="3749039" cy="2377440"/>
+            <a:off x="457200" y="2606040"/>
+            <a:ext cx="5029200" cy="731520"/>
           </a:xfrm>
           <a:prstGeom prst="rect">
             <a:avLst/>
           </a:prstGeom>
           <a:solidFill>
-            <a:srgbClr val="2A2A14"/>
+            <a:srgbClr val="100D1E"/>
           </a:solidFill>
-          <a:ln w="19050">
-            <a:solidFill>
-              <a:srgbClr val="4A4A20"/>
-            </a:solidFill>
+          <a:ln>
+            <a:noFill/>
           </a:ln>
         </p:spPr>
         <p:style>
@@ -5627,14 +5653,57 @@
       </p:sp>
       <p:sp>
         <p:nvSpPr>
+          <p:cNvPr id="14" name="Rectangle 13"/>
+          <p:cNvSpPr/>
+          <p:nvPr/>
+        </p:nvSpPr>
+        <p:spPr>
+          <a:xfrm>
+            <a:off x="5669280" y="2606040"/>
+            <a:ext cx="6035040" cy="731520"/>
+          </a:xfrm>
+          <a:prstGeom prst="rect">
+            <a:avLst/>
+          </a:prstGeom>
+          <a:solidFill>
+            <a:srgbClr val="03141E"/>
+          </a:solidFill>
+          <a:ln>
+            <a:noFill/>
+          </a:ln>
+        </p:spPr>
+        <p:style>
+          <a:lnRef idx="1">
+            <a:schemeClr val="accent1"/>
+          </a:lnRef>
+          <a:fillRef idx="3">
+            <a:schemeClr val="accent1"/>
+          </a:fillRef>
+          <a:effectRef idx="2">
+            <a:schemeClr val="accent1"/>
+          </a:effectRef>
+          <a:fontRef idx="minor">
+            <a:schemeClr val="lt1"/>
+          </a:fontRef>
+        </p:style>
+        <p:txBody>
+          <a:bodyPr rtlCol="0" anchor="ctr"/>
+          <a:lstStyle/>
+          <a:p>
+            <a:pPr algn="ctr"/>
+          </a:p>
+        </p:txBody>
+      </p:sp>
+      <p:sp>
+        <p:nvSpPr>
           <p:cNvPr id="15" name="TextBox 14"/>
           <p:cNvSpPr txBox="1"/>
           <p:nvPr/>
         </p:nvSpPr>
         <p:spPr>
           <a:xfrm>
-            <a:off x="8275320" y="3840479"/>
-            <a:ext cx="3474719" cy="2194560"/>
+            <a:off x="640080" y="2697480"/>
+            <a:ext cx="4663440" cy="548640"/>
           </a:xfrm>
           <a:prstGeom prst="rect">
             <a:avLst/>
@@ -5649,42 +5718,508 @@
           <a:p>
             <a:pPr algn="l"/>
             <a:r>
-              <a:rPr sz="1400" b="1">
-                <a:solidFill>
-                  <a:srgbClr val="A0D040"/>
-                </a:solidFill>
-              </a:rPr>
-              <a:t>💬  Chat Memory</a:t>
-            </a:r>
-          </a:p>
-          <a:p>
-            <a:pPr algn="l">
-              <a:spcBef>
-                <a:spcPts val="400"/>
-              </a:spcBef>
-            </a:pPr>
-            <a:r>
-              <a:rPr sz="1100">
-                <a:solidFill>
-                  <a:srgbClr val="F0F0E0"/>
-                </a:solidFill>
-              </a:rPr>
-              <a:t>▸ History persisted in Supabase</a:t>
-            </a:r>
-          </a:p>
-          <a:p>
-            <a:pPr algn="l">
-              <a:spcBef>
-                <a:spcPts val="400"/>
-              </a:spcBef>
-            </a:pPr>
-            <a:r>
-              <a:rPr sz="1100">
-                <a:solidFill>
-                  <a:srgbClr val="F0F0E0"/>
-                </a:solidFill>
-              </a:rPr>
-              <a:t>▸ Summarizes long conversations automatically</a:t>
+              <a:rPr sz="1300" b="0" i="0">
+                <a:solidFill>
+                  <a:srgbClr val="FF6666"/>
+                </a:solidFill>
+              </a:rPr>
+              <a:t>✗  No feedback on accuracy</a:t>
+            </a:r>
+          </a:p>
+        </p:txBody>
+      </p:sp>
+      <p:sp>
+        <p:nvSpPr>
+          <p:cNvPr id="16" name="TextBox 15"/>
+          <p:cNvSpPr txBox="1"/>
+          <p:nvPr/>
+        </p:nvSpPr>
+        <p:spPr>
+          <a:xfrm>
+            <a:off x="5852160" y="2697480"/>
+            <a:ext cx="5669280" cy="548640"/>
+          </a:xfrm>
+          <a:prstGeom prst="rect">
+            <a:avLst/>
+          </a:prstGeom>
+          <a:noFill/>
+        </p:spPr>
+        <p:txBody>
+          <a:bodyPr wrap="square">
+            <a:spAutoFit/>
+          </a:bodyPr>
+          <a:lstStyle/>
+          <a:p>
+            <a:pPr algn="l"/>
+            <a:r>
+              <a:rPr sz="1300" b="0" i="0">
+                <a:solidFill>
+                  <a:srgbClr val="66FFAA"/>
+                </a:solidFill>
+              </a:rPr>
+              <a:t>✓  ML model corrects your signs live</a:t>
+            </a:r>
+          </a:p>
+        </p:txBody>
+      </p:sp>
+      <p:sp>
+        <p:nvSpPr>
+          <p:cNvPr id="17" name="Rectangle 16"/>
+          <p:cNvSpPr/>
+          <p:nvPr/>
+        </p:nvSpPr>
+        <p:spPr>
+          <a:xfrm>
+            <a:off x="457200" y="3383280"/>
+            <a:ext cx="5029200" cy="731520"/>
+          </a:xfrm>
+          <a:prstGeom prst="rect">
+            <a:avLst/>
+          </a:prstGeom>
+          <a:solidFill>
+            <a:srgbClr val="151025"/>
+          </a:solidFill>
+          <a:ln>
+            <a:noFill/>
+          </a:ln>
+        </p:spPr>
+        <p:style>
+          <a:lnRef idx="1">
+            <a:schemeClr val="accent1"/>
+          </a:lnRef>
+          <a:fillRef idx="3">
+            <a:schemeClr val="accent1"/>
+          </a:fillRef>
+          <a:effectRef idx="2">
+            <a:schemeClr val="accent1"/>
+          </a:effectRef>
+          <a:fontRef idx="minor">
+            <a:schemeClr val="lt1"/>
+          </a:fontRef>
+        </p:style>
+        <p:txBody>
+          <a:bodyPr rtlCol="0" anchor="ctr"/>
+          <a:lstStyle/>
+          <a:p>
+            <a:pPr algn="ctr"/>
+          </a:p>
+        </p:txBody>
+      </p:sp>
+      <p:sp>
+        <p:nvSpPr>
+          <p:cNvPr id="18" name="Rectangle 17"/>
+          <p:cNvSpPr/>
+          <p:nvPr/>
+        </p:nvSpPr>
+        <p:spPr>
+          <a:xfrm>
+            <a:off x="5669280" y="3383280"/>
+            <a:ext cx="6035040" cy="731520"/>
+          </a:xfrm>
+          <a:prstGeom prst="rect">
+            <a:avLst/>
+          </a:prstGeom>
+          <a:solidFill>
+            <a:srgbClr val="051A25"/>
+          </a:solidFill>
+          <a:ln>
+            <a:noFill/>
+          </a:ln>
+        </p:spPr>
+        <p:style>
+          <a:lnRef idx="1">
+            <a:schemeClr val="accent1"/>
+          </a:lnRef>
+          <a:fillRef idx="3">
+            <a:schemeClr val="accent1"/>
+          </a:fillRef>
+          <a:effectRef idx="2">
+            <a:schemeClr val="accent1"/>
+          </a:effectRef>
+          <a:fontRef idx="minor">
+            <a:schemeClr val="lt1"/>
+          </a:fontRef>
+        </p:style>
+        <p:txBody>
+          <a:bodyPr rtlCol="0" anchor="ctr"/>
+          <a:lstStyle/>
+          <a:p>
+            <a:pPr algn="ctr"/>
+          </a:p>
+        </p:txBody>
+      </p:sp>
+      <p:sp>
+        <p:nvSpPr>
+          <p:cNvPr id="19" name="TextBox 18"/>
+          <p:cNvSpPr txBox="1"/>
+          <p:nvPr/>
+        </p:nvSpPr>
+        <p:spPr>
+          <a:xfrm>
+            <a:off x="640080" y="3474720"/>
+            <a:ext cx="4663440" cy="548640"/>
+          </a:xfrm>
+          <a:prstGeom prst="rect">
+            <a:avLst/>
+          </a:prstGeom>
+          <a:noFill/>
+        </p:spPr>
+        <p:txBody>
+          <a:bodyPr wrap="square">
+            <a:spAutoFit/>
+          </a:bodyPr>
+          <a:lstStyle/>
+          <a:p>
+            <a:pPr algn="l"/>
+            <a:r>
+              <a:rPr sz="1300" b="0" i="0">
+                <a:solidFill>
+                  <a:srgbClr val="FF6666"/>
+                </a:solidFill>
+              </a:rPr>
+              <a:t>✗  Passive watching</a:t>
+            </a:r>
+          </a:p>
+        </p:txBody>
+      </p:sp>
+      <p:sp>
+        <p:nvSpPr>
+          <p:cNvPr id="20" name="TextBox 19"/>
+          <p:cNvSpPr txBox="1"/>
+          <p:nvPr/>
+        </p:nvSpPr>
+        <p:spPr>
+          <a:xfrm>
+            <a:off x="5852160" y="3474720"/>
+            <a:ext cx="5669280" cy="548640"/>
+          </a:xfrm>
+          <a:prstGeom prst="rect">
+            <a:avLst/>
+          </a:prstGeom>
+          <a:noFill/>
+        </p:spPr>
+        <p:txBody>
+          <a:bodyPr wrap="square">
+            <a:spAutoFit/>
+          </a:bodyPr>
+          <a:lstStyle/>
+          <a:p>
+            <a:pPr algn="l"/>
+            <a:r>
+              <a:rPr sz="1300" b="0" i="0">
+                <a:solidFill>
+                  <a:srgbClr val="66FFAA"/>
+                </a:solidFill>
+              </a:rPr>
+              <a:t>✓  Active gamified challenges</a:t>
+            </a:r>
+          </a:p>
+        </p:txBody>
+      </p:sp>
+      <p:sp>
+        <p:nvSpPr>
+          <p:cNvPr id="21" name="Rectangle 20"/>
+          <p:cNvSpPr/>
+          <p:nvPr/>
+        </p:nvSpPr>
+        <p:spPr>
+          <a:xfrm>
+            <a:off x="457200" y="4160520"/>
+            <a:ext cx="5029200" cy="731520"/>
+          </a:xfrm>
+          <a:prstGeom prst="rect">
+            <a:avLst/>
+          </a:prstGeom>
+          <a:solidFill>
+            <a:srgbClr val="100D1E"/>
+          </a:solidFill>
+          <a:ln>
+            <a:noFill/>
+          </a:ln>
+        </p:spPr>
+        <p:style>
+          <a:lnRef idx="1">
+            <a:schemeClr val="accent1"/>
+          </a:lnRef>
+          <a:fillRef idx="3">
+            <a:schemeClr val="accent1"/>
+          </a:fillRef>
+          <a:effectRef idx="2">
+            <a:schemeClr val="accent1"/>
+          </a:effectRef>
+          <a:fontRef idx="minor">
+            <a:schemeClr val="lt1"/>
+          </a:fontRef>
+        </p:style>
+        <p:txBody>
+          <a:bodyPr rtlCol="0" anchor="ctr"/>
+          <a:lstStyle/>
+          <a:p>
+            <a:pPr algn="ctr"/>
+          </a:p>
+        </p:txBody>
+      </p:sp>
+      <p:sp>
+        <p:nvSpPr>
+          <p:cNvPr id="22" name="Rectangle 21"/>
+          <p:cNvSpPr/>
+          <p:nvPr/>
+        </p:nvSpPr>
+        <p:spPr>
+          <a:xfrm>
+            <a:off x="5669280" y="4160520"/>
+            <a:ext cx="6035040" cy="731520"/>
+          </a:xfrm>
+          <a:prstGeom prst="rect">
+            <a:avLst/>
+          </a:prstGeom>
+          <a:solidFill>
+            <a:srgbClr val="03141E"/>
+          </a:solidFill>
+          <a:ln>
+            <a:noFill/>
+          </a:ln>
+        </p:spPr>
+        <p:style>
+          <a:lnRef idx="1">
+            <a:schemeClr val="accent1"/>
+          </a:lnRef>
+          <a:fillRef idx="3">
+            <a:schemeClr val="accent1"/>
+          </a:fillRef>
+          <a:effectRef idx="2">
+            <a:schemeClr val="accent1"/>
+          </a:effectRef>
+          <a:fontRef idx="minor">
+            <a:schemeClr val="lt1"/>
+          </a:fontRef>
+        </p:style>
+        <p:txBody>
+          <a:bodyPr rtlCol="0" anchor="ctr"/>
+          <a:lstStyle/>
+          <a:p>
+            <a:pPr algn="ctr"/>
+          </a:p>
+        </p:txBody>
+      </p:sp>
+      <p:sp>
+        <p:nvSpPr>
+          <p:cNvPr id="23" name="TextBox 22"/>
+          <p:cNvSpPr txBox="1"/>
+          <p:nvPr/>
+        </p:nvSpPr>
+        <p:spPr>
+          <a:xfrm>
+            <a:off x="640080" y="4251959"/>
+            <a:ext cx="4663440" cy="548640"/>
+          </a:xfrm>
+          <a:prstGeom prst="rect">
+            <a:avLst/>
+          </a:prstGeom>
+          <a:noFill/>
+        </p:spPr>
+        <p:txBody>
+          <a:bodyPr wrap="square">
+            <a:spAutoFit/>
+          </a:bodyPr>
+          <a:lstStyle/>
+          <a:p>
+            <a:pPr algn="l"/>
+            <a:r>
+              <a:rPr sz="1300" b="0" i="0">
+                <a:solidFill>
+                  <a:srgbClr val="FF6666"/>
+                </a:solidFill>
+              </a:rPr>
+              <a:t>✗  No personalization</a:t>
+            </a:r>
+          </a:p>
+        </p:txBody>
+      </p:sp>
+      <p:sp>
+        <p:nvSpPr>
+          <p:cNvPr id="24" name="TextBox 23"/>
+          <p:cNvSpPr txBox="1"/>
+          <p:nvPr/>
+        </p:nvSpPr>
+        <p:spPr>
+          <a:xfrm>
+            <a:off x="5852160" y="4251959"/>
+            <a:ext cx="5669280" cy="548640"/>
+          </a:xfrm>
+          <a:prstGeom prst="rect">
+            <a:avLst/>
+          </a:prstGeom>
+          <a:noFill/>
+        </p:spPr>
+        <p:txBody>
+          <a:bodyPr wrap="square">
+            <a:spAutoFit/>
+          </a:bodyPr>
+          <a:lstStyle/>
+          <a:p>
+            <a:pPr algn="l"/>
+            <a:r>
+              <a:rPr sz="1300" b="0" i="0">
+                <a:solidFill>
+                  <a:srgbClr val="66FFAA"/>
+                </a:solidFill>
+              </a:rPr>
+              <a:t>✓  AI tutor + spaced repetition</a:t>
+            </a:r>
+          </a:p>
+        </p:txBody>
+      </p:sp>
+      <p:sp>
+        <p:nvSpPr>
+          <p:cNvPr id="25" name="Rectangle 24"/>
+          <p:cNvSpPr/>
+          <p:nvPr/>
+        </p:nvSpPr>
+        <p:spPr>
+          <a:xfrm>
+            <a:off x="457200" y="4937760"/>
+            <a:ext cx="5029200" cy="731520"/>
+          </a:xfrm>
+          <a:prstGeom prst="rect">
+            <a:avLst/>
+          </a:prstGeom>
+          <a:solidFill>
+            <a:srgbClr val="151025"/>
+          </a:solidFill>
+          <a:ln>
+            <a:noFill/>
+          </a:ln>
+        </p:spPr>
+        <p:style>
+          <a:lnRef idx="1">
+            <a:schemeClr val="accent1"/>
+          </a:lnRef>
+          <a:fillRef idx="3">
+            <a:schemeClr val="accent1"/>
+          </a:fillRef>
+          <a:effectRef idx="2">
+            <a:schemeClr val="accent1"/>
+          </a:effectRef>
+          <a:fontRef idx="minor">
+            <a:schemeClr val="lt1"/>
+          </a:fontRef>
+        </p:style>
+        <p:txBody>
+          <a:bodyPr rtlCol="0" anchor="ctr"/>
+          <a:lstStyle/>
+          <a:p>
+            <a:pPr algn="ctr"/>
+          </a:p>
+        </p:txBody>
+      </p:sp>
+      <p:sp>
+        <p:nvSpPr>
+          <p:cNvPr id="26" name="Rectangle 25"/>
+          <p:cNvSpPr/>
+          <p:nvPr/>
+        </p:nvSpPr>
+        <p:spPr>
+          <a:xfrm>
+            <a:off x="5669280" y="4937760"/>
+            <a:ext cx="6035040" cy="731520"/>
+          </a:xfrm>
+          <a:prstGeom prst="rect">
+            <a:avLst/>
+          </a:prstGeom>
+          <a:solidFill>
+            <a:srgbClr val="051A25"/>
+          </a:solidFill>
+          <a:ln>
+            <a:noFill/>
+          </a:ln>
+        </p:spPr>
+        <p:style>
+          <a:lnRef idx="1">
+            <a:schemeClr val="accent1"/>
+          </a:lnRef>
+          <a:fillRef idx="3">
+            <a:schemeClr val="accent1"/>
+          </a:fillRef>
+          <a:effectRef idx="2">
+            <a:schemeClr val="accent1"/>
+          </a:effectRef>
+          <a:fontRef idx="minor">
+            <a:schemeClr val="lt1"/>
+          </a:fontRef>
+        </p:style>
+        <p:txBody>
+          <a:bodyPr rtlCol="0" anchor="ctr"/>
+          <a:lstStyle/>
+          <a:p>
+            <a:pPr algn="ctr"/>
+          </a:p>
+        </p:txBody>
+      </p:sp>
+      <p:sp>
+        <p:nvSpPr>
+          <p:cNvPr id="27" name="TextBox 26"/>
+          <p:cNvSpPr txBox="1"/>
+          <p:nvPr/>
+        </p:nvSpPr>
+        <p:spPr>
+          <a:xfrm>
+            <a:off x="640080" y="5029200"/>
+            <a:ext cx="4663440" cy="548640"/>
+          </a:xfrm>
+          <a:prstGeom prst="rect">
+            <a:avLst/>
+          </a:prstGeom>
+          <a:noFill/>
+        </p:spPr>
+        <p:txBody>
+          <a:bodyPr wrap="square">
+            <a:spAutoFit/>
+          </a:bodyPr>
+          <a:lstStyle/>
+          <a:p>
+            <a:pPr algn="l"/>
+            <a:r>
+              <a:rPr sz="1300" b="0" i="0">
+                <a:solidFill>
+                  <a:srgbClr val="FF6666"/>
+                </a:solidFill>
+              </a:rPr>
+              <a:t>✗  Not built for children</a:t>
+            </a:r>
+          </a:p>
+        </p:txBody>
+      </p:sp>
+      <p:sp>
+        <p:nvSpPr>
+          <p:cNvPr id="28" name="TextBox 27"/>
+          <p:cNvSpPr txBox="1"/>
+          <p:nvPr/>
+        </p:nvSpPr>
+        <p:spPr>
+          <a:xfrm>
+            <a:off x="5852160" y="5029200"/>
+            <a:ext cx="5669280" cy="548640"/>
+          </a:xfrm>
+          <a:prstGeom prst="rect">
+            <a:avLst/>
+          </a:prstGeom>
+          <a:noFill/>
+        </p:spPr>
+        <p:txBody>
+          <a:bodyPr wrap="square">
+            <a:spAutoFit/>
+          </a:bodyPr>
+          <a:lstStyle/>
+          <a:p>
+            <a:pPr algn="l"/>
+            <a:r>
+              <a:rPr sz="1300" b="0" i="0">
+                <a:solidFill>
+                  <a:srgbClr val="66FFAA"/>
+                </a:solidFill>
+              </a:rPr>
+              <a:t>✓  Designed for early childhood learning</a:t>
             </a:r>
           </a:p>
         </p:txBody>
@@ -5703,7 +6238,7 @@
     <p:bg>
       <p:bgPr>
         <a:solidFill>
-          <a:srgbClr val="1A1A08"/>
+          <a:srgbClr val="0D1B2A"/>
         </a:solidFill>
         <a:effectLst/>
       </p:bgPr>
@@ -5724,18 +6259,16 @@
         <p:spPr>
           <a:xfrm>
             <a:off x="0" y="0"/>
-            <a:ext cx="12188952" cy="1005840"/>
+            <a:ext cx="12188952" cy="73152"/>
           </a:xfrm>
           <a:prstGeom prst="rect">
             <a:avLst/>
           </a:prstGeom>
           <a:solidFill>
-            <a:srgbClr val="2A2A14"/>
+            <a:srgbClr val="00FFAA"/>
           </a:solidFill>
-          <a:ln w="25400">
-            <a:solidFill>
-              <a:srgbClr val="A0D040"/>
-            </a:solidFill>
+          <a:ln>
+            <a:noFill/>
           </a:ln>
         </p:spPr>
         <p:style>
@@ -5768,28 +6301,28 @@
         </p:nvSpPr>
         <p:spPr>
           <a:xfrm>
-            <a:off x="365760" y="182880"/>
-            <a:ext cx="11457432" cy="731520"/>
-          </a:xfrm>
-          <a:prstGeom prst="rect">
-            <a:avLst/>
-          </a:prstGeom>
-          <a:noFill/>
-        </p:spPr>
-        <p:txBody>
-          <a:bodyPr wrap="square">
-            <a:spAutoFit/>
-          </a:bodyPr>
-          <a:lstStyle/>
-          <a:p>
-            <a:pPr algn="ctr"/>
-            <a:r>
-              <a:rPr sz="2800" b="1">
-                <a:solidFill>
-                  <a:srgbClr val="A0D040"/>
-                </a:solidFill>
-              </a:rPr>
-              <a:t>Tech Stack</a:t>
+            <a:off x="457200" y="182880"/>
+            <a:ext cx="10972800" cy="822960"/>
+          </a:xfrm>
+          <a:prstGeom prst="rect">
+            <a:avLst/>
+          </a:prstGeom>
+          <a:noFill/>
+        </p:spPr>
+        <p:txBody>
+          <a:bodyPr wrap="square">
+            <a:spAutoFit/>
+          </a:bodyPr>
+          <a:lstStyle/>
+          <a:p>
+            <a:pPr algn="l"/>
+            <a:r>
+              <a:rPr sz="3600" b="1" i="0">
+                <a:solidFill>
+                  <a:srgbClr val="00FFAA"/>
+                </a:solidFill>
+              </a:rPr>
+              <a:t>⚙️  How It Works</a:t>
             </a:r>
           </a:p>
         </p:txBody>
@@ -5802,19 +6335,17 @@
         </p:nvSpPr>
         <p:spPr>
           <a:xfrm>
-            <a:off x="274320" y="1188720"/>
-            <a:ext cx="3749039" cy="5303520"/>
+            <a:off x="457200" y="1005840"/>
+            <a:ext cx="11247120" cy="45720"/>
           </a:xfrm>
           <a:prstGeom prst="rect">
             <a:avLst/>
           </a:prstGeom>
           <a:solidFill>
-            <a:srgbClr val="2A2A14"/>
+            <a:srgbClr val="00FFAA"/>
           </a:solidFill>
-          <a:ln w="19050">
-            <a:solidFill>
-              <a:srgbClr val="4A4A20"/>
-            </a:solidFill>
+          <a:ln>
+            <a:noFill/>
           </a:ln>
         </p:spPr>
         <p:style>
@@ -5841,134 +6372,23 @@
       </p:sp>
       <p:sp>
         <p:nvSpPr>
-          <p:cNvPr id="5" name="TextBox 4"/>
-          <p:cNvSpPr txBox="1"/>
-          <p:nvPr/>
-        </p:nvSpPr>
-        <p:spPr>
-          <a:xfrm>
-            <a:off x="411480" y="1280160"/>
-            <a:ext cx="3474719" cy="5120640"/>
-          </a:xfrm>
-          <a:prstGeom prst="rect">
-            <a:avLst/>
-          </a:prstGeom>
-          <a:noFill/>
-        </p:spPr>
-        <p:txBody>
-          <a:bodyPr wrap="square">
-            <a:spAutoFit/>
-          </a:bodyPr>
-          <a:lstStyle/>
-          <a:p>
-            <a:pPr algn="l"/>
-            <a:r>
-              <a:rPr sz="1400" b="1">
-                <a:solidFill>
-                  <a:srgbClr val="A0D040"/>
-                </a:solidFill>
-              </a:rPr>
-              <a:t>Frontend</a:t>
-            </a:r>
-          </a:p>
-          <a:p>
-            <a:pPr algn="l">
-              <a:spcBef>
-                <a:spcPts val="400"/>
-              </a:spcBef>
-            </a:pPr>
-            <a:r>
-              <a:rPr sz="1100">
-                <a:solidFill>
-                  <a:srgbClr val="F0F0E0"/>
-                </a:solidFill>
-              </a:rPr>
-              <a:t>▸ React 18 + TypeScript</a:t>
-            </a:r>
-          </a:p>
-          <a:p>
-            <a:pPr algn="l">
-              <a:spcBef>
-                <a:spcPts val="400"/>
-              </a:spcBef>
-            </a:pPr>
-            <a:r>
-              <a:rPr sz="1100">
-                <a:solidFill>
-                  <a:srgbClr val="F0F0E0"/>
-                </a:solidFill>
-              </a:rPr>
-              <a:t>▸ Vite</a:t>
-            </a:r>
-          </a:p>
-          <a:p>
-            <a:pPr algn="l">
-              <a:spcBef>
-                <a:spcPts val="400"/>
-              </a:spcBef>
-            </a:pPr>
-            <a:r>
-              <a:rPr sz="1100">
-                <a:solidFill>
-                  <a:srgbClr val="F0F0E0"/>
-                </a:solidFill>
-              </a:rPr>
-              <a:t>▸ SVG Animations</a:t>
-            </a:r>
-          </a:p>
-          <a:p>
-            <a:pPr algn="l">
-              <a:spcBef>
-                <a:spcPts val="400"/>
-              </a:spcBef>
-            </a:pPr>
-            <a:r>
-              <a:rPr sz="1100">
-                <a:solidFill>
-                  <a:srgbClr val="F0F0E0"/>
-                </a:solidFill>
-              </a:rPr>
-              <a:t>▸ Web Speech API</a:t>
-            </a:r>
-          </a:p>
-          <a:p>
-            <a:pPr algn="l">
-              <a:spcBef>
-                <a:spcPts val="400"/>
-              </a:spcBef>
-            </a:pPr>
-            <a:r>
-              <a:rPr sz="1100">
-                <a:solidFill>
-                  <a:srgbClr val="F0F0E0"/>
-                </a:solidFill>
-              </a:rPr>
-              <a:t>▸ WebSocket client</a:t>
-            </a:r>
-          </a:p>
-        </p:txBody>
-      </p:sp>
-      <p:sp>
-        <p:nvSpPr>
-          <p:cNvPr id="6" name="Rectangle 5"/>
+          <p:cNvPr id="5" name="Rectangle 4"/>
           <p:cNvSpPr/>
           <p:nvPr/>
         </p:nvSpPr>
         <p:spPr>
           <a:xfrm>
-            <a:off x="4251959" y="1188720"/>
-            <a:ext cx="3749039" cy="5303520"/>
+            <a:off x="457200" y="1371600"/>
+            <a:ext cx="2651760" cy="2926080"/>
           </a:xfrm>
           <a:prstGeom prst="rect">
             <a:avLst/>
           </a:prstGeom>
           <a:solidFill>
-            <a:srgbClr val="2A2A14"/>
+            <a:srgbClr val="05251A"/>
           </a:solidFill>
-          <a:ln w="19050">
-            <a:solidFill>
-              <a:srgbClr val="4A4A20"/>
-            </a:solidFill>
+          <a:ln>
+            <a:noFill/>
           </a:ln>
         </p:spPr>
         <p:style>
@@ -5995,134 +6415,161 @@
       </p:sp>
       <p:sp>
         <p:nvSpPr>
+          <p:cNvPr id="6" name="TextBox 5"/>
+          <p:cNvSpPr txBox="1"/>
+          <p:nvPr/>
+        </p:nvSpPr>
+        <p:spPr>
+          <a:xfrm>
+            <a:off x="1188720" y="1508760"/>
+            <a:ext cx="1188720" cy="914400"/>
+          </a:xfrm>
+          <a:prstGeom prst="rect">
+            <a:avLst/>
+          </a:prstGeom>
+          <a:noFill/>
+        </p:spPr>
+        <p:txBody>
+          <a:bodyPr wrap="square">
+            <a:spAutoFit/>
+          </a:bodyPr>
+          <a:lstStyle/>
+          <a:p>
+            <a:pPr algn="ctr"/>
+            <a:r>
+              <a:rPr sz="3400" b="0" i="0">
+                <a:solidFill>
+                  <a:srgbClr val="FFFFFF"/>
+                </a:solidFill>
+              </a:rPr>
+              <a:t>📷</a:t>
+            </a:r>
+          </a:p>
+        </p:txBody>
+      </p:sp>
+      <p:sp>
+        <p:nvSpPr>
           <p:cNvPr id="7" name="TextBox 6"/>
           <p:cNvSpPr txBox="1"/>
           <p:nvPr/>
         </p:nvSpPr>
         <p:spPr>
           <a:xfrm>
-            <a:off x="4389119" y="1280160"/>
-            <a:ext cx="3474719" cy="5120640"/>
-          </a:xfrm>
-          <a:prstGeom prst="rect">
-            <a:avLst/>
-          </a:prstGeom>
-          <a:noFill/>
-        </p:spPr>
-        <p:txBody>
-          <a:bodyPr wrap="square">
-            <a:spAutoFit/>
-          </a:bodyPr>
-          <a:lstStyle/>
-          <a:p>
-            <a:pPr algn="l"/>
-            <a:r>
-              <a:rPr sz="1400" b="1">
-                <a:solidFill>
-                  <a:srgbClr val="A0D040"/>
-                </a:solidFill>
-              </a:rPr>
-              <a:t>Backend</a:t>
-            </a:r>
-          </a:p>
-          <a:p>
-            <a:pPr algn="l">
-              <a:spcBef>
-                <a:spcPts val="400"/>
-              </a:spcBef>
-            </a:pPr>
-            <a:r>
-              <a:rPr sz="1100">
-                <a:solidFill>
-                  <a:srgbClr val="F0F0E0"/>
-                </a:solidFill>
-              </a:rPr>
-              <a:t>▸ FastAPI (Python 3.11)</a:t>
-            </a:r>
-          </a:p>
-          <a:p>
-            <a:pPr algn="l">
-              <a:spcBef>
-                <a:spcPts val="400"/>
-              </a:spcBef>
-            </a:pPr>
-            <a:r>
-              <a:rPr sz="1100">
-                <a:solidFill>
-                  <a:srgbClr val="F0F0E0"/>
-                </a:solidFill>
-              </a:rPr>
-              <a:t>▸ WebSocket server</a:t>
-            </a:r>
-          </a:p>
-          <a:p>
-            <a:pPr algn="l">
-              <a:spcBef>
-                <a:spcPts val="400"/>
-              </a:spcBef>
-            </a:pPr>
-            <a:r>
-              <a:rPr sz="1100">
-                <a:solidFill>
-                  <a:srgbClr val="F0F0E0"/>
-                </a:solidFill>
-              </a:rPr>
-              <a:t>▸ MediaPipe Hands</a:t>
-            </a:r>
-          </a:p>
-          <a:p>
-            <a:pPr algn="l">
-              <a:spcBef>
-                <a:spcPts val="400"/>
-              </a:spcBef>
-            </a:pPr>
-            <a:r>
-              <a:rPr sz="1100">
-                <a:solidFill>
-                  <a:srgbClr val="F0F0E0"/>
-                </a:solidFill>
-              </a:rPr>
-              <a:t>▸ scikit-learn ML</a:t>
-            </a:r>
-          </a:p>
-          <a:p>
-            <a:pPr algn="l">
-              <a:spcBef>
-                <a:spcPts val="400"/>
-              </a:spcBef>
-            </a:pPr>
-            <a:r>
-              <a:rPr sz="1100">
-                <a:solidFill>
-                  <a:srgbClr val="F0F0E0"/>
-                </a:solidFill>
-              </a:rPr>
-              <a:t>▸ httpx</a:t>
-            </a:r>
-          </a:p>
-        </p:txBody>
-      </p:sp>
-      <p:sp>
-        <p:nvSpPr>
-          <p:cNvPr id="8" name="Rectangle 7"/>
+            <a:off x="548640" y="2423160"/>
+            <a:ext cx="2468880" cy="640080"/>
+          </a:xfrm>
+          <a:prstGeom prst="rect">
+            <a:avLst/>
+          </a:prstGeom>
+          <a:noFill/>
+        </p:spPr>
+        <p:txBody>
+          <a:bodyPr wrap="square">
+            <a:spAutoFit/>
+          </a:bodyPr>
+          <a:lstStyle/>
+          <a:p>
+            <a:pPr algn="ctr"/>
+            <a:r>
+              <a:rPr sz="1500" b="1" i="0">
+                <a:solidFill>
+                  <a:srgbClr val="00FFAA"/>
+                </a:solidFill>
+              </a:rPr>
+              <a:t>Webcam
+Capture</a:t>
+            </a:r>
+          </a:p>
+        </p:txBody>
+      </p:sp>
+      <p:sp>
+        <p:nvSpPr>
+          <p:cNvPr id="8" name="TextBox 7"/>
+          <p:cNvSpPr txBox="1"/>
+          <p:nvPr/>
+        </p:nvSpPr>
+        <p:spPr>
+          <a:xfrm>
+            <a:off x="548640" y="3063240"/>
+            <a:ext cx="2468880" cy="1097280"/>
+          </a:xfrm>
+          <a:prstGeom prst="rect">
+            <a:avLst/>
+          </a:prstGeom>
+          <a:noFill/>
+        </p:spPr>
+        <p:txBody>
+          <a:bodyPr wrap="square">
+            <a:spAutoFit/>
+          </a:bodyPr>
+          <a:lstStyle/>
+          <a:p>
+            <a:pPr algn="ctr"/>
+            <a:r>
+              <a:rPr sz="1200" b="0" i="0">
+                <a:solidFill>
+                  <a:srgbClr val="CCCCCC"/>
+                </a:solidFill>
+              </a:rPr>
+              <a:t>MediaPipe
+hand landmarks</a:t>
+            </a:r>
+          </a:p>
+        </p:txBody>
+      </p:sp>
+      <p:sp>
+        <p:nvSpPr>
+          <p:cNvPr id="9" name="TextBox 8"/>
+          <p:cNvSpPr txBox="1"/>
+          <p:nvPr/>
+        </p:nvSpPr>
+        <p:spPr>
+          <a:xfrm>
+            <a:off x="3200400" y="2377440"/>
+            <a:ext cx="365760" cy="548640"/>
+          </a:xfrm>
+          <a:prstGeom prst="rect">
+            <a:avLst/>
+          </a:prstGeom>
+          <a:noFill/>
+        </p:spPr>
+        <p:txBody>
+          <a:bodyPr wrap="square">
+            <a:spAutoFit/>
+          </a:bodyPr>
+          <a:lstStyle/>
+          <a:p>
+            <a:pPr algn="ctr"/>
+            <a:r>
+              <a:rPr sz="2400" b="1" i="0">
+                <a:solidFill>
+                  <a:srgbClr val="00D4FF"/>
+                </a:solidFill>
+              </a:rPr>
+              <a:t>→</a:t>
+            </a:r>
+          </a:p>
+        </p:txBody>
+      </p:sp>
+      <p:sp>
+        <p:nvSpPr>
+          <p:cNvPr id="10" name="Rectangle 9"/>
           <p:cNvSpPr/>
           <p:nvPr/>
         </p:nvSpPr>
         <p:spPr>
           <a:xfrm>
-            <a:off x="8229600" y="1188720"/>
-            <a:ext cx="3749039" cy="5303520"/>
+            <a:off x="3383280" y="1371600"/>
+            <a:ext cx="2651760" cy="2926080"/>
           </a:xfrm>
           <a:prstGeom prst="rect">
             <a:avLst/>
           </a:prstGeom>
           <a:solidFill>
-            <a:srgbClr val="2A2A14"/>
+            <a:srgbClr val="05251A"/>
           </a:solidFill>
-          <a:ln w="19050">
-            <a:solidFill>
-              <a:srgbClr val="4A4A20"/>
-            </a:solidFill>
+          <a:ln>
+            <a:noFill/>
           </a:ln>
         </p:spPr>
         <p:style>
@@ -6149,109 +6596,500 @@
       </p:sp>
       <p:sp>
         <p:nvSpPr>
-          <p:cNvPr id="9" name="TextBox 8"/>
-          <p:cNvSpPr txBox="1"/>
-          <p:nvPr/>
-        </p:nvSpPr>
-        <p:spPr>
-          <a:xfrm>
-            <a:off x="8366760" y="1280160"/>
-            <a:ext cx="3474719" cy="5120640"/>
-          </a:xfrm>
-          <a:prstGeom prst="rect">
-            <a:avLst/>
-          </a:prstGeom>
-          <a:noFill/>
-        </p:spPr>
-        <p:txBody>
-          <a:bodyPr wrap="square">
-            <a:spAutoFit/>
-          </a:bodyPr>
-          <a:lstStyle/>
-          <a:p>
-            <a:pPr algn="l"/>
-            <a:r>
-              <a:rPr sz="1400" b="1">
-                <a:solidFill>
-                  <a:srgbClr val="A0D040"/>
-                </a:solidFill>
-              </a:rPr>
-              <a:t>AI / Data</a:t>
-            </a:r>
-          </a:p>
-          <a:p>
-            <a:pPr algn="l">
-              <a:spcBef>
-                <a:spcPts val="400"/>
-              </a:spcBef>
-            </a:pPr>
-            <a:r>
-              <a:rPr sz="1100">
-                <a:solidFill>
-                  <a:srgbClr val="F0F0E0"/>
-                </a:solidFill>
-              </a:rPr>
-              <a:t>▸ Groq API (llama-3.3-70b)</a:t>
-            </a:r>
-          </a:p>
-          <a:p>
-            <a:pPr algn="l">
-              <a:spcBef>
-                <a:spcPts val="400"/>
-              </a:spcBef>
-            </a:pPr>
-            <a:r>
-              <a:rPr sz="1100">
-                <a:solidFill>
-                  <a:srgbClr val="F0F0E0"/>
-                </a:solidFill>
-              </a:rPr>
-              <a:t>▸ Tavily web search</a:t>
-            </a:r>
-          </a:p>
-          <a:p>
-            <a:pPr algn="l">
-              <a:spcBef>
-                <a:spcPts val="400"/>
-              </a:spcBef>
-            </a:pPr>
-            <a:r>
-              <a:rPr sz="1100">
-                <a:solidFill>
-                  <a:srgbClr val="F0F0E0"/>
-                </a:solidFill>
-              </a:rPr>
-              <a:t>▸ Supabase (Postgres)</a:t>
-            </a:r>
-          </a:p>
-          <a:p>
-            <a:pPr algn="l">
-              <a:spcBef>
-                <a:spcPts val="400"/>
-              </a:spcBef>
-            </a:pPr>
-            <a:r>
-              <a:rPr sz="1100">
-                <a:solidFill>
-                  <a:srgbClr val="F0F0E0"/>
-                </a:solidFill>
-              </a:rPr>
-              <a:t>▸ Row-level security</a:t>
-            </a:r>
-          </a:p>
-          <a:p>
-            <a:pPr algn="l">
-              <a:spcBef>
-                <a:spcPts val="400"/>
-              </a:spcBef>
-            </a:pPr>
-            <a:r>
-              <a:rPr sz="1100">
-                <a:solidFill>
-                  <a:srgbClr val="F0F0E0"/>
-                </a:solidFill>
-              </a:rPr>
-              <a:t>▸ Chat history</a:t>
+          <p:cNvPr id="11" name="TextBox 10"/>
+          <p:cNvSpPr txBox="1"/>
+          <p:nvPr/>
+        </p:nvSpPr>
+        <p:spPr>
+          <a:xfrm>
+            <a:off x="4114800" y="1508760"/>
+            <a:ext cx="1188720" cy="914400"/>
+          </a:xfrm>
+          <a:prstGeom prst="rect">
+            <a:avLst/>
+          </a:prstGeom>
+          <a:noFill/>
+        </p:spPr>
+        <p:txBody>
+          <a:bodyPr wrap="square">
+            <a:spAutoFit/>
+          </a:bodyPr>
+          <a:lstStyle/>
+          <a:p>
+            <a:pPr algn="ctr"/>
+            <a:r>
+              <a:rPr sz="3400" b="0" i="0">
+                <a:solidFill>
+                  <a:srgbClr val="FFFFFF"/>
+                </a:solidFill>
+              </a:rPr>
+              <a:t>🧠</a:t>
+            </a:r>
+          </a:p>
+        </p:txBody>
+      </p:sp>
+      <p:sp>
+        <p:nvSpPr>
+          <p:cNvPr id="12" name="TextBox 11"/>
+          <p:cNvSpPr txBox="1"/>
+          <p:nvPr/>
+        </p:nvSpPr>
+        <p:spPr>
+          <a:xfrm>
+            <a:off x="3474720" y="2423160"/>
+            <a:ext cx="2468880" cy="640080"/>
+          </a:xfrm>
+          <a:prstGeom prst="rect">
+            <a:avLst/>
+          </a:prstGeom>
+          <a:noFill/>
+        </p:spPr>
+        <p:txBody>
+          <a:bodyPr wrap="square">
+            <a:spAutoFit/>
+          </a:bodyPr>
+          <a:lstStyle/>
+          <a:p>
+            <a:pPr algn="ctr"/>
+            <a:r>
+              <a:rPr sz="1500" b="1" i="0">
+                <a:solidFill>
+                  <a:srgbClr val="00FFAA"/>
+                </a:solidFill>
+              </a:rPr>
+              <a:t>ML Model
+Classifier</a:t>
+            </a:r>
+          </a:p>
+        </p:txBody>
+      </p:sp>
+      <p:sp>
+        <p:nvSpPr>
+          <p:cNvPr id="13" name="TextBox 12"/>
+          <p:cNvSpPr txBox="1"/>
+          <p:nvPr/>
+        </p:nvSpPr>
+        <p:spPr>
+          <a:xfrm>
+            <a:off x="3474720" y="3063240"/>
+            <a:ext cx="2468880" cy="1097280"/>
+          </a:xfrm>
+          <a:prstGeom prst="rect">
+            <a:avLst/>
+          </a:prstGeom>
+          <a:noFill/>
+        </p:spPr>
+        <p:txBody>
+          <a:bodyPr wrap="square">
+            <a:spAutoFit/>
+          </a:bodyPr>
+          <a:lstStyle/>
+          <a:p>
+            <a:pPr algn="ctr"/>
+            <a:r>
+              <a:rPr sz="1200" b="0" i="0">
+                <a:solidFill>
+                  <a:srgbClr val="CCCCCC"/>
+                </a:solidFill>
+              </a:rPr>
+              <a:t>Sklearn classifier
+(letters &amp; numbers)</a:t>
+            </a:r>
+          </a:p>
+        </p:txBody>
+      </p:sp>
+      <p:sp>
+        <p:nvSpPr>
+          <p:cNvPr id="14" name="TextBox 13"/>
+          <p:cNvSpPr txBox="1"/>
+          <p:nvPr/>
+        </p:nvSpPr>
+        <p:spPr>
+          <a:xfrm>
+            <a:off x="6126480" y="2377440"/>
+            <a:ext cx="365760" cy="548640"/>
+          </a:xfrm>
+          <a:prstGeom prst="rect">
+            <a:avLst/>
+          </a:prstGeom>
+          <a:noFill/>
+        </p:spPr>
+        <p:txBody>
+          <a:bodyPr wrap="square">
+            <a:spAutoFit/>
+          </a:bodyPr>
+          <a:lstStyle/>
+          <a:p>
+            <a:pPr algn="ctr"/>
+            <a:r>
+              <a:rPr sz="2400" b="1" i="0">
+                <a:solidFill>
+                  <a:srgbClr val="00D4FF"/>
+                </a:solidFill>
+              </a:rPr>
+              <a:t>→</a:t>
+            </a:r>
+          </a:p>
+        </p:txBody>
+      </p:sp>
+      <p:sp>
+        <p:nvSpPr>
+          <p:cNvPr id="15" name="Rectangle 14"/>
+          <p:cNvSpPr/>
+          <p:nvPr/>
+        </p:nvSpPr>
+        <p:spPr>
+          <a:xfrm>
+            <a:off x="6309360" y="1371600"/>
+            <a:ext cx="2651760" cy="2926080"/>
+          </a:xfrm>
+          <a:prstGeom prst="rect">
+            <a:avLst/>
+          </a:prstGeom>
+          <a:solidFill>
+            <a:srgbClr val="05251A"/>
+          </a:solidFill>
+          <a:ln>
+            <a:noFill/>
+          </a:ln>
+        </p:spPr>
+        <p:style>
+          <a:lnRef idx="1">
+            <a:schemeClr val="accent1"/>
+          </a:lnRef>
+          <a:fillRef idx="3">
+            <a:schemeClr val="accent1"/>
+          </a:fillRef>
+          <a:effectRef idx="2">
+            <a:schemeClr val="accent1"/>
+          </a:effectRef>
+          <a:fontRef idx="minor">
+            <a:schemeClr val="lt1"/>
+          </a:fontRef>
+        </p:style>
+        <p:txBody>
+          <a:bodyPr rtlCol="0" anchor="ctr"/>
+          <a:lstStyle/>
+          <a:p>
+            <a:pPr algn="ctr"/>
+          </a:p>
+        </p:txBody>
+      </p:sp>
+      <p:sp>
+        <p:nvSpPr>
+          <p:cNvPr id="16" name="TextBox 15"/>
+          <p:cNvSpPr txBox="1"/>
+          <p:nvPr/>
+        </p:nvSpPr>
+        <p:spPr>
+          <a:xfrm>
+            <a:off x="7040880" y="1508760"/>
+            <a:ext cx="1188720" cy="914400"/>
+          </a:xfrm>
+          <a:prstGeom prst="rect">
+            <a:avLst/>
+          </a:prstGeom>
+          <a:noFill/>
+        </p:spPr>
+        <p:txBody>
+          <a:bodyPr wrap="square">
+            <a:spAutoFit/>
+          </a:bodyPr>
+          <a:lstStyle/>
+          <a:p>
+            <a:pPr algn="ctr"/>
+            <a:r>
+              <a:rPr sz="3400" b="0" i="0">
+                <a:solidFill>
+                  <a:srgbClr val="FFFFFF"/>
+                </a:solidFill>
+              </a:rPr>
+              <a:t>🎮</a:t>
+            </a:r>
+          </a:p>
+        </p:txBody>
+      </p:sp>
+      <p:sp>
+        <p:nvSpPr>
+          <p:cNvPr id="17" name="TextBox 16"/>
+          <p:cNvSpPr txBox="1"/>
+          <p:nvPr/>
+        </p:nvSpPr>
+        <p:spPr>
+          <a:xfrm>
+            <a:off x="6400800" y="2423160"/>
+            <a:ext cx="2468880" cy="640080"/>
+          </a:xfrm>
+          <a:prstGeom prst="rect">
+            <a:avLst/>
+          </a:prstGeom>
+          <a:noFill/>
+        </p:spPr>
+        <p:txBody>
+          <a:bodyPr wrap="square">
+            <a:spAutoFit/>
+          </a:bodyPr>
+          <a:lstStyle/>
+          <a:p>
+            <a:pPr algn="ctr"/>
+            <a:r>
+              <a:rPr sz="1500" b="1" i="0">
+                <a:solidFill>
+                  <a:srgbClr val="00FFAA"/>
+                </a:solidFill>
+              </a:rPr>
+              <a:t>Game
+Engine</a:t>
+            </a:r>
+          </a:p>
+        </p:txBody>
+      </p:sp>
+      <p:sp>
+        <p:nvSpPr>
+          <p:cNvPr id="18" name="TextBox 17"/>
+          <p:cNvSpPr txBox="1"/>
+          <p:nvPr/>
+        </p:nvSpPr>
+        <p:spPr>
+          <a:xfrm>
+            <a:off x="6400800" y="3063240"/>
+            <a:ext cx="2468880" cy="1097280"/>
+          </a:xfrm>
+          <a:prstGeom prst="rect">
+            <a:avLst/>
+          </a:prstGeom>
+          <a:noFill/>
+        </p:spPr>
+        <p:txBody>
+          <a:bodyPr wrap="square">
+            <a:spAutoFit/>
+          </a:bodyPr>
+          <a:lstStyle/>
+          <a:p>
+            <a:pPr algn="ctr"/>
+            <a:r>
+              <a:rPr sz="1200" b="0" i="0">
+                <a:solidFill>
+                  <a:srgbClr val="CCCCCC"/>
+                </a:solidFill>
+              </a:rPr>
+              <a:t>React frontend
+gamified UI</a:t>
+            </a:r>
+          </a:p>
+        </p:txBody>
+      </p:sp>
+      <p:sp>
+        <p:nvSpPr>
+          <p:cNvPr id="19" name="TextBox 18"/>
+          <p:cNvSpPr txBox="1"/>
+          <p:nvPr/>
+        </p:nvSpPr>
+        <p:spPr>
+          <a:xfrm>
+            <a:off x="9052560" y="2377440"/>
+            <a:ext cx="365760" cy="548640"/>
+          </a:xfrm>
+          <a:prstGeom prst="rect">
+            <a:avLst/>
+          </a:prstGeom>
+          <a:noFill/>
+        </p:spPr>
+        <p:txBody>
+          <a:bodyPr wrap="square">
+            <a:spAutoFit/>
+          </a:bodyPr>
+          <a:lstStyle/>
+          <a:p>
+            <a:pPr algn="ctr"/>
+            <a:r>
+              <a:rPr sz="2400" b="1" i="0">
+                <a:solidFill>
+                  <a:srgbClr val="00D4FF"/>
+                </a:solidFill>
+              </a:rPr>
+              <a:t>→</a:t>
+            </a:r>
+          </a:p>
+        </p:txBody>
+      </p:sp>
+      <p:sp>
+        <p:nvSpPr>
+          <p:cNvPr id="20" name="Rectangle 19"/>
+          <p:cNvSpPr/>
+          <p:nvPr/>
+        </p:nvSpPr>
+        <p:spPr>
+          <a:xfrm>
+            <a:off x="9235440" y="1371600"/>
+            <a:ext cx="2651760" cy="2926080"/>
+          </a:xfrm>
+          <a:prstGeom prst="rect">
+            <a:avLst/>
+          </a:prstGeom>
+          <a:solidFill>
+            <a:srgbClr val="05251A"/>
+          </a:solidFill>
+          <a:ln>
+            <a:noFill/>
+          </a:ln>
+        </p:spPr>
+        <p:style>
+          <a:lnRef idx="1">
+            <a:schemeClr val="accent1"/>
+          </a:lnRef>
+          <a:fillRef idx="3">
+            <a:schemeClr val="accent1"/>
+          </a:fillRef>
+          <a:effectRef idx="2">
+            <a:schemeClr val="accent1"/>
+          </a:effectRef>
+          <a:fontRef idx="minor">
+            <a:schemeClr val="lt1"/>
+          </a:fontRef>
+        </p:style>
+        <p:txBody>
+          <a:bodyPr rtlCol="0" anchor="ctr"/>
+          <a:lstStyle/>
+          <a:p>
+            <a:pPr algn="ctr"/>
+          </a:p>
+        </p:txBody>
+      </p:sp>
+      <p:sp>
+        <p:nvSpPr>
+          <p:cNvPr id="21" name="TextBox 20"/>
+          <p:cNvSpPr txBox="1"/>
+          <p:nvPr/>
+        </p:nvSpPr>
+        <p:spPr>
+          <a:xfrm>
+            <a:off x="9966960" y="1508760"/>
+            <a:ext cx="1188720" cy="914400"/>
+          </a:xfrm>
+          <a:prstGeom prst="rect">
+            <a:avLst/>
+          </a:prstGeom>
+          <a:noFill/>
+        </p:spPr>
+        <p:txBody>
+          <a:bodyPr wrap="square">
+            <a:spAutoFit/>
+          </a:bodyPr>
+          <a:lstStyle/>
+          <a:p>
+            <a:pPr algn="ctr"/>
+            <a:r>
+              <a:rPr sz="3400" b="0" i="0">
+                <a:solidFill>
+                  <a:srgbClr val="FFFFFF"/>
+                </a:solidFill>
+              </a:rPr>
+              <a:t>🤖</a:t>
+            </a:r>
+          </a:p>
+        </p:txBody>
+      </p:sp>
+      <p:sp>
+        <p:nvSpPr>
+          <p:cNvPr id="22" name="TextBox 21"/>
+          <p:cNvSpPr txBox="1"/>
+          <p:nvPr/>
+        </p:nvSpPr>
+        <p:spPr>
+          <a:xfrm>
+            <a:off x="9326880" y="2423160"/>
+            <a:ext cx="2468880" cy="640080"/>
+          </a:xfrm>
+          <a:prstGeom prst="rect">
+            <a:avLst/>
+          </a:prstGeom>
+          <a:noFill/>
+        </p:spPr>
+        <p:txBody>
+          <a:bodyPr wrap="square">
+            <a:spAutoFit/>
+          </a:bodyPr>
+          <a:lstStyle/>
+          <a:p>
+            <a:pPr algn="ctr"/>
+            <a:r>
+              <a:rPr sz="1500" b="1" i="0">
+                <a:solidFill>
+                  <a:srgbClr val="00FFAA"/>
+                </a:solidFill>
+              </a:rPr>
+              <a:t>AI Tutor
+Agent</a:t>
+            </a:r>
+          </a:p>
+        </p:txBody>
+      </p:sp>
+      <p:sp>
+        <p:nvSpPr>
+          <p:cNvPr id="23" name="TextBox 22"/>
+          <p:cNvSpPr txBox="1"/>
+          <p:nvPr/>
+        </p:nvSpPr>
+        <p:spPr>
+          <a:xfrm>
+            <a:off x="9326880" y="3063240"/>
+            <a:ext cx="2468880" cy="1097280"/>
+          </a:xfrm>
+          <a:prstGeom prst="rect">
+            <a:avLst/>
+          </a:prstGeom>
+          <a:noFill/>
+        </p:spPr>
+        <p:txBody>
+          <a:bodyPr wrap="square">
+            <a:spAutoFit/>
+          </a:bodyPr>
+          <a:lstStyle/>
+          <a:p>
+            <a:pPr algn="ctr"/>
+            <a:r>
+              <a:rPr sz="1200" b="0" i="0">
+                <a:solidFill>
+                  <a:srgbClr val="CCCCCC"/>
+                </a:solidFill>
+              </a:rPr>
+              <a:t>OpenRouter LLM
++ spaced repetition</a:t>
+            </a:r>
+          </a:p>
+        </p:txBody>
+      </p:sp>
+      <p:sp>
+        <p:nvSpPr>
+          <p:cNvPr id="24" name="TextBox 23"/>
+          <p:cNvSpPr txBox="1"/>
+          <p:nvPr/>
+        </p:nvSpPr>
+        <p:spPr>
+          <a:xfrm>
+            <a:off x="457200" y="4572000"/>
+            <a:ext cx="11247120" cy="548640"/>
+          </a:xfrm>
+          <a:prstGeom prst="rect">
+            <a:avLst/>
+          </a:prstGeom>
+          <a:noFill/>
+        </p:spPr>
+        <p:txBody>
+          <a:bodyPr wrap="square">
+            <a:spAutoFit/>
+          </a:bodyPr>
+          <a:lstStyle/>
+          <a:p>
+            <a:pPr algn="ctr"/>
+            <a:r>
+              <a:rPr sz="1400" b="0" i="0">
+                <a:solidFill>
+                  <a:srgbClr val="CCCCCC"/>
+                </a:solidFill>
+              </a:rPr>
+              <a:t>Stack:  React + TypeScript  •  FastAPI  •  MediaPipe  •  Scikit-learn  •  Supabase  •  WebSockets</a:t>
             </a:r>
           </a:p>
         </p:txBody>
@@ -6270,7 +7108,7 @@
     <p:bg>
       <p:bgPr>
         <a:solidFill>
-          <a:srgbClr val="1A1A08"/>
+          <a:srgbClr val="0D1B2A"/>
         </a:solidFill>
         <a:effectLst/>
       </p:bgPr>
@@ -6291,18 +7129,16 @@
         <p:spPr>
           <a:xfrm>
             <a:off x="0" y="0"/>
-            <a:ext cx="12188952" cy="1005840"/>
+            <a:ext cx="12188952" cy="73152"/>
           </a:xfrm>
           <a:prstGeom prst="rect">
             <a:avLst/>
           </a:prstGeom>
           <a:solidFill>
-            <a:srgbClr val="2A2A14"/>
+            <a:srgbClr val="00D4FF"/>
           </a:solidFill>
-          <a:ln w="25400">
-            <a:solidFill>
-              <a:srgbClr val="A0D040"/>
-            </a:solidFill>
+          <a:ln>
+            <a:noFill/>
           </a:ln>
         </p:spPr>
         <p:style>
@@ -6335,28 +7171,28 @@
         </p:nvSpPr>
         <p:spPr>
           <a:xfrm>
-            <a:off x="365760" y="182880"/>
-            <a:ext cx="11457432" cy="731520"/>
-          </a:xfrm>
-          <a:prstGeom prst="rect">
-            <a:avLst/>
-          </a:prstGeom>
-          <a:noFill/>
-        </p:spPr>
-        <p:txBody>
-          <a:bodyPr wrap="square">
-            <a:spAutoFit/>
-          </a:bodyPr>
-          <a:lstStyle/>
-          <a:p>
-            <a:pPr algn="ctr"/>
-            <a:r>
-              <a:rPr sz="2800" b="1">
-                <a:solidFill>
-                  <a:srgbClr val="A0D040"/>
-                </a:solidFill>
-              </a:rPr>
-              <a:t>System Architecture</a:t>
+            <a:off x="457200" y="182880"/>
+            <a:ext cx="10972800" cy="822960"/>
+          </a:xfrm>
+          <a:prstGeom prst="rect">
+            <a:avLst/>
+          </a:prstGeom>
+          <a:noFill/>
+        </p:spPr>
+        <p:txBody>
+          <a:bodyPr wrap="square">
+            <a:spAutoFit/>
+          </a:bodyPr>
+          <a:lstStyle/>
+          <a:p>
+            <a:pPr algn="l"/>
+            <a:r>
+              <a:rPr sz="3600" b="1" i="0">
+                <a:solidFill>
+                  <a:srgbClr val="00D4FF"/>
+                </a:solidFill>
+              </a:rPr>
+              <a:t>👤  The Team</a:t>
             </a:r>
           </a:p>
         </p:txBody>
@@ -6369,19 +7205,17 @@
         </p:nvSpPr>
         <p:spPr>
           <a:xfrm>
-            <a:off x="182880" y="1188720"/>
-            <a:ext cx="5669280" cy="2377440"/>
+            <a:off x="457200" y="1005840"/>
+            <a:ext cx="11247120" cy="45720"/>
           </a:xfrm>
           <a:prstGeom prst="rect">
             <a:avLst/>
           </a:prstGeom>
           <a:solidFill>
-            <a:srgbClr val="2A2A14"/>
+            <a:srgbClr val="00D4FF"/>
           </a:solidFill>
-          <a:ln w="19050">
-            <a:solidFill>
-              <a:srgbClr val="4A4A20"/>
-            </a:solidFill>
+          <a:ln>
+            <a:noFill/>
           </a:ln>
         </p:spPr>
         <p:style>
@@ -6408,119 +7242,23 @@
       </p:sp>
       <p:sp>
         <p:nvSpPr>
-          <p:cNvPr id="5" name="TextBox 4"/>
-          <p:cNvSpPr txBox="1"/>
-          <p:nvPr/>
-        </p:nvSpPr>
-        <p:spPr>
-          <a:xfrm>
-            <a:off x="320040" y="1280160"/>
-            <a:ext cx="5394960" cy="2194560"/>
-          </a:xfrm>
-          <a:prstGeom prst="rect">
-            <a:avLst/>
-          </a:prstGeom>
-          <a:noFill/>
-        </p:spPr>
-        <p:txBody>
-          <a:bodyPr wrap="square">
-            <a:spAutoFit/>
-          </a:bodyPr>
-          <a:lstStyle/>
-          <a:p>
-            <a:pPr algn="l"/>
-            <a:r>
-              <a:rPr sz="1400" b="1">
-                <a:solidFill>
-                  <a:srgbClr val="A0D040"/>
-                </a:solidFill>
-              </a:rPr>
-              <a:t>Frontend (React)</a:t>
-            </a:r>
-          </a:p>
-          <a:p>
-            <a:pPr algn="l">
-              <a:spcBef>
-                <a:spcPts val="400"/>
-              </a:spcBef>
-            </a:pPr>
-            <a:r>
-              <a:rPr sz="1100">
-                <a:solidFill>
-                  <a:srgbClr val="F0F0E0"/>
-                </a:solidFill>
-              </a:rPr>
-              <a:t>▸ LandingPage · AuthPage · LearnPage</a:t>
-            </a:r>
-          </a:p>
-          <a:p>
-            <a:pPr algn="l">
-              <a:spcBef>
-                <a:spcPts val="400"/>
-              </a:spcBef>
-            </a:pPr>
-            <a:r>
-              <a:rPr sz="1100">
-                <a:solidFill>
-                  <a:srgbClr val="F0F0E0"/>
-                </a:solidFill>
-              </a:rPr>
-              <a:t>▸ GamePage · TranslatorPage · AITutorPage</a:t>
-            </a:r>
-          </a:p>
-          <a:p>
-            <a:pPr algn="l">
-              <a:spcBef>
-                <a:spcPts val="400"/>
-              </a:spcBef>
-            </a:pPr>
-            <a:r>
-              <a:rPr sz="1100">
-                <a:solidFill>
-                  <a:srgbClr val="F0F0E0"/>
-                </a:solidFill>
-              </a:rPr>
-              <a:t>▸ Webcam → WebSocket → Backend</a:t>
-            </a:r>
-          </a:p>
-          <a:p>
-            <a:pPr algn="l">
-              <a:spcBef>
-                <a:spcPts val="400"/>
-              </a:spcBef>
-            </a:pPr>
-            <a:r>
-              <a:rPr sz="1100">
-                <a:solidFill>
-                  <a:srgbClr val="F0F0E0"/>
-                </a:solidFill>
-              </a:rPr>
-              <a:t>▸ Streaming chat via ReadableStream</a:t>
-            </a:r>
-          </a:p>
-        </p:txBody>
-      </p:sp>
-      <p:sp>
-        <p:nvSpPr>
-          <p:cNvPr id="6" name="Rectangle 5"/>
+          <p:cNvPr id="5" name="Rectangle 4"/>
           <p:cNvSpPr/>
           <p:nvPr/>
         </p:nvSpPr>
         <p:spPr>
           <a:xfrm>
-            <a:off x="6217920" y="1188720"/>
-            <a:ext cx="5669280" cy="2377440"/>
+            <a:off x="3200400" y="1371600"/>
+            <a:ext cx="5760720" cy="4572000"/>
           </a:xfrm>
           <a:prstGeom prst="rect">
             <a:avLst/>
           </a:prstGeom>
           <a:solidFill>
-            <a:srgbClr val="2A2A14"/>
+            <a:srgbClr val="051A2A"/>
           </a:solidFill>
-          <a:ln w="19050">
-            <a:solidFill>
-              <a:srgbClr val="4A4A20"/>
-            </a:solidFill>
+          <a:ln>
+            <a:noFill/>
           </a:ln>
         </p:spPr>
         <p:style>
@@ -6547,140 +7285,104 @@
       </p:sp>
       <p:sp>
         <p:nvSpPr>
+          <p:cNvPr id="6" name="TextBox 5"/>
+          <p:cNvSpPr txBox="1"/>
+          <p:nvPr/>
+        </p:nvSpPr>
+        <p:spPr>
+          <a:xfrm>
+            <a:off x="5029200" y="1645920"/>
+            <a:ext cx="2103120" cy="1645920"/>
+          </a:xfrm>
+          <a:prstGeom prst="rect">
+            <a:avLst/>
+          </a:prstGeom>
+          <a:noFill/>
+        </p:spPr>
+        <p:txBody>
+          <a:bodyPr wrap="square">
+            <a:spAutoFit/>
+          </a:bodyPr>
+          <a:lstStyle/>
+          <a:p>
+            <a:pPr algn="ctr"/>
+            <a:r>
+              <a:rPr sz="7200" b="0" i="0">
+                <a:solidFill>
+                  <a:srgbClr val="FFFFFF"/>
+                </a:solidFill>
+              </a:rPr>
+              <a:t>🧑‍💻</a:t>
+            </a:r>
+          </a:p>
+        </p:txBody>
+      </p:sp>
+      <p:sp>
+        <p:nvSpPr>
           <p:cNvPr id="7" name="TextBox 6"/>
           <p:cNvSpPr txBox="1"/>
           <p:nvPr/>
         </p:nvSpPr>
         <p:spPr>
           <a:xfrm>
-            <a:off x="6355080" y="1280160"/>
-            <a:ext cx="5394960" cy="2194560"/>
-          </a:xfrm>
-          <a:prstGeom prst="rect">
-            <a:avLst/>
-          </a:prstGeom>
-          <a:noFill/>
-        </p:spPr>
-        <p:txBody>
-          <a:bodyPr wrap="square">
-            <a:spAutoFit/>
-          </a:bodyPr>
-          <a:lstStyle/>
-          <a:p>
-            <a:pPr algn="l"/>
-            <a:r>
-              <a:rPr sz="1400" b="1">
-                <a:solidFill>
-                  <a:srgbClr val="A0D040"/>
-                </a:solidFill>
-              </a:rPr>
-              <a:t>Backend (FastAPI)</a:t>
-            </a:r>
-          </a:p>
-          <a:p>
-            <a:pPr algn="l">
-              <a:spcBef>
-                <a:spcPts val="400"/>
-              </a:spcBef>
-            </a:pPr>
-            <a:r>
-              <a:rPr sz="1100">
-                <a:solidFill>
-                  <a:srgbClr val="F0F0E0"/>
-                </a:solidFill>
-              </a:rPr>
-              <a:t>▸ /ws/{id} — sign recognition</a:t>
-            </a:r>
-          </a:p>
-          <a:p>
-            <a:pPr algn="l">
-              <a:spcBef>
-                <a:spcPts val="400"/>
-              </a:spcBef>
-            </a:pPr>
-            <a:r>
-              <a:rPr sz="1100">
-                <a:solidFill>
-                  <a:srgbClr val="F0F0E0"/>
-                </a:solidFill>
-              </a:rPr>
-              <a:t>▸ /ws/practice/{id} — letter practice</a:t>
-            </a:r>
-          </a:p>
-          <a:p>
-            <a:pPr algn="l">
-              <a:spcBef>
-                <a:spcPts val="400"/>
-              </a:spcBef>
-            </a:pPr>
-            <a:r>
-              <a:rPr sz="1100">
-                <a:solidFill>
-                  <a:srgbClr val="F0F0E0"/>
-                </a:solidFill>
-              </a:rPr>
-              <a:t>▸ POST /api/chat — streaming AI</a:t>
-            </a:r>
-          </a:p>
-          <a:p>
-            <a:pPr algn="l">
-              <a:spcBef>
-                <a:spcPts val="400"/>
-              </a:spcBef>
-            </a:pPr>
-            <a:r>
-              <a:rPr sz="1100">
-                <a:solidFill>
-                  <a:srgbClr val="F0F0E0"/>
-                </a:solidFill>
-              </a:rPr>
-              <a:t>▸ POST /api/chat/greeting &amp; /history</a:t>
-            </a:r>
-          </a:p>
-        </p:txBody>
-      </p:sp>
-      <p:sp>
-        <p:nvSpPr>
-          <p:cNvPr id="8" name="Rectangle 7"/>
-          <p:cNvSpPr/>
-          <p:nvPr/>
-        </p:nvSpPr>
-        <p:spPr>
-          <a:xfrm>
-            <a:off x="182880" y="3749039"/>
-            <a:ext cx="5669280" cy="2377440"/>
-          </a:xfrm>
-          <a:prstGeom prst="rect">
-            <a:avLst/>
-          </a:prstGeom>
-          <a:solidFill>
-            <a:srgbClr val="2A2A14"/>
-          </a:solidFill>
-          <a:ln w="19050">
-            <a:solidFill>
-              <a:srgbClr val="4A4A20"/>
-            </a:solidFill>
-          </a:ln>
-        </p:spPr>
-        <p:style>
-          <a:lnRef idx="1">
-            <a:schemeClr val="accent1"/>
-          </a:lnRef>
-          <a:fillRef idx="3">
-            <a:schemeClr val="accent1"/>
-          </a:fillRef>
-          <a:effectRef idx="2">
-            <a:schemeClr val="accent1"/>
-          </a:effectRef>
-          <a:fontRef idx="minor">
-            <a:schemeClr val="lt1"/>
-          </a:fontRef>
-        </p:style>
-        <p:txBody>
-          <a:bodyPr rtlCol="0" anchor="ctr"/>
-          <a:lstStyle/>
-          <a:p>
-            <a:pPr algn="ctr"/>
+            <a:off x="3383280" y="3291840"/>
+            <a:ext cx="5394960" cy="640080"/>
+          </a:xfrm>
+          <a:prstGeom prst="rect">
+            <a:avLst/>
+          </a:prstGeom>
+          <a:noFill/>
+        </p:spPr>
+        <p:txBody>
+          <a:bodyPr wrap="square">
+            <a:spAutoFit/>
+          </a:bodyPr>
+          <a:lstStyle/>
+          <a:p>
+            <a:pPr algn="ctr"/>
+            <a:r>
+              <a:rPr sz="2400" b="1" i="0">
+                <a:solidFill>
+                  <a:srgbClr val="00D4FF"/>
+                </a:solidFill>
+              </a:rPr>
+              <a:t>Solo Founder</a:t>
+            </a:r>
+          </a:p>
+        </p:txBody>
+      </p:sp>
+      <p:sp>
+        <p:nvSpPr>
+          <p:cNvPr id="8" name="TextBox 7"/>
+          <p:cNvSpPr txBox="1"/>
+          <p:nvPr/>
+        </p:nvSpPr>
+        <p:spPr>
+          <a:xfrm>
+            <a:off x="3383280" y="3931920"/>
+            <a:ext cx="5394960" cy="914400"/>
+          </a:xfrm>
+          <a:prstGeom prst="rect">
+            <a:avLst/>
+          </a:prstGeom>
+          <a:noFill/>
+        </p:spPr>
+        <p:txBody>
+          <a:bodyPr wrap="square">
+            <a:spAutoFit/>
+          </a:bodyPr>
+          <a:lstStyle/>
+          <a:p>
+            <a:pPr algn="ctr"/>
+            <a:r>
+              <a:rPr sz="1600" b="0" i="1">
+                <a:solidFill>
+                  <a:srgbClr val="CCCCCC"/>
+                </a:solidFill>
+              </a:rPr>
+              <a:t>Full-stack dev  •  ML engineer  •  Designer
+(yes, all of it 😅)</a:t>
+            </a:r>
           </a:p>
         </p:txBody>
       </p:sp>
@@ -6692,227 +7394,29 @@
         </p:nvSpPr>
         <p:spPr>
           <a:xfrm>
-            <a:off x="320040" y="3840479"/>
-            <a:ext cx="5394960" cy="2194560"/>
-          </a:xfrm>
-          <a:prstGeom prst="rect">
-            <a:avLst/>
-          </a:prstGeom>
-          <a:noFill/>
-        </p:spPr>
-        <p:txBody>
-          <a:bodyPr wrap="square">
-            <a:spAutoFit/>
-          </a:bodyPr>
-          <a:lstStyle/>
-          <a:p>
-            <a:pPr algn="l"/>
-            <a:r>
-              <a:rPr sz="1400" b="1">
-                <a:solidFill>
-                  <a:srgbClr val="A0D040"/>
-                </a:solidFill>
-              </a:rPr>
-              <a:t>ML Pipeline</a:t>
-            </a:r>
-          </a:p>
-          <a:p>
-            <a:pPr algn="l">
-              <a:spcBef>
-                <a:spcPts val="400"/>
-              </a:spcBef>
-            </a:pPr>
-            <a:r>
-              <a:rPr sz="1100">
-                <a:solidFill>
-                  <a:srgbClr val="F0F0E0"/>
-                </a:solidFill>
-              </a:rPr>
-              <a:t>▸ MediaPipe Hands → 21 landmarks</a:t>
-            </a:r>
-          </a:p>
-          <a:p>
-            <a:pPr algn="l">
-              <a:spcBef>
-                <a:spcPts val="400"/>
-              </a:spcBef>
-            </a:pPr>
-            <a:r>
-              <a:rPr sz="1100">
-                <a:solidFill>
-                  <a:srgbClr val="F0F0E0"/>
-                </a:solidFill>
-              </a:rPr>
-              <a:t>▸ 63 features (x,y,z per point)</a:t>
-            </a:r>
-          </a:p>
-          <a:p>
-            <a:pPr algn="l">
-              <a:spcBef>
-                <a:spcPts val="400"/>
-              </a:spcBef>
-            </a:pPr>
-            <a:r>
-              <a:rPr sz="1100">
-                <a:solidFill>
-                  <a:srgbClr val="F0F0E0"/>
-                </a:solidFill>
-              </a:rPr>
-              <a:t>▸ scikit-learn classifier</a:t>
-            </a:r>
-          </a:p>
-          <a:p>
-            <a:pPr algn="l">
-              <a:spcBef>
-                <a:spcPts val="400"/>
-              </a:spcBef>
-            </a:pPr>
-            <a:r>
-              <a:rPr sz="1100">
-                <a:solidFill>
-                  <a:srgbClr val="F0F0E0"/>
-                </a:solidFill>
-              </a:rPr>
-              <a:t>▸ Letter prediction + confidence score</a:t>
-            </a:r>
-          </a:p>
-        </p:txBody>
-      </p:sp>
-      <p:sp>
-        <p:nvSpPr>
-          <p:cNvPr id="10" name="Rectangle 9"/>
-          <p:cNvSpPr/>
-          <p:nvPr/>
-        </p:nvSpPr>
-        <p:spPr>
-          <a:xfrm>
-            <a:off x="6217920" y="3749039"/>
-            <a:ext cx="5669280" cy="2377440"/>
-          </a:xfrm>
-          <a:prstGeom prst="rect">
-            <a:avLst/>
-          </a:prstGeom>
-          <a:solidFill>
-            <a:srgbClr val="2A2A14"/>
-          </a:solidFill>
-          <a:ln w="19050">
-            <a:solidFill>
-              <a:srgbClr val="4A4A20"/>
-            </a:solidFill>
-          </a:ln>
-        </p:spPr>
-        <p:style>
-          <a:lnRef idx="1">
-            <a:schemeClr val="accent1"/>
-          </a:lnRef>
-          <a:fillRef idx="3">
-            <a:schemeClr val="accent1"/>
-          </a:fillRef>
-          <a:effectRef idx="2">
-            <a:schemeClr val="accent1"/>
-          </a:effectRef>
-          <a:fontRef idx="minor">
-            <a:schemeClr val="lt1"/>
-          </a:fontRef>
-        </p:style>
-        <p:txBody>
-          <a:bodyPr rtlCol="0" anchor="ctr"/>
-          <a:lstStyle/>
-          <a:p>
-            <a:pPr algn="ctr"/>
-          </a:p>
-        </p:txBody>
-      </p:sp>
-      <p:sp>
-        <p:nvSpPr>
-          <p:cNvPr id="11" name="TextBox 10"/>
-          <p:cNvSpPr txBox="1"/>
-          <p:nvPr/>
-        </p:nvSpPr>
-        <p:spPr>
-          <a:xfrm>
-            <a:off x="6355080" y="3840479"/>
-            <a:ext cx="5394960" cy="2194560"/>
-          </a:xfrm>
-          <a:prstGeom prst="rect">
-            <a:avLst/>
-          </a:prstGeom>
-          <a:noFill/>
-        </p:spPr>
-        <p:txBody>
-          <a:bodyPr wrap="square">
-            <a:spAutoFit/>
-          </a:bodyPr>
-          <a:lstStyle/>
-          <a:p>
-            <a:pPr algn="l"/>
-            <a:r>
-              <a:rPr sz="1400" b="1">
-                <a:solidFill>
-                  <a:srgbClr val="A0D040"/>
-                </a:solidFill>
-              </a:rPr>
-              <a:t>Data Layer (Supabase)</a:t>
-            </a:r>
-          </a:p>
-          <a:p>
-            <a:pPr algn="l">
-              <a:spcBef>
-                <a:spcPts val="400"/>
-              </a:spcBef>
-            </a:pPr>
-            <a:r>
-              <a:rPr sz="1100">
-                <a:solidFill>
-                  <a:srgbClr val="F0F0E0"/>
-                </a:solidFill>
-              </a:rPr>
-              <a:t>▸ user_progress — letters &amp; scores</a:t>
-            </a:r>
-          </a:p>
-          <a:p>
-            <a:pPr algn="l">
-              <a:spcBef>
-                <a:spcPts val="400"/>
-              </a:spcBef>
-            </a:pPr>
-            <a:r>
-              <a:rPr sz="1100">
-                <a:solidFill>
-                  <a:srgbClr val="F0F0E0"/>
-                </a:solidFill>
-              </a:rPr>
-              <a:t>▸ chat_history — AI conversation</a:t>
-            </a:r>
-          </a:p>
-          <a:p>
-            <a:pPr algn="l">
-              <a:spcBef>
-                <a:spcPts val="400"/>
-              </a:spcBef>
-            </a:pPr>
-            <a:r>
-              <a:rPr sz="1100">
-                <a:solidFill>
-                  <a:srgbClr val="F0F0E0"/>
-                </a:solidFill>
-              </a:rPr>
-              <a:t>▸ Row-level security via JWT</a:t>
-            </a:r>
-          </a:p>
-          <a:p>
-            <a:pPr algn="l">
-              <a:spcBef>
-                <a:spcPts val="400"/>
-              </a:spcBef>
-            </a:pPr>
-            <a:r>
-              <a:rPr sz="1100">
-                <a:solidFill>
-                  <a:srgbClr val="F0F0E0"/>
-                </a:solidFill>
-              </a:rPr>
-              <a:t>▸ Guest mode via localStorage</a:t>
+            <a:off x="3383280" y="4846320"/>
+            <a:ext cx="5394960" cy="914400"/>
+          </a:xfrm>
+          <a:prstGeom prst="rect">
+            <a:avLst/>
+          </a:prstGeom>
+          <a:noFill/>
+        </p:spPr>
+        <p:txBody>
+          <a:bodyPr wrap="square">
+            <a:spAutoFit/>
+          </a:bodyPr>
+          <a:lstStyle/>
+          <a:p>
+            <a:pPr algn="ctr"/>
+            <a:r>
+              <a:rPr sz="1400" b="0" i="1">
+                <a:solidFill>
+                  <a:srgbClr val="AAAAAA"/>
+                </a:solidFill>
+              </a:rPr>
+              <a:t>"I was too scared to socialize —
+so I built the whole thing myself."</a:t>
             </a:r>
           </a:p>
         </p:txBody>
@@ -6931,7 +7435,7 @@
     <p:bg>
       <p:bgPr>
         <a:solidFill>
-          <a:srgbClr val="1A1A08"/>
+          <a:srgbClr val="0D1B2A"/>
         </a:solidFill>
         <a:effectLst/>
       </p:bgPr>
@@ -6952,18 +7456,16 @@
         <p:spPr>
           <a:xfrm>
             <a:off x="0" y="0"/>
-            <a:ext cx="12188952" cy="1005840"/>
+            <a:ext cx="12188952" cy="73152"/>
           </a:xfrm>
           <a:prstGeom prst="rect">
             <a:avLst/>
           </a:prstGeom>
           <a:solidFill>
-            <a:srgbClr val="2A2A14"/>
+            <a:srgbClr val="7C3AFF"/>
           </a:solidFill>
-          <a:ln w="25400">
-            <a:solidFill>
-              <a:srgbClr val="A0D040"/>
-            </a:solidFill>
+          <a:ln>
+            <a:noFill/>
           </a:ln>
         </p:spPr>
         <p:style>
@@ -6996,28 +7498,28 @@
         </p:nvSpPr>
         <p:spPr>
           <a:xfrm>
-            <a:off x="365760" y="182880"/>
-            <a:ext cx="11457432" cy="731520"/>
-          </a:xfrm>
-          <a:prstGeom prst="rect">
-            <a:avLst/>
-          </a:prstGeom>
-          <a:noFill/>
-        </p:spPr>
-        <p:txBody>
-          <a:bodyPr wrap="square">
-            <a:spAutoFit/>
-          </a:bodyPr>
-          <a:lstStyle/>
-          <a:p>
-            <a:pPr algn="ctr"/>
-            <a:r>
-              <a:rPr sz="2800" b="1">
-                <a:solidFill>
-                  <a:srgbClr val="A0D040"/>
-                </a:solidFill>
-              </a:rPr>
-              <a:t>App Pages</a:t>
+            <a:off x="457200" y="182880"/>
+            <a:ext cx="10972800" cy="822960"/>
+          </a:xfrm>
+          <a:prstGeom prst="rect">
+            <a:avLst/>
+          </a:prstGeom>
+          <a:noFill/>
+        </p:spPr>
+        <p:txBody>
+          <a:bodyPr wrap="square">
+            <a:spAutoFit/>
+          </a:bodyPr>
+          <a:lstStyle/>
+          <a:p>
+            <a:pPr algn="l"/>
+            <a:r>
+              <a:rPr sz="3600" b="1" i="0">
+                <a:solidFill>
+                  <a:srgbClr val="7C3AFF"/>
+                </a:solidFill>
+              </a:rPr>
+              <a:t>🚀  What's Next</a:t>
             </a:r>
           </a:p>
         </p:txBody>
@@ -7030,19 +7532,17 @@
         </p:nvSpPr>
         <p:spPr>
           <a:xfrm>
-            <a:off x="182880" y="1188720"/>
-            <a:ext cx="3749039" cy="2377440"/>
+            <a:off x="457200" y="1005840"/>
+            <a:ext cx="11247120" cy="45720"/>
           </a:xfrm>
           <a:prstGeom prst="rect">
             <a:avLst/>
           </a:prstGeom>
           <a:solidFill>
-            <a:srgbClr val="2A2A14"/>
+            <a:srgbClr val="7C3AFF"/>
           </a:solidFill>
-          <a:ln w="19050">
-            <a:solidFill>
-              <a:srgbClr val="4A4A20"/>
-            </a:solidFill>
+          <a:ln>
+            <a:noFill/>
           </a:ln>
         </p:spPr>
         <p:style>
@@ -7069,104 +7569,23 @@
       </p:sp>
       <p:sp>
         <p:nvSpPr>
-          <p:cNvPr id="5" name="TextBox 4"/>
-          <p:cNvSpPr txBox="1"/>
-          <p:nvPr/>
-        </p:nvSpPr>
-        <p:spPr>
-          <a:xfrm>
-            <a:off x="320040" y="1280160"/>
-            <a:ext cx="3474719" cy="2194560"/>
-          </a:xfrm>
-          <a:prstGeom prst="rect">
-            <a:avLst/>
-          </a:prstGeom>
-          <a:noFill/>
-        </p:spPr>
-        <p:txBody>
-          <a:bodyPr wrap="square">
-            <a:spAutoFit/>
-          </a:bodyPr>
-          <a:lstStyle/>
-          <a:p>
-            <a:pPr algn="l"/>
-            <a:r>
-              <a:rPr sz="1400" b="1">
-                <a:solidFill>
-                  <a:srgbClr val="A0D040"/>
-                </a:solidFill>
-              </a:rPr>
-              <a:t>🏠  Landing Page</a:t>
-            </a:r>
-          </a:p>
-          <a:p>
-            <a:pPr algn="l">
-              <a:spcBef>
-                <a:spcPts val="400"/>
-              </a:spcBef>
-            </a:pPr>
-            <a:r>
-              <a:rPr sz="1100">
-                <a:solidFill>
-                  <a:srgbClr val="F0F0E0"/>
-                </a:solidFill>
-              </a:rPr>
-              <a:t>▸ Animated floating hands background</a:t>
-            </a:r>
-          </a:p>
-          <a:p>
-            <a:pPr algn="l">
-              <a:spcBef>
-                <a:spcPts val="400"/>
-              </a:spcBef>
-            </a:pPr>
-            <a:r>
-              <a:rPr sz="1100">
-                <a:solidFill>
-                  <a:srgbClr val="F0F0E0"/>
-                </a:solidFill>
-              </a:rPr>
-              <a:t>▸ Login / guest mode</a:t>
-            </a:r>
-          </a:p>
-          <a:p>
-            <a:pPr algn="l">
-              <a:spcBef>
-                <a:spcPts val="400"/>
-              </a:spcBef>
-            </a:pPr>
-            <a:r>
-              <a:rPr sz="1100">
-                <a:solidFill>
-                  <a:srgbClr val="F0F0E0"/>
-                </a:solidFill>
-              </a:rPr>
-              <a:t>▸ Navigation to all features</a:t>
-            </a:r>
-          </a:p>
-        </p:txBody>
-      </p:sp>
-      <p:sp>
-        <p:nvSpPr>
-          <p:cNvPr id="6" name="Rectangle 5"/>
+          <p:cNvPr id="5" name="Rectangle 4"/>
           <p:cNvSpPr/>
           <p:nvPr/>
         </p:nvSpPr>
         <p:spPr>
           <a:xfrm>
-            <a:off x="4160520" y="1188720"/>
-            <a:ext cx="3749039" cy="2377440"/>
+            <a:off x="457200" y="1280160"/>
+            <a:ext cx="3657600" cy="5029200"/>
           </a:xfrm>
           <a:prstGeom prst="rect">
             <a:avLst/>
           </a:prstGeom>
           <a:solidFill>
-            <a:srgbClr val="2A2A14"/>
+            <a:srgbClr val="0A0A1A"/>
           </a:solidFill>
-          <a:ln w="19050">
-            <a:solidFill>
-              <a:srgbClr val="4A4A20"/>
-            </a:solidFill>
+          <a:ln>
+            <a:noFill/>
           </a:ln>
         </p:spPr>
         <p:style>
@@ -7193,104 +7612,23 @@
       </p:sp>
       <p:sp>
         <p:nvSpPr>
-          <p:cNvPr id="7" name="TextBox 6"/>
-          <p:cNvSpPr txBox="1"/>
-          <p:nvPr/>
-        </p:nvSpPr>
-        <p:spPr>
-          <a:xfrm>
-            <a:off x="4297680" y="1280160"/>
-            <a:ext cx="3474719" cy="2194560"/>
-          </a:xfrm>
-          <a:prstGeom prst="rect">
-            <a:avLst/>
-          </a:prstGeom>
-          <a:noFill/>
-        </p:spPr>
-        <p:txBody>
-          <a:bodyPr wrap="square">
-            <a:spAutoFit/>
-          </a:bodyPr>
-          <a:lstStyle/>
-          <a:p>
-            <a:pPr algn="l"/>
-            <a:r>
-              <a:rPr sz="1400" b="1">
-                <a:solidFill>
-                  <a:srgbClr val="A0D040"/>
-                </a:solidFill>
-              </a:rPr>
-              <a:t>📖  Learn Mode</a:t>
-            </a:r>
-          </a:p>
-          <a:p>
-            <a:pPr algn="l">
-              <a:spcBef>
-                <a:spcPts val="400"/>
-              </a:spcBef>
-            </a:pPr>
-            <a:r>
-              <a:rPr sz="1100">
-                <a:solidFill>
-                  <a:srgbClr val="F0F0E0"/>
-                </a:solidFill>
-              </a:rPr>
-              <a:t>▸ Full alphabet with animated SVG hands</a:t>
-            </a:r>
-          </a:p>
-          <a:p>
-            <a:pPr algn="l">
-              <a:spcBef>
-                <a:spcPts val="400"/>
-              </a:spcBef>
-            </a:pPr>
-            <a:r>
-              <a:rPr sz="1100">
-                <a:solidFill>
-                  <a:srgbClr val="F0F0E0"/>
-                </a:solidFill>
-              </a:rPr>
-              <a:t>▸ Quiz mode (10-question rounds)</a:t>
-            </a:r>
-          </a:p>
-          <a:p>
-            <a:pPr algn="l">
-              <a:spcBef>
-                <a:spcPts val="400"/>
-              </a:spcBef>
-            </a:pPr>
-            <a:r>
-              <a:rPr sz="1100">
-                <a:solidFill>
-                  <a:srgbClr val="F0F0E0"/>
-                </a:solidFill>
-              </a:rPr>
-              <a:t>▸ Practice modal with live camera</a:t>
-            </a:r>
-          </a:p>
-        </p:txBody>
-      </p:sp>
-      <p:sp>
-        <p:nvSpPr>
-          <p:cNvPr id="8" name="Rectangle 7"/>
+          <p:cNvPr id="6" name="Rectangle 5"/>
           <p:cNvSpPr/>
           <p:nvPr/>
         </p:nvSpPr>
         <p:spPr>
           <a:xfrm>
-            <a:off x="8138160" y="1188720"/>
-            <a:ext cx="3749039" cy="2377440"/>
+            <a:off x="457200" y="1280160"/>
+            <a:ext cx="3657600" cy="640080"/>
           </a:xfrm>
           <a:prstGeom prst="rect">
             <a:avLst/>
           </a:prstGeom>
           <a:solidFill>
-            <a:srgbClr val="2A2A14"/>
+            <a:srgbClr val="00D4FF"/>
           </a:solidFill>
-          <a:ln w="19050">
-            <a:solidFill>
-              <a:srgbClr val="4A4A20"/>
-            </a:solidFill>
+          <a:ln>
+            <a:noFill/>
           </a:ln>
         </p:spPr>
         <p:style>
@@ -7317,14 +7655,83 @@
       </p:sp>
       <p:sp>
         <p:nvSpPr>
+          <p:cNvPr id="7" name="TextBox 6"/>
+          <p:cNvSpPr txBox="1"/>
+          <p:nvPr/>
+        </p:nvSpPr>
+        <p:spPr>
+          <a:xfrm>
+            <a:off x="548640" y="1298448"/>
+            <a:ext cx="3474720" cy="594360"/>
+          </a:xfrm>
+          <a:prstGeom prst="rect">
+            <a:avLst/>
+          </a:prstGeom>
+          <a:noFill/>
+        </p:spPr>
+        <p:txBody>
+          <a:bodyPr wrap="square">
+            <a:spAutoFit/>
+          </a:bodyPr>
+          <a:lstStyle/>
+          <a:p>
+            <a:pPr algn="ctr"/>
+            <a:r>
+              <a:rPr sz="1600" b="1" i="0">
+                <a:solidFill>
+                  <a:srgbClr val="0D1B2A"/>
+                </a:solidFill>
+              </a:rPr>
+              <a:t>Phase 1
+(Now)</a:t>
+            </a:r>
+          </a:p>
+        </p:txBody>
+      </p:sp>
+      <p:sp>
+        <p:nvSpPr>
+          <p:cNvPr id="8" name="TextBox 7"/>
+          <p:cNvSpPr txBox="1"/>
+          <p:nvPr/>
+        </p:nvSpPr>
+        <p:spPr>
+          <a:xfrm>
+            <a:off x="640080" y="2011680"/>
+            <a:ext cx="3291840" cy="731520"/>
+          </a:xfrm>
+          <a:prstGeom prst="rect">
+            <a:avLst/>
+          </a:prstGeom>
+          <a:noFill/>
+        </p:spPr>
+        <p:txBody>
+          <a:bodyPr wrap="square">
+            <a:spAutoFit/>
+          </a:bodyPr>
+          <a:lstStyle/>
+          <a:p>
+            <a:pPr algn="l"/>
+            <a:r>
+              <a:rPr sz="1500" b="0" i="0">
+                <a:solidFill>
+                  <a:srgbClr val="CCCCCC"/>
+                </a:solidFill>
+              </a:rPr>
+              <a:t>▸  ASL letters A–Z</a:t>
+            </a:r>
+          </a:p>
+        </p:txBody>
+      </p:sp>
+      <p:sp>
+        <p:nvSpPr>
           <p:cNvPr id="9" name="TextBox 8"/>
           <p:cNvSpPr txBox="1"/>
           <p:nvPr/>
         </p:nvSpPr>
         <p:spPr>
           <a:xfrm>
-            <a:off x="8275320" y="1280160"/>
-            <a:ext cx="3474719" cy="2194560"/>
+            <a:off x="640080" y="2834640"/>
+            <a:ext cx="3291840" cy="731520"/>
           </a:xfrm>
           <a:prstGeom prst="rect">
             <a:avLst/>
@@ -7339,82 +7746,103 @@
           <a:p>
             <a:pPr algn="l"/>
             <a:r>
-              <a:rPr sz="1400" b="1">
-                <a:solidFill>
-                  <a:srgbClr val="A0D040"/>
-                </a:solidFill>
-              </a:rPr>
-              <a:t>🎮  Sign Sprint</a:t>
-            </a:r>
-          </a:p>
-          <a:p>
-            <a:pPr algn="l">
-              <a:spcBef>
-                <a:spcPts val="400"/>
-              </a:spcBef>
-            </a:pPr>
-            <a:r>
-              <a:rPr sz="1100">
-                <a:solidFill>
-                  <a:srgbClr val="F0F0E0"/>
-                </a:solidFill>
-              </a:rPr>
-              <a:t>▸ Lives, timer, streaks</a:t>
-            </a:r>
-          </a:p>
-          <a:p>
-            <a:pPr algn="l">
-              <a:spcBef>
-                <a:spcPts val="400"/>
-              </a:spcBef>
-            </a:pPr>
-            <a:r>
-              <a:rPr sz="1100">
-                <a:solidFill>
-                  <a:srgbClr val="F0F0E0"/>
-                </a:solidFill>
-              </a:rPr>
-              <a:t>▸ Difficulty levels + daily challenge</a:t>
-            </a:r>
-          </a:p>
-          <a:p>
-            <a:pPr algn="l">
-              <a:spcBef>
-                <a:spcPts val="400"/>
-              </a:spcBef>
-            </a:pPr>
-            <a:r>
-              <a:rPr sz="1100">
-                <a:solidFill>
-                  <a:srgbClr val="F0F0E0"/>
-                </a:solidFill>
-              </a:rPr>
-              <a:t>▸ Achievements &amp; high scores</a:t>
-            </a:r>
-          </a:p>
-        </p:txBody>
-      </p:sp>
-      <p:sp>
-        <p:nvSpPr>
-          <p:cNvPr id="10" name="Rectangle 9"/>
+              <a:rPr sz="1500" b="0" i="0">
+                <a:solidFill>
+                  <a:srgbClr val="CCCCCC"/>
+                </a:solidFill>
+              </a:rPr>
+              <a:t>▸  Numbers 0–9</a:t>
+            </a:r>
+          </a:p>
+        </p:txBody>
+      </p:sp>
+      <p:sp>
+        <p:nvSpPr>
+          <p:cNvPr id="10" name="TextBox 9"/>
+          <p:cNvSpPr txBox="1"/>
+          <p:nvPr/>
+        </p:nvSpPr>
+        <p:spPr>
+          <a:xfrm>
+            <a:off x="640080" y="3657600"/>
+            <a:ext cx="3291840" cy="731520"/>
+          </a:xfrm>
+          <a:prstGeom prst="rect">
+            <a:avLst/>
+          </a:prstGeom>
+          <a:noFill/>
+        </p:spPr>
+        <p:txBody>
+          <a:bodyPr wrap="square">
+            <a:spAutoFit/>
+          </a:bodyPr>
+          <a:lstStyle/>
+          <a:p>
+            <a:pPr algn="l"/>
+            <a:r>
+              <a:rPr sz="1500" b="0" i="0">
+                <a:solidFill>
+                  <a:srgbClr val="CCCCCC"/>
+                </a:solidFill>
+              </a:rPr>
+              <a:t>▸  Gamified practice</a:t>
+            </a:r>
+          </a:p>
+        </p:txBody>
+      </p:sp>
+      <p:sp>
+        <p:nvSpPr>
+          <p:cNvPr id="11" name="TextBox 10"/>
+          <p:cNvSpPr txBox="1"/>
+          <p:nvPr/>
+        </p:nvSpPr>
+        <p:spPr>
+          <a:xfrm>
+            <a:off x="640080" y="4480560"/>
+            <a:ext cx="3291840" cy="731520"/>
+          </a:xfrm>
+          <a:prstGeom prst="rect">
+            <a:avLst/>
+          </a:prstGeom>
+          <a:noFill/>
+        </p:spPr>
+        <p:txBody>
+          <a:bodyPr wrap="square">
+            <a:spAutoFit/>
+          </a:bodyPr>
+          <a:lstStyle/>
+          <a:p>
+            <a:pPr algn="l"/>
+            <a:r>
+              <a:rPr sz="1500" b="0" i="0">
+                <a:solidFill>
+                  <a:srgbClr val="CCCCCC"/>
+                </a:solidFill>
+              </a:rPr>
+              <a:t>▸  AI tutor agent</a:t>
+            </a:r>
+          </a:p>
+        </p:txBody>
+      </p:sp>
+      <p:sp>
+        <p:nvSpPr>
+          <p:cNvPr id="12" name="Rectangle 11"/>
           <p:cNvSpPr/>
           <p:nvPr/>
         </p:nvSpPr>
         <p:spPr>
           <a:xfrm>
-            <a:off x="182880" y="3749039"/>
-            <a:ext cx="3749039" cy="2377440"/>
+            <a:off x="4389120" y="1280160"/>
+            <a:ext cx="3657600" cy="5029200"/>
           </a:xfrm>
           <a:prstGeom prst="rect">
             <a:avLst/>
           </a:prstGeom>
           <a:solidFill>
-            <a:srgbClr val="2A2A14"/>
+            <a:srgbClr val="0A0A1A"/>
           </a:solidFill>
-          <a:ln w="19050">
-            <a:solidFill>
-              <a:srgbClr val="4A4A20"/>
-            </a:solidFill>
+          <a:ln>
+            <a:noFill/>
           </a:ln>
         </p:spPr>
         <p:style>
@@ -7441,104 +7869,23 @@
       </p:sp>
       <p:sp>
         <p:nvSpPr>
-          <p:cNvPr id="11" name="TextBox 10"/>
-          <p:cNvSpPr txBox="1"/>
-          <p:nvPr/>
-        </p:nvSpPr>
-        <p:spPr>
-          <a:xfrm>
-            <a:off x="320040" y="3840479"/>
-            <a:ext cx="3474719" cy="2194560"/>
-          </a:xfrm>
-          <a:prstGeom prst="rect">
-            <a:avLst/>
-          </a:prstGeom>
-          <a:noFill/>
-        </p:spPr>
-        <p:txBody>
-          <a:bodyPr wrap="square">
-            <a:spAutoFit/>
-          </a:bodyPr>
-          <a:lstStyle/>
-          <a:p>
-            <a:pPr algn="l"/>
-            <a:r>
-              <a:rPr sz="1400" b="1">
-                <a:solidFill>
-                  <a:srgbClr val="A0D040"/>
-                </a:solidFill>
-              </a:rPr>
-              <a:t>🤖  AI Tutor</a:t>
-            </a:r>
-          </a:p>
-          <a:p>
-            <a:pPr algn="l">
-              <a:spcBef>
-                <a:spcPts val="400"/>
-              </a:spcBef>
-            </a:pPr>
-            <a:r>
-              <a:rPr sz="1100">
-                <a:solidFill>
-                  <a:srgbClr val="F0F0E0"/>
-                </a:solidFill>
-              </a:rPr>
-              <a:t>▸ Streaming chat + quick-reply chips</a:t>
-            </a:r>
-          </a:p>
-          <a:p>
-            <a:pPr algn="l">
-              <a:spcBef>
-                <a:spcPts val="400"/>
-              </a:spcBef>
-            </a:pPr>
-            <a:r>
-              <a:rPr sz="1100">
-                <a:solidFill>
-                  <a:srgbClr val="F0F0E0"/>
-                </a:solidFill>
-              </a:rPr>
-              <a:t>▸ Inline handshape previews</a:t>
-            </a:r>
-          </a:p>
-          <a:p>
-            <a:pPr algn="l">
-              <a:spcBef>
-                <a:spcPts val="400"/>
-              </a:spcBef>
-            </a:pPr>
-            <a:r>
-              <a:rPr sz="1100">
-                <a:solidFill>
-                  <a:srgbClr val="F0F0E0"/>
-                </a:solidFill>
-              </a:rPr>
-              <a:t>▸ YouTube embeds &amp; lesson cards</a:t>
-            </a:r>
-          </a:p>
-        </p:txBody>
-      </p:sp>
-      <p:sp>
-        <p:nvSpPr>
-          <p:cNvPr id="12" name="Rectangle 11"/>
+          <p:cNvPr id="13" name="Rectangle 12"/>
           <p:cNvSpPr/>
           <p:nvPr/>
         </p:nvSpPr>
         <p:spPr>
           <a:xfrm>
-            <a:off x="4160520" y="3749039"/>
-            <a:ext cx="3749039" cy="2377440"/>
+            <a:off x="4389120" y="1280160"/>
+            <a:ext cx="3657600" cy="640080"/>
           </a:xfrm>
           <a:prstGeom prst="rect">
             <a:avLst/>
           </a:prstGeom>
           <a:solidFill>
-            <a:srgbClr val="2A2A14"/>
+            <a:srgbClr val="FFAA00"/>
           </a:solidFill>
-          <a:ln w="19050">
-            <a:solidFill>
-              <a:srgbClr val="4A4A20"/>
-            </a:solidFill>
+          <a:ln>
+            <a:noFill/>
           </a:ln>
         </p:spPr>
         <p:style>
@@ -7565,14 +7912,48 @@
       </p:sp>
       <p:sp>
         <p:nvSpPr>
-          <p:cNvPr id="13" name="TextBox 12"/>
-          <p:cNvSpPr txBox="1"/>
-          <p:nvPr/>
-        </p:nvSpPr>
-        <p:spPr>
-          <a:xfrm>
-            <a:off x="4297680" y="3840479"/>
-            <a:ext cx="3474719" cy="2194560"/>
+          <p:cNvPr id="14" name="TextBox 13"/>
+          <p:cNvSpPr txBox="1"/>
+          <p:nvPr/>
+        </p:nvSpPr>
+        <p:spPr>
+          <a:xfrm>
+            <a:off x="4480559" y="1298448"/>
+            <a:ext cx="3474720" cy="594360"/>
+          </a:xfrm>
+          <a:prstGeom prst="rect">
+            <a:avLst/>
+          </a:prstGeom>
+          <a:noFill/>
+        </p:spPr>
+        <p:txBody>
+          <a:bodyPr wrap="square">
+            <a:spAutoFit/>
+          </a:bodyPr>
+          <a:lstStyle/>
+          <a:p>
+            <a:pPr algn="ctr"/>
+            <a:r>
+              <a:rPr sz="1600" b="1" i="0">
+                <a:solidFill>
+                  <a:srgbClr val="0D1B2A"/>
+                </a:solidFill>
+              </a:rPr>
+              <a:t>Phase 2</a:t>
+            </a:r>
+          </a:p>
+        </p:txBody>
+      </p:sp>
+      <p:sp>
+        <p:nvSpPr>
+          <p:cNvPr id="15" name="TextBox 14"/>
+          <p:cNvSpPr txBox="1"/>
+          <p:nvPr/>
+        </p:nvSpPr>
+        <p:spPr>
+          <a:xfrm>
+            <a:off x="4572000" y="2011680"/>
+            <a:ext cx="3291840" cy="731520"/>
           </a:xfrm>
           <a:prstGeom prst="rect">
             <a:avLst/>
@@ -7587,82 +7968,137 @@
           <a:p>
             <a:pPr algn="l"/>
             <a:r>
-              <a:rPr sz="1400" b="1">
-                <a:solidFill>
-                  <a:srgbClr val="A0D040"/>
-                </a:solidFill>
-              </a:rPr>
-              <a:t>📷  Translator</a:t>
-            </a:r>
-          </a:p>
-          <a:p>
-            <a:pPr algn="l">
-              <a:spcBef>
-                <a:spcPts val="400"/>
-              </a:spcBef>
-            </a:pPr>
-            <a:r>
-              <a:rPr sz="1100">
-                <a:solidFill>
-                  <a:srgbClr val="F0F0E0"/>
-                </a:solidFill>
-              </a:rPr>
-              <a:t>▸ Live ASL-to-English via webcam</a:t>
-            </a:r>
-          </a:p>
-          <a:p>
-            <a:pPr algn="l">
-              <a:spcBef>
-                <a:spcPts val="400"/>
-              </a:spcBef>
-            </a:pPr>
-            <a:r>
-              <a:rPr sz="1100">
-                <a:solidFill>
-                  <a:srgbClr val="F0F0E0"/>
-                </a:solidFill>
-              </a:rPr>
-              <a:t>▸ Real-time letter accumulation</a:t>
-            </a:r>
-          </a:p>
-          <a:p>
-            <a:pPr algn="l">
-              <a:spcBef>
-                <a:spcPts val="400"/>
-              </a:spcBef>
-            </a:pPr>
-            <a:r>
-              <a:rPr sz="1100">
-                <a:solidFill>
-                  <a:srgbClr val="F0F0E0"/>
-                </a:solidFill>
-              </a:rPr>
-              <a:t>▸ Session history export</a:t>
-            </a:r>
-          </a:p>
-        </p:txBody>
-      </p:sp>
-      <p:sp>
-        <p:nvSpPr>
-          <p:cNvPr id="14" name="Rectangle 13"/>
+              <a:rPr sz="1500" b="0" i="0">
+                <a:solidFill>
+                  <a:srgbClr val="CCCCCC"/>
+                </a:solidFill>
+              </a:rPr>
+              <a:t>▸  Full ASL word library</a:t>
+            </a:r>
+          </a:p>
+        </p:txBody>
+      </p:sp>
+      <p:sp>
+        <p:nvSpPr>
+          <p:cNvPr id="16" name="TextBox 15"/>
+          <p:cNvSpPr txBox="1"/>
+          <p:nvPr/>
+        </p:nvSpPr>
+        <p:spPr>
+          <a:xfrm>
+            <a:off x="4572000" y="2834640"/>
+            <a:ext cx="3291840" cy="731520"/>
+          </a:xfrm>
+          <a:prstGeom prst="rect">
+            <a:avLst/>
+          </a:prstGeom>
+          <a:noFill/>
+        </p:spPr>
+        <p:txBody>
+          <a:bodyPr wrap="square">
+            <a:spAutoFit/>
+          </a:bodyPr>
+          <a:lstStyle/>
+          <a:p>
+            <a:pPr algn="l"/>
+            <a:r>
+              <a:rPr sz="1500" b="0" i="0">
+                <a:solidFill>
+                  <a:srgbClr val="CCCCCC"/>
+                </a:solidFill>
+              </a:rPr>
+              <a:t>▸  LSTM model for words</a:t>
+            </a:r>
+          </a:p>
+        </p:txBody>
+      </p:sp>
+      <p:sp>
+        <p:nvSpPr>
+          <p:cNvPr id="17" name="TextBox 16"/>
+          <p:cNvSpPr txBox="1"/>
+          <p:nvPr/>
+        </p:nvSpPr>
+        <p:spPr>
+          <a:xfrm>
+            <a:off x="4572000" y="3657600"/>
+            <a:ext cx="3291840" cy="731520"/>
+          </a:xfrm>
+          <a:prstGeom prst="rect">
+            <a:avLst/>
+          </a:prstGeom>
+          <a:noFill/>
+        </p:spPr>
+        <p:txBody>
+          <a:bodyPr wrap="square">
+            <a:spAutoFit/>
+          </a:bodyPr>
+          <a:lstStyle/>
+          <a:p>
+            <a:pPr algn="l"/>
+            <a:r>
+              <a:rPr sz="1500" b="0" i="0">
+                <a:solidFill>
+                  <a:srgbClr val="CCCCCC"/>
+                </a:solidFill>
+              </a:rPr>
+              <a:t>▸  Translation feature</a:t>
+            </a:r>
+          </a:p>
+        </p:txBody>
+      </p:sp>
+      <p:sp>
+        <p:nvSpPr>
+          <p:cNvPr id="18" name="TextBox 17"/>
+          <p:cNvSpPr txBox="1"/>
+          <p:nvPr/>
+        </p:nvSpPr>
+        <p:spPr>
+          <a:xfrm>
+            <a:off x="4572000" y="4480560"/>
+            <a:ext cx="3291840" cy="731520"/>
+          </a:xfrm>
+          <a:prstGeom prst="rect">
+            <a:avLst/>
+          </a:prstGeom>
+          <a:noFill/>
+        </p:spPr>
+        <p:txBody>
+          <a:bodyPr wrap="square">
+            <a:spAutoFit/>
+          </a:bodyPr>
+          <a:lstStyle/>
+          <a:p>
+            <a:pPr algn="l"/>
+            <a:r>
+              <a:rPr sz="1500" b="0" i="0">
+                <a:solidFill>
+                  <a:srgbClr val="CCCCCC"/>
+                </a:solidFill>
+              </a:rPr>
+              <a:t>▸  More languages</a:t>
+            </a:r>
+          </a:p>
+        </p:txBody>
+      </p:sp>
+      <p:sp>
+        <p:nvSpPr>
+          <p:cNvPr id="19" name="Rectangle 18"/>
           <p:cNvSpPr/>
           <p:nvPr/>
         </p:nvSpPr>
         <p:spPr>
           <a:xfrm>
-            <a:off x="8138160" y="3749039"/>
-            <a:ext cx="3749039" cy="2377440"/>
+            <a:off x="8321040" y="1280160"/>
+            <a:ext cx="3657600" cy="5029200"/>
           </a:xfrm>
           <a:prstGeom prst="rect">
             <a:avLst/>
           </a:prstGeom>
           <a:solidFill>
-            <a:srgbClr val="2A2A14"/>
+            <a:srgbClr val="0A0A1A"/>
           </a:solidFill>
-          <a:ln w="19050">
-            <a:solidFill>
-              <a:srgbClr val="4A4A20"/>
-            </a:solidFill>
+          <a:ln>
+            <a:noFill/>
           </a:ln>
         </p:spPr>
         <p:style>
@@ -7689,14 +8125,91 @@
       </p:sp>
       <p:sp>
         <p:nvSpPr>
-          <p:cNvPr id="15" name="TextBox 14"/>
-          <p:cNvSpPr txBox="1"/>
-          <p:nvPr/>
-        </p:nvSpPr>
-        <p:spPr>
-          <a:xfrm>
-            <a:off x="8275320" y="3840479"/>
-            <a:ext cx="3474719" cy="2194560"/>
+          <p:cNvPr id="20" name="Rectangle 19"/>
+          <p:cNvSpPr/>
+          <p:nvPr/>
+        </p:nvSpPr>
+        <p:spPr>
+          <a:xfrm>
+            <a:off x="8321040" y="1280160"/>
+            <a:ext cx="3657600" cy="640080"/>
+          </a:xfrm>
+          <a:prstGeom prst="rect">
+            <a:avLst/>
+          </a:prstGeom>
+          <a:solidFill>
+            <a:srgbClr val="00FFAA"/>
+          </a:solidFill>
+          <a:ln>
+            <a:noFill/>
+          </a:ln>
+        </p:spPr>
+        <p:style>
+          <a:lnRef idx="1">
+            <a:schemeClr val="accent1"/>
+          </a:lnRef>
+          <a:fillRef idx="3">
+            <a:schemeClr val="accent1"/>
+          </a:fillRef>
+          <a:effectRef idx="2">
+            <a:schemeClr val="accent1"/>
+          </a:effectRef>
+          <a:fontRef idx="minor">
+            <a:schemeClr val="lt1"/>
+          </a:fontRef>
+        </p:style>
+        <p:txBody>
+          <a:bodyPr rtlCol="0" anchor="ctr"/>
+          <a:lstStyle/>
+          <a:p>
+            <a:pPr algn="ctr"/>
+          </a:p>
+        </p:txBody>
+      </p:sp>
+      <p:sp>
+        <p:nvSpPr>
+          <p:cNvPr id="21" name="TextBox 20"/>
+          <p:cNvSpPr txBox="1"/>
+          <p:nvPr/>
+        </p:nvSpPr>
+        <p:spPr>
+          <a:xfrm>
+            <a:off x="8412480" y="1298448"/>
+            <a:ext cx="3474720" cy="594360"/>
+          </a:xfrm>
+          <a:prstGeom prst="rect">
+            <a:avLst/>
+          </a:prstGeom>
+          <a:noFill/>
+        </p:spPr>
+        <p:txBody>
+          <a:bodyPr wrap="square">
+            <a:spAutoFit/>
+          </a:bodyPr>
+          <a:lstStyle/>
+          <a:p>
+            <a:pPr algn="ctr"/>
+            <a:r>
+              <a:rPr sz="1600" b="1" i="0">
+                <a:solidFill>
+                  <a:srgbClr val="0D1B2A"/>
+                </a:solidFill>
+              </a:rPr>
+              <a:t>Phase 3</a:t>
+            </a:r>
+          </a:p>
+        </p:txBody>
+      </p:sp>
+      <p:sp>
+        <p:nvSpPr>
+          <p:cNvPr id="22" name="TextBox 21"/>
+          <p:cNvSpPr txBox="1"/>
+          <p:nvPr/>
+        </p:nvSpPr>
+        <p:spPr>
+          <a:xfrm>
+            <a:off x="8503919" y="2011680"/>
+            <a:ext cx="3291840" cy="731520"/>
           </a:xfrm>
           <a:prstGeom prst="rect">
             <a:avLst/>
@@ -7711,57 +8224,114 @@
           <a:p>
             <a:pPr algn="l"/>
             <a:r>
-              <a:rPr sz="1400" b="1">
-                <a:solidFill>
-                  <a:srgbClr val="A0D040"/>
-                </a:solidFill>
-              </a:rPr>
-              <a:t>✍️  Spell Your Name</a:t>
-            </a:r>
-          </a:p>
-          <a:p>
-            <a:pPr algn="l">
-              <a:spcBef>
-                <a:spcPts val="400"/>
-              </a:spcBef>
-            </a:pPr>
-            <a:r>
-              <a:rPr sz="1100">
-                <a:solidFill>
-                  <a:srgbClr val="F0F0E0"/>
-                </a:solidFill>
-              </a:rPr>
-              <a:t>▸ Type your name, sign each letter</a:t>
-            </a:r>
-          </a:p>
-          <a:p>
-            <a:pPr algn="l">
-              <a:spcBef>
-                <a:spcPts val="400"/>
-              </a:spcBef>
-            </a:pPr>
-            <a:r>
-              <a:rPr sz="1100">
-                <a:solidFill>
-                  <a:srgbClr val="F0F0E0"/>
-                </a:solidFill>
-              </a:rPr>
-              <a:t>▸ Live camera feedback per letter</a:t>
-            </a:r>
-          </a:p>
-          <a:p>
-            <a:pPr algn="l">
-              <a:spcBef>
-                <a:spcPts val="400"/>
-              </a:spcBef>
-            </a:pPr>
-            <a:r>
-              <a:rPr sz="1100">
-                <a:solidFill>
-                  <a:srgbClr val="F0F0E0"/>
-                </a:solidFill>
-              </a:rPr>
-              <a:t>▸ Celebrates on completion</a:t>
+              <a:rPr sz="1500" b="0" i="0">
+                <a:solidFill>
+                  <a:srgbClr val="CCCCCC"/>
+                </a:solidFill>
+              </a:rPr>
+              <a:t>▸  Full sentence recognition</a:t>
+            </a:r>
+          </a:p>
+        </p:txBody>
+      </p:sp>
+      <p:sp>
+        <p:nvSpPr>
+          <p:cNvPr id="23" name="TextBox 22"/>
+          <p:cNvSpPr txBox="1"/>
+          <p:nvPr/>
+        </p:nvSpPr>
+        <p:spPr>
+          <a:xfrm>
+            <a:off x="8503919" y="2834640"/>
+            <a:ext cx="3291840" cy="731520"/>
+          </a:xfrm>
+          <a:prstGeom prst="rect">
+            <a:avLst/>
+          </a:prstGeom>
+          <a:noFill/>
+        </p:spPr>
+        <p:txBody>
+          <a:bodyPr wrap="square">
+            <a:spAutoFit/>
+          </a:bodyPr>
+          <a:lstStyle/>
+          <a:p>
+            <a:pPr algn="l"/>
+            <a:r>
+              <a:rPr sz="1500" b="0" i="0">
+                <a:solidFill>
+                  <a:srgbClr val="CCCCCC"/>
+                </a:solidFill>
+              </a:rPr>
+              <a:t>▸  NLP context understanding</a:t>
+            </a:r>
+          </a:p>
+        </p:txBody>
+      </p:sp>
+      <p:sp>
+        <p:nvSpPr>
+          <p:cNvPr id="24" name="TextBox 23"/>
+          <p:cNvSpPr txBox="1"/>
+          <p:nvPr/>
+        </p:nvSpPr>
+        <p:spPr>
+          <a:xfrm>
+            <a:off x="8503919" y="3657600"/>
+            <a:ext cx="3291840" cy="731520"/>
+          </a:xfrm>
+          <a:prstGeom prst="rect">
+            <a:avLst/>
+          </a:prstGeom>
+          <a:noFill/>
+        </p:spPr>
+        <p:txBody>
+          <a:bodyPr wrap="square">
+            <a:spAutoFit/>
+          </a:bodyPr>
+          <a:lstStyle/>
+          <a:p>
+            <a:pPr algn="l"/>
+            <a:r>
+              <a:rPr sz="1500" b="0" i="0">
+                <a:solidFill>
+                  <a:srgbClr val="CCCCCC"/>
+                </a:solidFill>
+              </a:rPr>
+              <a:t>▸  Classroom tools</a:t>
+            </a:r>
+          </a:p>
+        </p:txBody>
+      </p:sp>
+      <p:sp>
+        <p:nvSpPr>
+          <p:cNvPr id="25" name="TextBox 24"/>
+          <p:cNvSpPr txBox="1"/>
+          <p:nvPr/>
+        </p:nvSpPr>
+        <p:spPr>
+          <a:xfrm>
+            <a:off x="8503919" y="4480560"/>
+            <a:ext cx="3291840" cy="731520"/>
+          </a:xfrm>
+          <a:prstGeom prst="rect">
+            <a:avLst/>
+          </a:prstGeom>
+          <a:noFill/>
+        </p:spPr>
+        <p:txBody>
+          <a:bodyPr wrap="square">
+            <a:spAutoFit/>
+          </a:bodyPr>
+          <a:lstStyle/>
+          <a:p>
+            <a:pPr algn="l"/>
+            <a:r>
+              <a:rPr sz="1500" b="0" i="0">
+                <a:solidFill>
+                  <a:srgbClr val="CCCCCC"/>
+                </a:solidFill>
+              </a:rPr>
+              <a:t>▸  Mobile app</a:t>
             </a:r>
           </a:p>
         </p:txBody>
@@ -7780,7 +8350,7 @@
     <p:bg>
       <p:bgPr>
         <a:solidFill>
-          <a:srgbClr val="1A1A08"/>
+          <a:srgbClr val="0D1B2A"/>
         </a:solidFill>
         <a:effectLst/>
       </p:bgPr>
@@ -7801,18 +8371,16 @@
         <p:spPr>
           <a:xfrm>
             <a:off x="0" y="0"/>
-            <a:ext cx="12188952" cy="1005840"/>
+            <a:ext cx="12188952" cy="73152"/>
           </a:xfrm>
           <a:prstGeom prst="rect">
             <a:avLst/>
           </a:prstGeom>
           <a:solidFill>
-            <a:srgbClr val="2A2A14"/>
+            <a:srgbClr val="00D4FF"/>
           </a:solidFill>
-          <a:ln w="25400">
-            <a:solidFill>
-              <a:srgbClr val="A0D040"/>
-            </a:solidFill>
+          <a:ln>
+            <a:noFill/>
           </a:ln>
         </p:spPr>
         <p:style>
@@ -7839,59 +8407,23 @@
       </p:sp>
       <p:sp>
         <p:nvSpPr>
-          <p:cNvPr id="3" name="TextBox 2"/>
-          <p:cNvSpPr txBox="1"/>
-          <p:nvPr/>
-        </p:nvSpPr>
-        <p:spPr>
-          <a:xfrm>
-            <a:off x="365760" y="182880"/>
-            <a:ext cx="11457432" cy="731520"/>
-          </a:xfrm>
-          <a:prstGeom prst="rect">
-            <a:avLst/>
-          </a:prstGeom>
-          <a:noFill/>
-        </p:spPr>
-        <p:txBody>
-          <a:bodyPr wrap="square">
-            <a:spAutoFit/>
-          </a:bodyPr>
-          <a:lstStyle/>
-          <a:p>
-            <a:pPr algn="ctr"/>
-            <a:r>
-              <a:rPr sz="2800" b="1">
-                <a:solidFill>
-                  <a:srgbClr val="A0D040"/>
-                </a:solidFill>
-              </a:rPr>
-              <a:t>What's Next</a:t>
-            </a:r>
-          </a:p>
-        </p:txBody>
-      </p:sp>
-      <p:sp>
-        <p:nvSpPr>
-          <p:cNvPr id="4" name="Rectangle 3"/>
+          <p:cNvPr id="3" name="Rectangle 2"/>
           <p:cNvSpPr/>
           <p:nvPr/>
         </p:nvSpPr>
         <p:spPr>
           <a:xfrm>
-            <a:off x="182880" y="1188720"/>
-            <a:ext cx="5669280" cy="2377440"/>
+            <a:off x="0" y="6784848"/>
+            <a:ext cx="12188952" cy="73152"/>
           </a:xfrm>
           <a:prstGeom prst="rect">
             <a:avLst/>
           </a:prstGeom>
           <a:solidFill>
-            <a:srgbClr val="2A2A14"/>
+            <a:srgbClr val="7C3AFF"/>
           </a:solidFill>
-          <a:ln w="19050">
-            <a:solidFill>
-              <a:srgbClr val="4A4A20"/>
-            </a:solidFill>
+          <a:ln>
+            <a:noFill/>
           </a:ln>
         </p:spPr>
         <p:style>
@@ -7918,89 +8450,126 @@
       </p:sp>
       <p:sp>
         <p:nvSpPr>
+          <p:cNvPr id="4" name="TextBox 3"/>
+          <p:cNvSpPr txBox="1"/>
+          <p:nvPr/>
+        </p:nvSpPr>
+        <p:spPr>
+          <a:xfrm>
+            <a:off x="5029200" y="731520"/>
+            <a:ext cx="2103120" cy="1828800"/>
+          </a:xfrm>
+          <a:prstGeom prst="rect">
+            <a:avLst/>
+          </a:prstGeom>
+          <a:noFill/>
+        </p:spPr>
+        <p:txBody>
+          <a:bodyPr wrap="square">
+            <a:spAutoFit/>
+          </a:bodyPr>
+          <a:lstStyle/>
+          <a:p>
+            <a:pPr algn="ctr"/>
+            <a:r>
+              <a:rPr sz="8000" b="0" i="0">
+                <a:solidFill>
+                  <a:srgbClr val="FFFFFF"/>
+                </a:solidFill>
+              </a:rPr>
+              <a:t>🤟</a:t>
+            </a:r>
+          </a:p>
+        </p:txBody>
+      </p:sp>
+      <p:sp>
+        <p:nvSpPr>
           <p:cNvPr id="5" name="TextBox 4"/>
           <p:cNvSpPr txBox="1"/>
           <p:nvPr/>
         </p:nvSpPr>
         <p:spPr>
           <a:xfrm>
-            <a:off x="320040" y="1280160"/>
-            <a:ext cx="5394960" cy="2194560"/>
-          </a:xfrm>
-          <a:prstGeom prst="rect">
-            <a:avLst/>
-          </a:prstGeom>
-          <a:noFill/>
-        </p:spPr>
-        <p:txBody>
-          <a:bodyPr wrap="square">
-            <a:spAutoFit/>
-          </a:bodyPr>
-          <a:lstStyle/>
-          <a:p>
-            <a:pPr algn="l"/>
-            <a:r>
-              <a:rPr sz="1400" b="1">
-                <a:solidFill>
-                  <a:srgbClr val="A0D040"/>
-                </a:solidFill>
-              </a:rPr>
-              <a:t>🔤  Word &amp; Phrase Recognition</a:t>
-            </a:r>
-          </a:p>
-          <a:p>
-            <a:pPr algn="l">
-              <a:spcBef>
-                <a:spcPts val="400"/>
-              </a:spcBef>
-            </a:pPr>
-            <a:r>
-              <a:rPr sz="1100">
-                <a:solidFill>
-                  <a:srgbClr val="F0F0E0"/>
-                </a:solidFill>
-              </a:rPr>
-              <a:t>▸ Extend ML model beyond letters</a:t>
-            </a:r>
-          </a:p>
-          <a:p>
-            <a:pPr algn="l">
-              <a:spcBef>
-                <a:spcPts val="400"/>
-              </a:spcBef>
-            </a:pPr>
-            <a:r>
-              <a:rPr sz="1100">
-                <a:solidFill>
-                  <a:srgbClr val="F0F0E0"/>
-                </a:solidFill>
-              </a:rPr>
-              <a:t>▸ Recognize full ASL words &amp; phrases</a:t>
-            </a:r>
-          </a:p>
-        </p:txBody>
-      </p:sp>
-      <p:sp>
-        <p:nvSpPr>
-          <p:cNvPr id="6" name="Rectangle 5"/>
+            <a:off x="914400" y="2560320"/>
+            <a:ext cx="10360152" cy="914400"/>
+          </a:xfrm>
+          <a:prstGeom prst="rect">
+            <a:avLst/>
+          </a:prstGeom>
+          <a:noFill/>
+        </p:spPr>
+        <p:txBody>
+          <a:bodyPr wrap="square">
+            <a:spAutoFit/>
+          </a:bodyPr>
+          <a:lstStyle/>
+          <a:p>
+            <a:pPr algn="ctr"/>
+            <a:r>
+              <a:rPr sz="3600" b="1" i="0">
+                <a:solidFill>
+                  <a:srgbClr val="00D4FF"/>
+                </a:solidFill>
+              </a:rPr>
+              <a:t>Every child deserves a voice.</a:t>
+            </a:r>
+          </a:p>
+        </p:txBody>
+      </p:sp>
+      <p:sp>
+        <p:nvSpPr>
+          <p:cNvPr id="6" name="TextBox 5"/>
+          <p:cNvSpPr txBox="1"/>
+          <p:nvPr/>
+        </p:nvSpPr>
+        <p:spPr>
+          <a:xfrm>
+            <a:off x="1371600" y="3474720"/>
+            <a:ext cx="9445752" cy="1097280"/>
+          </a:xfrm>
+          <a:prstGeom prst="rect">
+            <a:avLst/>
+          </a:prstGeom>
+          <a:noFill/>
+        </p:spPr>
+        <p:txBody>
+          <a:bodyPr wrap="square">
+            <a:spAutoFit/>
+          </a:bodyPr>
+          <a:lstStyle/>
+          <a:p>
+            <a:pPr algn="ctr"/>
+            <a:r>
+              <a:rPr sz="2000" b="0" i="0">
+                <a:solidFill>
+                  <a:srgbClr val="CCCCCC"/>
+                </a:solidFill>
+              </a:rPr>
+              <a:t>SignQuest makes sign language fun, accessible, and effective
+for the children who need it most.</a:t>
+            </a:r>
+          </a:p>
+        </p:txBody>
+      </p:sp>
+      <p:sp>
+        <p:nvSpPr>
+          <p:cNvPr id="7" name="Rectangle 6"/>
           <p:cNvSpPr/>
           <p:nvPr/>
         </p:nvSpPr>
         <p:spPr>
           <a:xfrm>
-            <a:off x="6217920" y="1188720"/>
-            <a:ext cx="5669280" cy="2377440"/>
+            <a:off x="4114800" y="4754880"/>
+            <a:ext cx="3959352" cy="45720"/>
           </a:xfrm>
           <a:prstGeom prst="rect">
             <a:avLst/>
           </a:prstGeom>
           <a:solidFill>
-            <a:srgbClr val="2A2A14"/>
+            <a:srgbClr val="7C3AFF"/>
           </a:solidFill>
-          <a:ln w="19050">
-            <a:solidFill>
-              <a:srgbClr val="4A4A20"/>
-            </a:solidFill>
+          <a:ln>
+            <a:noFill/>
           </a:ln>
         </p:spPr>
         <p:style>
@@ -8027,282 +8596,34 @@
       </p:sp>
       <p:sp>
         <p:nvSpPr>
-          <p:cNvPr id="7" name="TextBox 6"/>
-          <p:cNvSpPr txBox="1"/>
-          <p:nvPr/>
-        </p:nvSpPr>
-        <p:spPr>
-          <a:xfrm>
-            <a:off x="6355080" y="1280160"/>
-            <a:ext cx="5394960" cy="2194560"/>
-          </a:xfrm>
-          <a:prstGeom prst="rect">
-            <a:avLst/>
-          </a:prstGeom>
-          <a:noFill/>
-        </p:spPr>
-        <p:txBody>
-          <a:bodyPr wrap="square">
-            <a:spAutoFit/>
-          </a:bodyPr>
-          <a:lstStyle/>
-          <a:p>
-            <a:pPr algn="l"/>
-            <a:r>
-              <a:rPr sz="1400" b="1">
-                <a:solidFill>
-                  <a:srgbClr val="A0D040"/>
-                </a:solidFill>
-              </a:rPr>
-              <a:t>👥  Multiplayer Mode</a:t>
-            </a:r>
-          </a:p>
-          <a:p>
-            <a:pPr algn="l">
-              <a:spcBef>
-                <a:spcPts val="400"/>
-              </a:spcBef>
-            </a:pPr>
-            <a:r>
-              <a:rPr sz="1100">
-                <a:solidFill>
-                  <a:srgbClr val="F0F0E0"/>
-                </a:solidFill>
-              </a:rPr>
-              <a:t>▸ Sign against friends in real time</a:t>
-            </a:r>
-          </a:p>
-          <a:p>
-            <a:pPr algn="l">
-              <a:spcBef>
-                <a:spcPts val="400"/>
-              </a:spcBef>
-            </a:pPr>
-            <a:r>
-              <a:rPr sz="1100">
-                <a:solidFill>
-                  <a:srgbClr val="F0F0E0"/>
-                </a:solidFill>
-              </a:rPr>
-              <a:t>▸ Leaderboards and social features</a:t>
-            </a:r>
-          </a:p>
-        </p:txBody>
-      </p:sp>
-      <p:sp>
-        <p:nvSpPr>
-          <p:cNvPr id="8" name="Rectangle 7"/>
-          <p:cNvSpPr/>
-          <p:nvPr/>
-        </p:nvSpPr>
-        <p:spPr>
-          <a:xfrm>
-            <a:off x="182880" y="3749039"/>
-            <a:ext cx="5669280" cy="2377440"/>
-          </a:xfrm>
-          <a:prstGeom prst="rect">
-            <a:avLst/>
-          </a:prstGeom>
-          <a:solidFill>
-            <a:srgbClr val="2A2A14"/>
-          </a:solidFill>
-          <a:ln w="19050">
-            <a:solidFill>
-              <a:srgbClr val="4A4A20"/>
-            </a:solidFill>
-          </a:ln>
-        </p:spPr>
-        <p:style>
-          <a:lnRef idx="1">
-            <a:schemeClr val="accent1"/>
-          </a:lnRef>
-          <a:fillRef idx="3">
-            <a:schemeClr val="accent1"/>
-          </a:fillRef>
-          <a:effectRef idx="2">
-            <a:schemeClr val="accent1"/>
-          </a:effectRef>
-          <a:fontRef idx="minor">
-            <a:schemeClr val="lt1"/>
-          </a:fontRef>
-        </p:style>
-        <p:txBody>
-          <a:bodyPr rtlCol="0" anchor="ctr"/>
-          <a:lstStyle/>
-          <a:p>
-            <a:pPr algn="ctr"/>
-          </a:p>
-        </p:txBody>
-      </p:sp>
-      <p:sp>
-        <p:nvSpPr>
-          <p:cNvPr id="9" name="TextBox 8"/>
-          <p:cNvSpPr txBox="1"/>
-          <p:nvPr/>
-        </p:nvSpPr>
-        <p:spPr>
-          <a:xfrm>
-            <a:off x="320040" y="3840479"/>
-            <a:ext cx="5394960" cy="2194560"/>
-          </a:xfrm>
-          <a:prstGeom prst="rect">
-            <a:avLst/>
-          </a:prstGeom>
-          <a:noFill/>
-        </p:spPr>
-        <p:txBody>
-          <a:bodyPr wrap="square">
-            <a:spAutoFit/>
-          </a:bodyPr>
-          <a:lstStyle/>
-          <a:p>
-            <a:pPr algn="l"/>
-            <a:r>
-              <a:rPr sz="1400" b="1">
-                <a:solidFill>
-                  <a:srgbClr val="A0D040"/>
-                </a:solidFill>
-              </a:rPr>
-              <a:t>📱  Mobile App</a:t>
-            </a:r>
-          </a:p>
-          <a:p>
-            <a:pPr algn="l">
-              <a:spcBef>
-                <a:spcPts val="400"/>
-              </a:spcBef>
-            </a:pPr>
-            <a:r>
-              <a:rPr sz="1100">
-                <a:solidFill>
-                  <a:srgbClr val="F0F0E0"/>
-                </a:solidFill>
-              </a:rPr>
-              <a:t>▸ React Native port for iOS/Android</a:t>
-            </a:r>
-          </a:p>
-          <a:p>
-            <a:pPr algn="l">
-              <a:spcBef>
-                <a:spcPts val="400"/>
-              </a:spcBef>
-            </a:pPr>
-            <a:r>
-              <a:rPr sz="1100">
-                <a:solidFill>
-                  <a:srgbClr val="F0F0E0"/>
-                </a:solidFill>
-              </a:rPr>
-              <a:t>▸ Native camera access</a:t>
-            </a:r>
-          </a:p>
-        </p:txBody>
-      </p:sp>
-      <p:sp>
-        <p:nvSpPr>
-          <p:cNvPr id="10" name="Rectangle 9"/>
-          <p:cNvSpPr/>
-          <p:nvPr/>
-        </p:nvSpPr>
-        <p:spPr>
-          <a:xfrm>
-            <a:off x="6217920" y="3749039"/>
-            <a:ext cx="5669280" cy="2377440"/>
-          </a:xfrm>
-          <a:prstGeom prst="rect">
-            <a:avLst/>
-          </a:prstGeom>
-          <a:solidFill>
-            <a:srgbClr val="2A2A14"/>
-          </a:solidFill>
-          <a:ln w="19050">
-            <a:solidFill>
-              <a:srgbClr val="4A4A20"/>
-            </a:solidFill>
-          </a:ln>
-        </p:spPr>
-        <p:style>
-          <a:lnRef idx="1">
-            <a:schemeClr val="accent1"/>
-          </a:lnRef>
-          <a:fillRef idx="3">
-            <a:schemeClr val="accent1"/>
-          </a:fillRef>
-          <a:effectRef idx="2">
-            <a:schemeClr val="accent1"/>
-          </a:effectRef>
-          <a:fontRef idx="minor">
-            <a:schemeClr val="lt1"/>
-          </a:fontRef>
-        </p:style>
-        <p:txBody>
-          <a:bodyPr rtlCol="0" anchor="ctr"/>
-          <a:lstStyle/>
-          <a:p>
-            <a:pPr algn="ctr"/>
-          </a:p>
-        </p:txBody>
-      </p:sp>
-      <p:sp>
-        <p:nvSpPr>
-          <p:cNvPr id="11" name="TextBox 10"/>
-          <p:cNvSpPr txBox="1"/>
-          <p:nvPr/>
-        </p:nvSpPr>
-        <p:spPr>
-          <a:xfrm>
-            <a:off x="6355080" y="3840479"/>
-            <a:ext cx="5394960" cy="2194560"/>
-          </a:xfrm>
-          <a:prstGeom prst="rect">
-            <a:avLst/>
-          </a:prstGeom>
-          <a:noFill/>
-        </p:spPr>
-        <p:txBody>
-          <a:bodyPr wrap="square">
-            <a:spAutoFit/>
-          </a:bodyPr>
-          <a:lstStyle/>
-          <a:p>
-            <a:pPr algn="l"/>
-            <a:r>
-              <a:rPr sz="1400" b="1">
-                <a:solidFill>
-                  <a:srgbClr val="A0D040"/>
-                </a:solidFill>
-              </a:rPr>
-              <a:t>🌍  Other Sign Languages</a:t>
-            </a:r>
-          </a:p>
-          <a:p>
-            <a:pPr algn="l">
-              <a:spcBef>
-                <a:spcPts val="400"/>
-              </a:spcBef>
-            </a:pPr>
-            <a:r>
-              <a:rPr sz="1100">
-                <a:solidFill>
-                  <a:srgbClr val="F0F0E0"/>
-                </a:solidFill>
-              </a:rPr>
-              <a:t>▸ BSL, LSF, Auslan support</a:t>
-            </a:r>
-          </a:p>
-          <a:p>
-            <a:pPr algn="l">
-              <a:spcBef>
-                <a:spcPts val="400"/>
-              </a:spcBef>
-            </a:pPr>
-            <a:r>
-              <a:rPr sz="1100">
-                <a:solidFill>
-                  <a:srgbClr val="F0F0E0"/>
-                </a:solidFill>
-              </a:rPr>
-              <a:t>▸ Serve global Deaf communities</a:t>
+          <p:cNvPr id="8" name="TextBox 7"/>
+          <p:cNvSpPr txBox="1"/>
+          <p:nvPr/>
+        </p:nvSpPr>
+        <p:spPr>
+          <a:xfrm>
+            <a:off x="1371600" y="4937760"/>
+            <a:ext cx="9445752" cy="731520"/>
+          </a:xfrm>
+          <a:prstGeom prst="rect">
+            <a:avLst/>
+          </a:prstGeom>
+          <a:noFill/>
+        </p:spPr>
+        <p:txBody>
+          <a:bodyPr wrap="square">
+            <a:spAutoFit/>
+          </a:bodyPr>
+          <a:lstStyle/>
+          <a:p>
+            <a:pPr algn="ctr"/>
+            <a:r>
+              <a:rPr sz="1600" b="0" i="1">
+                <a:solidFill>
+                  <a:srgbClr val="AAAAAA"/>
+                </a:solidFill>
+              </a:rPr>
+              <a:t>Let's build a world where no child is left without language.</a:t>
             </a:r>
           </a:p>
         </p:txBody>
